--- a/doc/architecture.pptx
+++ b/doc/architecture.pptx
@@ -5,14 +5,15 @@
     <p:sldMasterId id="2147483648" r:id="rId1"/>
   </p:sldMasterIdLst>
   <p:notesMasterIdLst>
-    <p:notesMasterId r:id="rId4"/>
+    <p:notesMasterId r:id="rId5"/>
   </p:notesMasterIdLst>
   <p:handoutMasterIdLst>
-    <p:handoutMasterId r:id="rId5"/>
+    <p:handoutMasterId r:id="rId6"/>
   </p:handoutMasterIdLst>
   <p:sldIdLst>
-    <p:sldId id="1404" r:id="rId2"/>
-    <p:sldId id="1405" r:id="rId3"/>
+    <p:sldId id="1406" r:id="rId2"/>
+    <p:sldId id="1404" r:id="rId3"/>
+    <p:sldId id="1405" r:id="rId4"/>
   </p:sldIdLst>
   <p:sldSz cx="9906000" cy="6858000" type="A4"/>
   <p:notesSz cx="6669088" cy="9926638"/>
@@ -715,6 +716,110 @@
   <p:cSld>
     <p:spTree>
       <p:nvGrpSpPr>
+        <p:cNvPr id="1" name="">
+          <a:extLst>
+            <a:ext uri="{FF2B5EF4-FFF2-40B4-BE49-F238E27FC236}">
+              <a16:creationId xmlns:a16="http://schemas.microsoft.com/office/drawing/2014/main" id="{1A716A2E-C513-859D-A92D-E4627EE47C9D}"/>
+            </a:ext>
+          </a:extLst>
+        </p:cNvPr>
+        <p:cNvGrpSpPr/>
+        <p:nvPr/>
+      </p:nvGrpSpPr>
+      <p:grpSpPr>
+        <a:xfrm>
+          <a:off x="0" y="0"/>
+          <a:ext cx="0" cy="0"/>
+          <a:chOff x="0" y="0"/>
+          <a:chExt cx="0" cy="0"/>
+        </a:xfrm>
+      </p:grpSpPr>
+      <p:sp>
+        <p:nvSpPr>
+          <p:cNvPr id="2" name="Folienbildplatzhalter 1">
+            <a:extLst>
+              <a:ext uri="{FF2B5EF4-FFF2-40B4-BE49-F238E27FC236}">
+                <a16:creationId xmlns:a16="http://schemas.microsoft.com/office/drawing/2014/main" id="{54C4F9BC-157A-EA0B-5E07-0C72A32EDBDD}"/>
+              </a:ext>
+            </a:extLst>
+          </p:cNvPr>
+          <p:cNvSpPr>
+            <a:spLocks noGrp="1" noRot="1" noChangeAspect="1"/>
+          </p:cNvSpPr>
+          <p:nvPr>
+            <p:ph type="sldImg"/>
+          </p:nvPr>
+        </p:nvSpPr>
+        <p:spPr/>
+      </p:sp>
+      <p:sp>
+        <p:nvSpPr>
+          <p:cNvPr id="3" name="Notizenplatzhalter 2">
+            <a:extLst>
+              <a:ext uri="{FF2B5EF4-FFF2-40B4-BE49-F238E27FC236}">
+                <a16:creationId xmlns:a16="http://schemas.microsoft.com/office/drawing/2014/main" id="{AF5E9CD2-7A3E-C459-2671-8DCA9A7EFB11}"/>
+              </a:ext>
+            </a:extLst>
+          </p:cNvPr>
+          <p:cNvSpPr>
+            <a:spLocks noGrp="1"/>
+          </p:cNvSpPr>
+          <p:nvPr>
+            <p:ph type="body" idx="1"/>
+          </p:nvPr>
+        </p:nvSpPr>
+        <p:spPr/>
+        <p:txBody>
+          <a:bodyPr/>
+          <a:lstStyle/>
+          <a:p>
+            <a:endParaRPr lang="de-DE" dirty="0"/>
+          </a:p>
+        </p:txBody>
+      </p:sp>
+      <p:sp>
+        <p:nvSpPr>
+          <p:cNvPr id="4" name="Datumsplatzhalter 3">
+            <a:extLst>
+              <a:ext uri="{FF2B5EF4-FFF2-40B4-BE49-F238E27FC236}">
+                <a16:creationId xmlns:a16="http://schemas.microsoft.com/office/drawing/2014/main" id="{F21E31A4-1998-5A69-A69D-EDDA867B6601}"/>
+              </a:ext>
+            </a:extLst>
+          </p:cNvPr>
+          <p:cNvSpPr>
+            <a:spLocks noGrp="1"/>
+          </p:cNvSpPr>
+          <p:nvPr>
+            <p:ph type="dt" idx="10"/>
+          </p:nvPr>
+        </p:nvSpPr>
+        <p:spPr/>
+        <p:txBody>
+          <a:bodyPr/>
+          <a:lstStyle/>
+          <a:p>
+            <a:endParaRPr lang="de-DE"/>
+          </a:p>
+        </p:txBody>
+      </p:sp>
+    </p:spTree>
+    <p:extLst>
+      <p:ext uri="{BB962C8B-B14F-4D97-AF65-F5344CB8AC3E}">
+        <p14:creationId xmlns:p14="http://schemas.microsoft.com/office/powerpoint/2010/main" val="3808568338"/>
+      </p:ext>
+    </p:extLst>
+  </p:cSld>
+  <p:clrMapOvr>
+    <a:masterClrMapping/>
+  </p:clrMapOvr>
+</p:notes>
+</file>
+
+<file path=ppt/notesSlides/notesSlide2.xml><?xml version="1.0" encoding="utf-8"?>
+<p:notes xmlns:a="http://schemas.openxmlformats.org/drawingml/2006/main" xmlns:r="http://schemas.openxmlformats.org/officeDocument/2006/relationships" xmlns:p="http://schemas.openxmlformats.org/presentationml/2006/main">
+  <p:cSld>
+    <p:spTree>
+      <p:nvGrpSpPr>
         <p:cNvPr id="1" name=""/>
         <p:cNvGrpSpPr/>
         <p:nvPr/>
@@ -790,7 +895,7 @@
 </p:notes>
 </file>
 
-<file path=ppt/notesSlides/notesSlide2.xml><?xml version="1.0" encoding="utf-8"?>
+<file path=ppt/notesSlides/notesSlide3.xml><?xml version="1.0" encoding="utf-8"?>
 <p:notes xmlns:a="http://schemas.openxmlformats.org/drawingml/2006/main" xmlns:r="http://schemas.openxmlformats.org/officeDocument/2006/relationships" xmlns:p="http://schemas.openxmlformats.org/presentationml/2006/main">
   <p:cSld>
     <p:spTree>
@@ -5699,6 +5804,266 @@
   <p:cSld>
     <p:spTree>
       <p:nvGrpSpPr>
+        <p:cNvPr id="1" name="">
+          <a:extLst>
+            <a:ext uri="{FF2B5EF4-FFF2-40B4-BE49-F238E27FC236}">
+              <a16:creationId xmlns:a16="http://schemas.microsoft.com/office/drawing/2014/main" id="{D8C2017B-B994-87B0-A158-FF6CDF06BB2E}"/>
+            </a:ext>
+          </a:extLst>
+        </p:cNvPr>
+        <p:cNvGrpSpPr/>
+        <p:nvPr/>
+      </p:nvGrpSpPr>
+      <p:grpSpPr>
+        <a:xfrm>
+          <a:off x="0" y="0"/>
+          <a:ext cx="0" cy="0"/>
+          <a:chOff x="0" y="0"/>
+          <a:chExt cx="0" cy="0"/>
+        </a:xfrm>
+      </p:grpSpPr>
+      <p:sp>
+        <p:nvSpPr>
+          <p:cNvPr id="3" name="Foliennummernplatzhalter 2">
+            <a:extLst>
+              <a:ext uri="{FF2B5EF4-FFF2-40B4-BE49-F238E27FC236}">
+                <a16:creationId xmlns:a16="http://schemas.microsoft.com/office/drawing/2014/main" id="{4426D21A-65E2-4A69-26EC-8B97B63EBF77}"/>
+              </a:ext>
+            </a:extLst>
+          </p:cNvPr>
+          <p:cNvSpPr>
+            <a:spLocks noGrp="1"/>
+          </p:cNvSpPr>
+          <p:nvPr>
+            <p:ph type="sldNum" sz="quarter" idx="4"/>
+          </p:nvPr>
+        </p:nvSpPr>
+        <p:spPr/>
+        <p:txBody>
+          <a:bodyPr/>
+          <a:lstStyle/>
+          <a:p>
+            <a:fld id="{E1A12CDA-83D3-4EF4-BC0D-8D5887487634}" type="slidenum">
+              <a:rPr lang="de-DE" smtClean="0"/>
+              <a:pPr/>
+              <a:t>1</a:t>
+            </a:fld>
+            <a:endParaRPr lang="de-DE" dirty="0"/>
+          </a:p>
+        </p:txBody>
+      </p:sp>
+      <p:sp>
+        <p:nvSpPr>
+          <p:cNvPr id="4" name="Titel 3">
+            <a:extLst>
+              <a:ext uri="{FF2B5EF4-FFF2-40B4-BE49-F238E27FC236}">
+                <a16:creationId xmlns:a16="http://schemas.microsoft.com/office/drawing/2014/main" id="{22FA3328-5D62-192C-E188-370B805EFD56}"/>
+              </a:ext>
+            </a:extLst>
+          </p:cNvPr>
+          <p:cNvSpPr>
+            <a:spLocks noGrp="1"/>
+          </p:cNvSpPr>
+          <p:nvPr>
+            <p:ph type="title"/>
+          </p:nvPr>
+        </p:nvSpPr>
+        <p:spPr>
+          <a:xfrm>
+            <a:off x="633413" y="763588"/>
+            <a:ext cx="9272587" cy="981794"/>
+          </a:xfrm>
+        </p:spPr>
+        <p:txBody>
+          <a:bodyPr/>
+          <a:lstStyle/>
+          <a:p>
+            <a:r>
+              <a:rPr lang="en-GB" noProof="0" dirty="0"/>
+              <a:t>EZB Monitor – “hub”</a:t>
+            </a:r>
+          </a:p>
+        </p:txBody>
+      </p:sp>
+      <p:sp>
+        <p:nvSpPr>
+          <p:cNvPr id="5" name="Inhaltsplatzhalter 4">
+            <a:extLst>
+              <a:ext uri="{FF2B5EF4-FFF2-40B4-BE49-F238E27FC236}">
+                <a16:creationId xmlns:a16="http://schemas.microsoft.com/office/drawing/2014/main" id="{35887DFE-30E9-02CD-95AF-5709D5E14DEA}"/>
+              </a:ext>
+            </a:extLst>
+          </p:cNvPr>
+          <p:cNvSpPr>
+            <a:spLocks noGrp="1"/>
+          </p:cNvSpPr>
+          <p:nvPr>
+            <p:ph sz="quarter" idx="10"/>
+          </p:nvPr>
+        </p:nvSpPr>
+        <p:spPr>
+          <a:xfrm>
+            <a:off x="633600" y="1916707"/>
+            <a:ext cx="8639175" cy="4392613"/>
+          </a:xfrm>
+        </p:spPr>
+        <p:txBody>
+          <a:bodyPr/>
+          <a:lstStyle/>
+          <a:p>
+            <a:pPr marL="342900" indent="-342900">
+              <a:lnSpc>
+                <a:spcPct val="100000"/>
+              </a:lnSpc>
+              <a:buFont typeface="Arial" panose="020B0604020202020204" pitchFamily="34" charset="0"/>
+              <a:buChar char="•"/>
+            </a:pPr>
+            <a:r>
+              <a:rPr lang="en-GB" sz="2400" dirty="0"/>
+              <a:t>Website combines </a:t>
+            </a:r>
+            <a:r>
+              <a:rPr lang="en-GB" sz="2400" dirty="0" err="1"/>
+              <a:t>disparat</a:t>
+            </a:r>
+            <a:r>
+              <a:rPr lang="en-GB" sz="2400" dirty="0"/>
+              <a:t> information</a:t>
+            </a:r>
+            <a:br>
+              <a:rPr lang="en-GB" sz="2400" dirty="0"/>
+            </a:br>
+            <a:endParaRPr lang="en-GB" sz="2400" dirty="0"/>
+          </a:p>
+          <a:p>
+            <a:pPr marL="342900" indent="-342900">
+              <a:lnSpc>
+                <a:spcPct val="100000"/>
+              </a:lnSpc>
+              <a:buFont typeface="Arial" panose="020B0604020202020204" pitchFamily="34" charset="0"/>
+              <a:buChar char="•"/>
+            </a:pPr>
+            <a:r>
+              <a:rPr lang="en-GB" sz="2400" i="1" dirty="0"/>
+              <a:t>Daily </a:t>
+            </a:r>
+            <a:r>
+              <a:rPr lang="en-GB" sz="2400" dirty="0"/>
+              <a:t>digest of selected country stats </a:t>
+            </a:r>
+            <a:br>
+              <a:rPr lang="en-GB" sz="2400" dirty="0"/>
+            </a:br>
+            <a:r>
+              <a:rPr lang="en-GB" sz="2400" dirty="0"/>
+              <a:t>from </a:t>
+            </a:r>
+            <a:r>
+              <a:rPr lang="en-GB" sz="2400" dirty="0" err="1"/>
+              <a:t>Ameco</a:t>
+            </a:r>
+            <a:r>
+              <a:rPr lang="en-GB" sz="2400" dirty="0"/>
+              <a:t> and Eurostat</a:t>
+            </a:r>
+          </a:p>
+          <a:p>
+            <a:pPr marL="342900" indent="-342900">
+              <a:lnSpc>
+                <a:spcPct val="100000"/>
+              </a:lnSpc>
+              <a:buFont typeface="Arial" panose="020B0604020202020204" pitchFamily="34" charset="0"/>
+              <a:buChar char="•"/>
+            </a:pPr>
+            <a:r>
+              <a:rPr lang="en-GB" sz="2400" i="1" dirty="0"/>
+              <a:t>~Weekly </a:t>
+            </a:r>
+            <a:r>
+              <a:rPr lang="en-GB" sz="2400" dirty="0"/>
+              <a:t>digest of ECB  communications and speeches</a:t>
+            </a:r>
+          </a:p>
+          <a:p>
+            <a:pPr marL="1057275" lvl="2" indent="-342900">
+              <a:lnSpc>
+                <a:spcPct val="150000"/>
+              </a:lnSpc>
+              <a:buFont typeface="Arial" panose="020B0604020202020204" pitchFamily="34" charset="0"/>
+              <a:buChar char="•"/>
+            </a:pPr>
+            <a:r>
+              <a:rPr lang="en-GB" sz="2400" dirty="0"/>
+              <a:t>=&gt; LLM computed “scores” on ECB members and board</a:t>
+            </a:r>
+          </a:p>
+          <a:p>
+            <a:pPr marL="342900" indent="-342900">
+              <a:buFont typeface="Arial" panose="020B0604020202020204" pitchFamily="34" charset="0"/>
+              <a:buChar char="•"/>
+            </a:pPr>
+            <a:r>
+              <a:rPr lang="en-GB" sz="2400" dirty="0"/>
+              <a:t>Editorials towards board decisions</a:t>
+            </a:r>
+          </a:p>
+          <a:p>
+            <a:pPr marL="342900" indent="-342900">
+              <a:buFont typeface="Arial" panose="020B0604020202020204" pitchFamily="34" charset="0"/>
+              <a:buChar char="•"/>
+            </a:pPr>
+            <a:r>
+              <a:rPr lang="en-GB" sz="2400" dirty="0"/>
+              <a:t>Editorials around academic research </a:t>
+            </a:r>
+          </a:p>
+          <a:p>
+            <a:pPr marL="342900" indent="-342900">
+              <a:lnSpc>
+                <a:spcPct val="100000"/>
+              </a:lnSpc>
+              <a:buFont typeface="Arial" panose="020B0604020202020204" pitchFamily="34" charset="0"/>
+              <a:buChar char="•"/>
+            </a:pPr>
+            <a:endParaRPr lang="en-GB" sz="2400" noProof="0" dirty="0"/>
+          </a:p>
+          <a:p>
+            <a:pPr marL="342900" indent="-342900">
+              <a:buFont typeface="Arial" panose="020B0604020202020204" pitchFamily="34" charset="0"/>
+              <a:buChar char="•"/>
+            </a:pPr>
+            <a:endParaRPr lang="en-GB" sz="2400" dirty="0"/>
+          </a:p>
+          <a:p>
+            <a:pPr marL="342900" indent="-342900">
+              <a:buFont typeface="Arial" panose="020B0604020202020204" pitchFamily="34" charset="0"/>
+              <a:buChar char="•"/>
+            </a:pPr>
+            <a:endParaRPr lang="en-GB" sz="2400" dirty="0"/>
+          </a:p>
+          <a:p>
+            <a:endParaRPr lang="en-GB" sz="2400" noProof="0" dirty="0"/>
+          </a:p>
+        </p:txBody>
+      </p:sp>
+    </p:spTree>
+    <p:extLst>
+      <p:ext uri="{BB962C8B-B14F-4D97-AF65-F5344CB8AC3E}">
+        <p14:creationId xmlns:p14="http://schemas.microsoft.com/office/powerpoint/2010/main" val="2044547419"/>
+      </p:ext>
+    </p:extLst>
+  </p:cSld>
+  <p:clrMapOvr>
+    <a:masterClrMapping/>
+  </p:clrMapOvr>
+</p:sld>
+</file>
+
+<file path=ppt/slides/slide2.xml><?xml version="1.0" encoding="utf-8"?>
+<p:sld xmlns:a="http://schemas.openxmlformats.org/drawingml/2006/main" xmlns:r="http://schemas.openxmlformats.org/officeDocument/2006/relationships" xmlns:p="http://schemas.openxmlformats.org/presentationml/2006/main">
+  <p:cSld>
+    <p:spTree>
+      <p:nvGrpSpPr>
         <p:cNvPr id="1" name=""/>
         <p:cNvGrpSpPr/>
         <p:nvPr/>
@@ -5729,7 +6094,7 @@
             <a:fld id="{E1A12CDA-83D3-4EF4-BC0D-8D5887487634}" type="slidenum">
               <a:rPr lang="de-DE" smtClean="0"/>
               <a:pPr/>
-              <a:t>1</a:t>
+              <a:t>2</a:t>
             </a:fld>
             <a:endParaRPr lang="de-DE" dirty="0"/>
           </a:p>
@@ -5790,19 +6155,19 @@
               <a:buChar char="•"/>
             </a:pPr>
             <a:r>
-              <a:rPr lang="en-GB" noProof="0" dirty="0"/>
+              <a:rPr lang="en-GB" sz="2400" noProof="0" dirty="0"/>
               <a:t>Website/Portal to communicate research</a:t>
             </a:r>
             <a:br>
-              <a:rPr lang="en-GB" noProof="0" dirty="0"/>
+              <a:rPr lang="en-GB" sz="2400" noProof="0" dirty="0"/>
             </a:br>
             <a:r>
-              <a:rPr lang="en-GB" noProof="0" dirty="0">
+              <a:rPr lang="en-GB" sz="2400" noProof="0" dirty="0">
                 <a:hlinkClick r:id="rId3"/>
               </a:rPr>
               <a:t>https://ecb-monitor.zew.de</a:t>
             </a:r>
-            <a:endParaRPr lang="en-GB" noProof="0" dirty="0"/>
+            <a:endParaRPr lang="en-GB" sz="2400" noProof="0" dirty="0"/>
           </a:p>
           <a:p>
             <a:pPr marL="342900" indent="-342900">
@@ -5813,15 +6178,15 @@
               <a:buChar char="•"/>
             </a:pPr>
             <a:r>
-              <a:rPr lang="en-GB" dirty="0"/>
+              <a:rPr lang="en-GB" sz="2400" dirty="0"/>
               <a:t>S</a:t>
             </a:r>
             <a:r>
-              <a:rPr lang="en-GB" noProof="0" dirty="0" err="1"/>
+              <a:rPr lang="en-GB" sz="2400" noProof="0" dirty="0" err="1"/>
               <a:t>ubdomain</a:t>
             </a:r>
             <a:r>
-              <a:rPr lang="en-GB" noProof="0" dirty="0"/>
+              <a:rPr lang="en-GB" sz="2400" noProof="0" dirty="0"/>
               <a:t> of ZEW Institute, hosted at ZEW Institute</a:t>
             </a:r>
           </a:p>
@@ -5834,10 +6199,10 @@
               <a:buChar char="•"/>
             </a:pPr>
             <a:r>
-              <a:rPr lang="en-GB" dirty="0"/>
+              <a:rPr lang="en-GB" sz="2400" dirty="0"/>
               <a:t>Separate webserver, hosted at ZEW institute, at “DMZ”</a:t>
             </a:r>
-            <a:endParaRPr lang="en-GB" noProof="0" dirty="0"/>
+            <a:endParaRPr lang="en-GB" sz="2400" noProof="0" dirty="0"/>
           </a:p>
           <a:p>
             <a:pPr marL="342900" indent="-342900">
@@ -5848,7 +6213,7 @@
               <a:buChar char="•"/>
             </a:pPr>
             <a:r>
-              <a:rPr lang="en-GB" dirty="0"/>
+              <a:rPr lang="en-GB" sz="2400" dirty="0"/>
               <a:t>ZEW corporate design – cooperation with KOM</a:t>
             </a:r>
           </a:p>
@@ -5861,7 +6226,7 @@
               <a:buChar char="•"/>
             </a:pPr>
             <a:r>
-              <a:rPr lang="en-GB" dirty="0"/>
+              <a:rPr lang="en-GB" sz="2400" dirty="0"/>
               <a:t>Separate visitor statistics – no cookies</a:t>
             </a:r>
           </a:p>
@@ -5874,7 +6239,7 @@
               <a:buChar char="•"/>
             </a:pPr>
             <a:r>
-              <a:rPr lang="en-GB" dirty="0"/>
+              <a:rPr lang="en-GB" sz="2400" dirty="0"/>
               <a:t>Based on open source software</a:t>
             </a:r>
           </a:p>
@@ -5884,14 +6249,14 @@
               <a:buChar char="•"/>
             </a:pPr>
             <a:r>
-              <a:rPr lang="en-GB" sz="1800" dirty="0"/>
+              <a:rPr lang="en-GB" dirty="0"/>
               <a:t>Debian, Apache, Python, Flask, </a:t>
             </a:r>
             <a:r>
-              <a:rPr lang="en-GB" sz="1800" dirty="0" err="1"/>
+              <a:rPr lang="en-GB" dirty="0" err="1"/>
               <a:t>Echarts</a:t>
             </a:r>
-            <a:endParaRPr lang="en-GB" sz="1800" dirty="0"/>
+            <a:endParaRPr lang="en-GB" dirty="0"/>
           </a:p>
           <a:p>
             <a:pPr marL="792163" lvl="1" indent="-342900">
@@ -5899,18 +6264,9 @@
               <a:buChar char="•"/>
             </a:pPr>
             <a:r>
-              <a:rPr lang="en-GB" sz="1800"/>
-              <a:t>coding</a:t>
-            </a:r>
-            <a:r>
-              <a:rPr lang="en-GB" sz="1800" dirty="0"/>
-              <a:t>, data </a:t>
-            </a:r>
-            <a:r>
-              <a:rPr lang="en-GB" sz="1800"/>
-              <a:t>and content as git repository</a:t>
-            </a:r>
-            <a:endParaRPr lang="en-GB" sz="1800" dirty="0"/>
+              <a:rPr lang="en-GB" dirty="0"/>
+              <a:t>coding, data and content as git repository</a:t>
+            </a:r>
           </a:p>
           <a:p>
             <a:pPr marL="342900" indent="-342900">
@@ -5918,7 +6274,7 @@
               <a:buChar char="•"/>
             </a:pPr>
             <a:r>
-              <a:rPr lang="en-GB" dirty="0"/>
+              <a:rPr lang="en-GB" sz="2400" dirty="0"/>
               <a:t> </a:t>
             </a:r>
           </a:p>
@@ -5930,7 +6286,7 @@
               <a:buFont typeface="Arial" panose="020B0604020202020204" pitchFamily="34" charset="0"/>
               <a:buChar char="•"/>
             </a:pPr>
-            <a:endParaRPr lang="en-GB" dirty="0"/>
+            <a:endParaRPr lang="en-GB" sz="2400" dirty="0"/>
           </a:p>
           <a:p>
             <a:pPr marL="342900" indent="-342900">
@@ -5940,24 +6296,24 @@
               <a:buFont typeface="Arial" panose="020B0604020202020204" pitchFamily="34" charset="0"/>
               <a:buChar char="•"/>
             </a:pPr>
-            <a:endParaRPr lang="en-GB" noProof="0" dirty="0"/>
+            <a:endParaRPr lang="en-GB" sz="2400" noProof="0" dirty="0"/>
           </a:p>
           <a:p>
             <a:pPr marL="342900" indent="-342900">
               <a:buFont typeface="Arial" panose="020B0604020202020204" pitchFamily="34" charset="0"/>
               <a:buChar char="•"/>
             </a:pPr>
-            <a:endParaRPr lang="en-GB" dirty="0"/>
+            <a:endParaRPr lang="en-GB" sz="2400" dirty="0"/>
           </a:p>
           <a:p>
             <a:pPr marL="342900" indent="-342900">
               <a:buFont typeface="Arial" panose="020B0604020202020204" pitchFamily="34" charset="0"/>
               <a:buChar char="•"/>
             </a:pPr>
-            <a:endParaRPr lang="en-GB" dirty="0"/>
-          </a:p>
-          <a:p>
-            <a:endParaRPr lang="en-GB" noProof="0" dirty="0"/>
+            <a:endParaRPr lang="en-GB" sz="2400" dirty="0"/>
+          </a:p>
+          <a:p>
+            <a:endParaRPr lang="en-GB" sz="2400" noProof="0" dirty="0"/>
           </a:p>
         </p:txBody>
       </p:sp>
@@ -5974,7 +6330,7 @@
 </p:sld>
 </file>
 
-<file path=ppt/slides/slide2.xml><?xml version="1.0" encoding="utf-8"?>
+<file path=ppt/slides/slide3.xml><?xml version="1.0" encoding="utf-8"?>
 <p:sld xmlns:a="http://schemas.openxmlformats.org/drawingml/2006/main" xmlns:r="http://schemas.openxmlformats.org/officeDocument/2006/relationships" xmlns:p="http://schemas.openxmlformats.org/presentationml/2006/main">
   <p:cSld>
     <p:spTree>
@@ -6146,7 +6502,7 @@
           <a:p>
             <a:r>
               <a:rPr lang="en-GB" noProof="0" dirty="0"/>
-              <a:t>EZB Monitor - GIT</a:t>
+              <a:t>EZB Monitor – Data Flow</a:t>
             </a:r>
           </a:p>
         </p:txBody>
@@ -6447,22 +6803,15 @@
           <a:p>
             <a:pPr algn="ctr"/>
             <a:r>
-              <a:rPr lang="de-DE" dirty="0" err="1">
+              <a:rPr lang="de-DE" dirty="0">
                 <a:solidFill>
                   <a:schemeClr val="tx1"/>
                 </a:solidFill>
                 <a:latin typeface="Arial" panose="020B0604020202020204" pitchFamily="34" charset="0"/>
                 <a:cs typeface="Arial" panose="020B0604020202020204" pitchFamily="34" charset="0"/>
               </a:rPr>
-              <a:t>programming</a:t>
-            </a:r>
-            <a:endParaRPr lang="de-DE" dirty="0">
-              <a:solidFill>
-                <a:schemeClr val="tx1"/>
-              </a:solidFill>
-              <a:latin typeface="Arial" panose="020B0604020202020204" pitchFamily="34" charset="0"/>
-              <a:cs typeface="Arial" panose="020B0604020202020204" pitchFamily="34" charset="0"/>
-            </a:endParaRPr>
+              <a:t>Editorials</a:t>
+            </a:r>
           </a:p>
         </p:txBody>
       </p:sp>
@@ -6515,17 +6864,66 @@
           <a:p>
             <a:pPr algn="ctr"/>
             <a:r>
-              <a:rPr lang="de-DE" dirty="0" err="1">
+              <a:rPr lang="de-DE" sz="1400" dirty="0">
                 <a:solidFill>
                   <a:schemeClr val="tx1"/>
                 </a:solidFill>
                 <a:latin typeface="Arial" panose="020B0604020202020204" pitchFamily="34" charset="0"/>
                 <a:cs typeface="Arial" panose="020B0604020202020204" pitchFamily="34" charset="0"/>
               </a:rPr>
-              <a:t>research</a:t>
-            </a:r>
-            <a:r>
-              <a:rPr lang="de-DE" dirty="0">
+              <a:t>LLM </a:t>
+            </a:r>
+            <a:r>
+              <a:rPr lang="de-DE" sz="1400" dirty="0" err="1">
+                <a:solidFill>
+                  <a:schemeClr val="tx1"/>
+                </a:solidFill>
+                <a:latin typeface="Arial" panose="020B0604020202020204" pitchFamily="34" charset="0"/>
+                <a:cs typeface="Arial" panose="020B0604020202020204" pitchFamily="34" charset="0"/>
+              </a:rPr>
+              <a:t>compute</a:t>
+            </a:r>
+            <a:br>
+              <a:rPr lang="de-DE" sz="1400" dirty="0">
+                <a:solidFill>
+                  <a:schemeClr val="tx1"/>
+                </a:solidFill>
+                <a:latin typeface="Arial" panose="020B0604020202020204" pitchFamily="34" charset="0"/>
+                <a:cs typeface="Arial" panose="020B0604020202020204" pitchFamily="34" charset="0"/>
+              </a:rPr>
+            </a:br>
+            <a:r>
+              <a:rPr lang="de-DE" sz="1100" dirty="0" err="1">
+                <a:solidFill>
+                  <a:schemeClr val="tx1"/>
+                </a:solidFill>
+                <a:latin typeface="Arial" panose="020B0604020202020204" pitchFamily="34" charset="0"/>
+                <a:cs typeface="Arial" panose="020B0604020202020204" pitchFamily="34" charset="0"/>
+              </a:rPr>
+              <a:t>automated</a:t>
+            </a:r>
+            <a:r>
+              <a:rPr lang="de-DE" sz="1100" dirty="0">
+                <a:solidFill>
+                  <a:schemeClr val="tx1"/>
+                </a:solidFill>
+                <a:latin typeface="Arial" panose="020B0604020202020204" pitchFamily="34" charset="0"/>
+                <a:cs typeface="Arial" panose="020B0604020202020204" pitchFamily="34" charset="0"/>
+              </a:rPr>
+              <a:t>, </a:t>
+            </a:r>
+            <a:r>
+              <a:rPr lang="de-DE" sz="1100" dirty="0" err="1">
+                <a:solidFill>
+                  <a:schemeClr val="tx1"/>
+                </a:solidFill>
+                <a:latin typeface="Arial" panose="020B0604020202020204" pitchFamily="34" charset="0"/>
+                <a:cs typeface="Arial" panose="020B0604020202020204" pitchFamily="34" charset="0"/>
+              </a:rPr>
+              <a:t>moved</a:t>
+            </a:r>
+            <a:r>
+              <a:rPr lang="de-DE" sz="1100" dirty="0">
                 <a:solidFill>
                   <a:schemeClr val="tx1"/>
                 </a:solidFill>
@@ -6535,16 +6933,26 @@
               <a:t> </a:t>
             </a:r>
             <a:r>
-              <a:rPr lang="de-DE" dirty="0" err="1">
+              <a:rPr lang="de-DE" sz="1100" dirty="0" err="1">
                 <a:solidFill>
                   <a:schemeClr val="tx1"/>
                 </a:solidFill>
                 <a:latin typeface="Arial" panose="020B0604020202020204" pitchFamily="34" charset="0"/>
                 <a:cs typeface="Arial" panose="020B0604020202020204" pitchFamily="34" charset="0"/>
               </a:rPr>
-              <a:t>data</a:t>
-            </a:r>
-            <a:endParaRPr lang="de-DE" dirty="0">
+              <a:t>to</a:t>
+            </a:r>
+            <a:r>
+              <a:rPr lang="de-DE" sz="1100" dirty="0">
+                <a:solidFill>
+                  <a:schemeClr val="tx1"/>
+                </a:solidFill>
+                <a:latin typeface="Arial" panose="020B0604020202020204" pitchFamily="34" charset="0"/>
+                <a:cs typeface="Arial" panose="020B0604020202020204" pitchFamily="34" charset="0"/>
+              </a:rPr>
+              <a:t> Server</a:t>
+            </a:r>
+            <a:endParaRPr lang="de-DE" sz="1400" dirty="0">
               <a:solidFill>
                 <a:schemeClr val="tx1"/>
               </a:solidFill>
@@ -6603,36 +7011,45 @@
           <a:p>
             <a:pPr algn="ctr"/>
             <a:r>
-              <a:rPr lang="de-DE" dirty="0" err="1">
+              <a:rPr lang="de-DE" sz="1400" dirty="0" err="1">
                 <a:solidFill>
                   <a:schemeClr val="tx1"/>
                 </a:solidFill>
                 <a:latin typeface="Arial" panose="020B0604020202020204" pitchFamily="34" charset="0"/>
                 <a:cs typeface="Arial" panose="020B0604020202020204" pitchFamily="34" charset="0"/>
               </a:rPr>
-              <a:t>blog</a:t>
-            </a:r>
-            <a:r>
-              <a:rPr lang="de-DE" dirty="0">
+              <a:t>programming</a:t>
+            </a:r>
+            <a:br>
+              <a:rPr lang="de-DE" sz="1400" dirty="0">
                 <a:solidFill>
                   <a:schemeClr val="tx1"/>
                 </a:solidFill>
                 <a:latin typeface="Arial" panose="020B0604020202020204" pitchFamily="34" charset="0"/>
                 <a:cs typeface="Arial" panose="020B0604020202020204" pitchFamily="34" charset="0"/>
               </a:rPr>
-              <a:t> </a:t>
-            </a:r>
-            <a:r>
-              <a:rPr lang="de-DE" dirty="0" err="1">
+            </a:br>
+            <a:r>
+              <a:rPr lang="de-DE" sz="1050" dirty="0" err="1">
                 <a:solidFill>
                   <a:schemeClr val="tx1"/>
                 </a:solidFill>
                 <a:latin typeface="Arial" panose="020B0604020202020204" pitchFamily="34" charset="0"/>
                 <a:cs typeface="Arial" panose="020B0604020202020204" pitchFamily="34" charset="0"/>
               </a:rPr>
-              <a:t>content</a:t>
-            </a:r>
-            <a:endParaRPr lang="de-DE" dirty="0">
+              <a:t>phased</a:t>
+            </a:r>
+            <a:r>
+              <a:rPr lang="de-DE" sz="1050" dirty="0">
+                <a:solidFill>
+                  <a:schemeClr val="tx1"/>
+                </a:solidFill>
+                <a:latin typeface="Arial" panose="020B0604020202020204" pitchFamily="34" charset="0"/>
+                <a:cs typeface="Arial" panose="020B0604020202020204" pitchFamily="34" charset="0"/>
+              </a:rPr>
+              <a:t> out</a:t>
+            </a:r>
+            <a:endParaRPr lang="de-DE" sz="1400" dirty="0">
               <a:solidFill>
                 <a:schemeClr val="tx1"/>
               </a:solidFill>
@@ -6844,7 +7261,7 @@
         </p:nvSpPr>
         <p:spPr>
           <a:xfrm>
-            <a:off x="7373946" y="5236764"/>
+            <a:off x="7373946" y="5599819"/>
             <a:ext cx="2016224" cy="360040"/>
           </a:xfrm>
           <a:prstGeom prst="roundRect">
@@ -6912,7 +7329,7 @@
         </p:nvSpPr>
         <p:spPr>
           <a:xfrm>
-            <a:off x="7373946" y="5730241"/>
+            <a:off x="7373946" y="6093296"/>
             <a:ext cx="2016224" cy="360040"/>
           </a:xfrm>
           <a:prstGeom prst="roundRect">
@@ -6980,8 +7397,8 @@
         </p:nvSpPr>
         <p:spPr>
           <a:xfrm>
-            <a:off x="7354474" y="4732708"/>
-            <a:ext cx="2016224" cy="360040"/>
+            <a:off x="7354474" y="4732707"/>
+            <a:ext cx="2016224" cy="687091"/>
           </a:xfrm>
           <a:prstGeom prst="roundRect">
             <a:avLst/>
@@ -7034,6 +7451,35 @@
               </a:rPr>
               <a:t>speeches</a:t>
             </a:r>
+            <a:br>
+              <a:rPr lang="de-DE" dirty="0">
+                <a:solidFill>
+                  <a:schemeClr val="tx1"/>
+                </a:solidFill>
+                <a:latin typeface="Arial" panose="020B0604020202020204" pitchFamily="34" charset="0"/>
+                <a:cs typeface="Arial" panose="020B0604020202020204" pitchFamily="34" charset="0"/>
+              </a:rPr>
+            </a:br>
+            <a:r>
+              <a:rPr lang="de-DE" sz="1400" dirty="0">
+                <a:solidFill>
+                  <a:schemeClr val="tx1"/>
+                </a:solidFill>
+                <a:latin typeface="Arial" panose="020B0604020202020204" pitchFamily="34" charset="0"/>
+                <a:cs typeface="Arial" panose="020B0604020202020204" pitchFamily="34" charset="0"/>
+              </a:rPr>
+              <a:t>LLM </a:t>
+            </a:r>
+            <a:r>
+              <a:rPr lang="de-DE" sz="1400" dirty="0" err="1">
+                <a:solidFill>
+                  <a:schemeClr val="tx1"/>
+                </a:solidFill>
+                <a:latin typeface="Arial" panose="020B0604020202020204" pitchFamily="34" charset="0"/>
+                <a:cs typeface="Arial" panose="020B0604020202020204" pitchFamily="34" charset="0"/>
+              </a:rPr>
+              <a:t>compute</a:t>
+            </a:r>
             <a:endParaRPr lang="de-DE" dirty="0">
               <a:solidFill>
                 <a:schemeClr val="tx1"/>
@@ -7063,7 +7509,7 @@
         <p:spPr>
           <a:xfrm>
             <a:off x="6969224" y="3645024"/>
-            <a:ext cx="385250" cy="1267704"/>
+            <a:ext cx="385250" cy="1431229"/>
           </a:xfrm>
           <a:prstGeom prst="bentConnector3">
             <a:avLst>
@@ -7110,7 +7556,7 @@
         <p:spPr>
           <a:xfrm>
             <a:off x="6969224" y="3645024"/>
-            <a:ext cx="404722" cy="1771760"/>
+            <a:ext cx="404722" cy="2134815"/>
           </a:xfrm>
           <a:prstGeom prst="bentConnector3">
             <a:avLst>
@@ -7157,7 +7603,7 @@
         <p:spPr>
           <a:xfrm>
             <a:off x="6969224" y="3645024"/>
-            <a:ext cx="404722" cy="2265237"/>
+            <a:ext cx="404722" cy="2628292"/>
           </a:xfrm>
           <a:prstGeom prst="bentConnector3">
             <a:avLst>
@@ -7272,8 +7718,8 @@
         </p:nvSpPr>
         <p:spPr>
           <a:xfrm>
-            <a:off x="4953000" y="2492896"/>
-            <a:ext cx="477695" cy="430887"/>
+            <a:off x="4964348" y="2494057"/>
+            <a:ext cx="407163" cy="369332"/>
           </a:xfrm>
           <a:prstGeom prst="rect">
             <a:avLst/>
@@ -7287,26 +7733,26 @@
           <a:lstStyle/>
           <a:p>
             <a:r>
-              <a:rPr lang="de-DE" sz="1400" dirty="0" err="1">
+              <a:rPr lang="de-DE" sz="1200" dirty="0" err="1">
+                <a:latin typeface="Arial" panose="020B0604020202020204" pitchFamily="34" charset="0"/>
+                <a:cs typeface="Arial" panose="020B0604020202020204" pitchFamily="34" charset="0"/>
+              </a:rPr>
+              <a:t>data</a:t>
+            </a:r>
+            <a:br>
+              <a:rPr lang="de-DE" sz="1200" dirty="0">
+                <a:latin typeface="Arial" panose="020B0604020202020204" pitchFamily="34" charset="0"/>
+                <a:cs typeface="Arial" panose="020B0604020202020204" pitchFamily="34" charset="0"/>
+              </a:rPr>
+            </a:br>
+            <a:r>
+              <a:rPr lang="de-DE" sz="1200" dirty="0" err="1">
                 <a:latin typeface="Arial" panose="020B0604020202020204" pitchFamily="34" charset="0"/>
                 <a:cs typeface="Arial" panose="020B0604020202020204" pitchFamily="34" charset="0"/>
               </a:rPr>
               <a:t>pulled</a:t>
             </a:r>
-            <a:endParaRPr lang="de-DE" sz="1400" dirty="0">
-              <a:latin typeface="Arial" panose="020B0604020202020204" pitchFamily="34" charset="0"/>
-              <a:cs typeface="Arial" panose="020B0604020202020204" pitchFamily="34" charset="0"/>
-            </a:endParaRPr>
-          </a:p>
-          <a:p>
-            <a:r>
-              <a:rPr lang="de-DE" sz="1400" dirty="0" err="1">
-                <a:latin typeface="Arial" panose="020B0604020202020204" pitchFamily="34" charset="0"/>
-                <a:cs typeface="Arial" panose="020B0604020202020204" pitchFamily="34" charset="0"/>
-              </a:rPr>
-              <a:t>data</a:t>
-            </a:r>
-            <a:endParaRPr lang="de-DE" sz="1400" dirty="0">
+            <a:endParaRPr lang="de-DE" sz="1200" dirty="0">
               <a:latin typeface="Arial" panose="020B0604020202020204" pitchFamily="34" charset="0"/>
               <a:cs typeface="Arial" panose="020B0604020202020204" pitchFamily="34" charset="0"/>
             </a:endParaRPr>
@@ -7327,8 +7773,8 @@
         </p:nvSpPr>
         <p:spPr>
           <a:xfrm>
-            <a:off x="4880992" y="3645024"/>
-            <a:ext cx="586699" cy="430887"/>
+            <a:off x="4953713" y="3707740"/>
+            <a:ext cx="503343" cy="369332"/>
           </a:xfrm>
           <a:prstGeom prst="rect">
             <a:avLst/>
@@ -7342,26 +7788,26 @@
           <a:lstStyle/>
           <a:p>
             <a:r>
-              <a:rPr lang="de-DE" sz="1400" dirty="0" err="1">
+              <a:rPr lang="de-DE" sz="1200" dirty="0" err="1">
+                <a:latin typeface="Arial" panose="020B0604020202020204" pitchFamily="34" charset="0"/>
+                <a:cs typeface="Arial" panose="020B0604020202020204" pitchFamily="34" charset="0"/>
+              </a:rPr>
+              <a:t>content</a:t>
+            </a:r>
+            <a:br>
+              <a:rPr lang="de-DE" sz="1200" dirty="0">
+                <a:latin typeface="Arial" panose="020B0604020202020204" pitchFamily="34" charset="0"/>
+                <a:cs typeface="Arial" panose="020B0604020202020204" pitchFamily="34" charset="0"/>
+              </a:rPr>
+            </a:br>
+            <a:r>
+              <a:rPr lang="de-DE" sz="1200" dirty="0" err="1">
                 <a:latin typeface="Arial" panose="020B0604020202020204" pitchFamily="34" charset="0"/>
                 <a:cs typeface="Arial" panose="020B0604020202020204" pitchFamily="34" charset="0"/>
               </a:rPr>
               <a:t>pushed</a:t>
             </a:r>
-            <a:endParaRPr lang="de-DE" sz="1400" dirty="0">
-              <a:latin typeface="Arial" panose="020B0604020202020204" pitchFamily="34" charset="0"/>
-              <a:cs typeface="Arial" panose="020B0604020202020204" pitchFamily="34" charset="0"/>
-            </a:endParaRPr>
-          </a:p>
-          <a:p>
-            <a:r>
-              <a:rPr lang="de-DE" sz="1400" dirty="0" err="1">
-                <a:latin typeface="Arial" panose="020B0604020202020204" pitchFamily="34" charset="0"/>
-                <a:cs typeface="Arial" panose="020B0604020202020204" pitchFamily="34" charset="0"/>
-              </a:rPr>
-              <a:t>content</a:t>
-            </a:r>
-            <a:endParaRPr lang="de-DE" sz="1400" dirty="0">
+            <a:endParaRPr lang="de-DE" sz="1200" dirty="0">
               <a:latin typeface="Arial" panose="020B0604020202020204" pitchFamily="34" charset="0"/>
               <a:cs typeface="Arial" panose="020B0604020202020204" pitchFamily="34" charset="0"/>
             </a:endParaRPr>
@@ -7382,8 +7828,8 @@
         </p:nvSpPr>
         <p:spPr>
           <a:xfrm>
-            <a:off x="3656856" y="3573016"/>
-            <a:ext cx="924933" cy="215444"/>
+            <a:off x="3584848" y="3573016"/>
+            <a:ext cx="1440160" cy="1107996"/>
           </a:xfrm>
           <a:prstGeom prst="rect">
             <a:avLst/>
@@ -7391,28 +7837,403 @@
           <a:noFill/>
         </p:spPr>
         <p:txBody>
-          <a:bodyPr wrap="none" lIns="0" tIns="0" rIns="0" bIns="0" rtlCol="0">
+          <a:bodyPr wrap="square" lIns="0" tIns="0" rIns="0" bIns="0" rtlCol="0">
             <a:spAutoFit/>
           </a:bodyPr>
           <a:lstStyle/>
           <a:p>
-            <a:r>
-              <a:rPr lang="de-DE" sz="1400" dirty="0" err="1">
+            <a:pPr marL="171450" indent="-171450">
+              <a:buFont typeface="Arial" panose="020B0604020202020204" pitchFamily="34" charset="0"/>
+              <a:buChar char="•"/>
+            </a:pPr>
+            <a:r>
+              <a:rPr lang="de-DE" sz="1200" dirty="0">
                 <a:latin typeface="Arial" panose="020B0604020202020204" pitchFamily="34" charset="0"/>
                 <a:cs typeface="Arial" panose="020B0604020202020204" pitchFamily="34" charset="0"/>
               </a:rPr>
-              <a:t>auto</a:t>
-            </a:r>
-            <a:r>
-              <a:rPr lang="de-DE" sz="1400" dirty="0">
+              <a:t>All </a:t>
+            </a:r>
+            <a:r>
+              <a:rPr lang="de-DE" sz="1200" dirty="0" err="1">
                 <a:latin typeface="Arial" panose="020B0604020202020204" pitchFamily="34" charset="0"/>
                 <a:cs typeface="Arial" panose="020B0604020202020204" pitchFamily="34" charset="0"/>
               </a:rPr>
-              <a:t> deploy</a:t>
-            </a:r>
-          </a:p>
-        </p:txBody>
-      </p:sp>
+              <a:t>data</a:t>
+            </a:r>
+            <a:r>
+              <a:rPr lang="de-DE" sz="1200" dirty="0">
+                <a:latin typeface="Arial" panose="020B0604020202020204" pitchFamily="34" charset="0"/>
+                <a:cs typeface="Arial" panose="020B0604020202020204" pitchFamily="34" charset="0"/>
+              </a:rPr>
+              <a:t> </a:t>
+            </a:r>
+            <a:r>
+              <a:rPr lang="de-DE" sz="1200" dirty="0" err="1">
+                <a:latin typeface="Arial" panose="020B0604020202020204" pitchFamily="34" charset="0"/>
+                <a:cs typeface="Arial" panose="020B0604020202020204" pitchFamily="34" charset="0"/>
+              </a:rPr>
+              <a:t>with</a:t>
+            </a:r>
+            <a:r>
+              <a:rPr lang="de-DE" sz="1200" dirty="0">
+                <a:latin typeface="Arial" panose="020B0604020202020204" pitchFamily="34" charset="0"/>
+                <a:cs typeface="Arial" panose="020B0604020202020204" pitchFamily="34" charset="0"/>
+              </a:rPr>
+              <a:t> </a:t>
+            </a:r>
+            <a:br>
+              <a:rPr lang="de-DE" sz="1200" dirty="0">
+                <a:latin typeface="Arial" panose="020B0604020202020204" pitchFamily="34" charset="0"/>
+                <a:cs typeface="Arial" panose="020B0604020202020204" pitchFamily="34" charset="0"/>
+              </a:rPr>
+            </a:br>
+            <a:r>
+              <a:rPr lang="de-DE" sz="1200" dirty="0" err="1">
+                <a:latin typeface="Arial" panose="020B0604020202020204" pitchFamily="34" charset="0"/>
+                <a:cs typeface="Arial" panose="020B0604020202020204" pitchFamily="34" charset="0"/>
+              </a:rPr>
+              <a:t>version</a:t>
+            </a:r>
+            <a:r>
+              <a:rPr lang="de-DE" sz="1200" dirty="0">
+                <a:latin typeface="Arial" panose="020B0604020202020204" pitchFamily="34" charset="0"/>
+                <a:cs typeface="Arial" panose="020B0604020202020204" pitchFamily="34" charset="0"/>
+              </a:rPr>
+              <a:t> </a:t>
+            </a:r>
+            <a:r>
+              <a:rPr lang="de-DE" sz="1200" dirty="0" err="1">
+                <a:latin typeface="Arial" panose="020B0604020202020204" pitchFamily="34" charset="0"/>
+                <a:cs typeface="Arial" panose="020B0604020202020204" pitchFamily="34" charset="0"/>
+              </a:rPr>
+              <a:t>history</a:t>
+            </a:r>
+            <a:endParaRPr lang="de-DE" sz="1200" dirty="0">
+              <a:latin typeface="Arial" panose="020B0604020202020204" pitchFamily="34" charset="0"/>
+              <a:cs typeface="Arial" panose="020B0604020202020204" pitchFamily="34" charset="0"/>
+            </a:endParaRPr>
+          </a:p>
+          <a:p>
+            <a:pPr marL="171450" indent="-171450">
+              <a:buFont typeface="Arial" panose="020B0604020202020204" pitchFamily="34" charset="0"/>
+              <a:buChar char="•"/>
+            </a:pPr>
+            <a:r>
+              <a:rPr lang="de-DE" sz="1200" dirty="0">
+                <a:latin typeface="Arial" panose="020B0604020202020204" pitchFamily="34" charset="0"/>
+                <a:cs typeface="Arial" panose="020B0604020202020204" pitchFamily="34" charset="0"/>
+              </a:rPr>
+              <a:t>Auto deploy</a:t>
+            </a:r>
+          </a:p>
+          <a:p>
+            <a:pPr marL="171450" indent="-171450">
+              <a:buFont typeface="Arial" panose="020B0604020202020204" pitchFamily="34" charset="0"/>
+              <a:buChar char="•"/>
+            </a:pPr>
+            <a:r>
+              <a:rPr lang="de-DE" sz="1200" dirty="0">
+                <a:latin typeface="Arial" panose="020B0604020202020204" pitchFamily="34" charset="0"/>
+                <a:cs typeface="Arial" panose="020B0604020202020204" pitchFamily="34" charset="0"/>
+              </a:rPr>
+              <a:t>Backup</a:t>
+            </a:r>
+          </a:p>
+          <a:p>
+            <a:pPr marL="171450" indent="-171450">
+              <a:buFont typeface="Arial" panose="020B0604020202020204" pitchFamily="34" charset="0"/>
+              <a:buChar char="•"/>
+            </a:pPr>
+            <a:r>
+              <a:rPr lang="de-DE" sz="1200" dirty="0" err="1">
+                <a:latin typeface="Arial" panose="020B0604020202020204" pitchFamily="34" charset="0"/>
+                <a:cs typeface="Arial" panose="020B0604020202020204" pitchFamily="34" charset="0"/>
+              </a:rPr>
+              <a:t>Vulnerability</a:t>
+            </a:r>
+            <a:r>
+              <a:rPr lang="de-DE" sz="1200" dirty="0">
+                <a:latin typeface="Arial" panose="020B0604020202020204" pitchFamily="34" charset="0"/>
+                <a:cs typeface="Arial" panose="020B0604020202020204" pitchFamily="34" charset="0"/>
+              </a:rPr>
+              <a:t> </a:t>
+            </a:r>
+            <a:br>
+              <a:rPr lang="de-DE" sz="1200" dirty="0">
+                <a:latin typeface="Arial" panose="020B0604020202020204" pitchFamily="34" charset="0"/>
+                <a:cs typeface="Arial" panose="020B0604020202020204" pitchFamily="34" charset="0"/>
+              </a:rPr>
+            </a:br>
+            <a:r>
+              <a:rPr lang="de-DE" sz="1200" dirty="0" err="1">
+                <a:latin typeface="Arial" panose="020B0604020202020204" pitchFamily="34" charset="0"/>
+                <a:cs typeface="Arial" panose="020B0604020202020204" pitchFamily="34" charset="0"/>
+              </a:rPr>
+              <a:t>scan</a:t>
+            </a:r>
+            <a:endParaRPr lang="de-DE" sz="1200" dirty="0">
+              <a:latin typeface="Arial" panose="020B0604020202020204" pitchFamily="34" charset="0"/>
+              <a:cs typeface="Arial" panose="020B0604020202020204" pitchFamily="34" charset="0"/>
+            </a:endParaRPr>
+          </a:p>
+        </p:txBody>
+      </p:sp>
+      <p:sp>
+        <p:nvSpPr>
+          <p:cNvPr id="3" name="Flussdiagramm: Anzeige 2">
+            <a:extLst>
+              <a:ext uri="{FF2B5EF4-FFF2-40B4-BE49-F238E27FC236}">
+                <a16:creationId xmlns:a16="http://schemas.microsoft.com/office/drawing/2014/main" id="{40211A0D-9DCE-18CE-89BA-EBE688513A02}"/>
+              </a:ext>
+            </a:extLst>
+          </p:cNvPr>
+          <p:cNvSpPr/>
+          <p:nvPr/>
+        </p:nvSpPr>
+        <p:spPr>
+          <a:xfrm>
+            <a:off x="6969224" y="1268070"/>
+            <a:ext cx="936104" cy="684075"/>
+          </a:xfrm>
+          <a:prstGeom prst="flowChartDisplay">
+            <a:avLst/>
+          </a:prstGeom>
+          <a:noFill/>
+          <a:ln w="15875">
+            <a:solidFill>
+              <a:schemeClr val="tx1">
+                <a:lumMod val="65000"/>
+                <a:lumOff val="35000"/>
+              </a:schemeClr>
+            </a:solidFill>
+          </a:ln>
+        </p:spPr>
+        <p:style>
+          <a:lnRef idx="2">
+            <a:schemeClr val="accent1">
+              <a:shade val="50000"/>
+            </a:schemeClr>
+          </a:lnRef>
+          <a:fillRef idx="1">
+            <a:schemeClr val="accent1"/>
+          </a:fillRef>
+          <a:effectRef idx="0">
+            <a:schemeClr val="accent1"/>
+          </a:effectRef>
+          <a:fontRef idx="minor">
+            <a:schemeClr val="lt1"/>
+          </a:fontRef>
+        </p:style>
+        <p:txBody>
+          <a:bodyPr lIns="0" tIns="36000" rIns="0" bIns="36000" rtlCol="0" anchor="ctr"/>
+          <a:lstStyle/>
+          <a:p>
+            <a:pPr algn="ctr"/>
+            <a:r>
+              <a:rPr lang="de-DE" sz="1200" dirty="0" err="1">
+                <a:solidFill>
+                  <a:schemeClr val="tx1"/>
+                </a:solidFill>
+                <a:latin typeface="Arial" panose="020B0604020202020204" pitchFamily="34" charset="0"/>
+                <a:cs typeface="Arial" panose="020B0604020202020204" pitchFamily="34" charset="0"/>
+              </a:rPr>
+              <a:t>Statistics</a:t>
+            </a:r>
+            <a:endParaRPr lang="de-DE" sz="1200" dirty="0">
+              <a:solidFill>
+                <a:schemeClr val="tx1"/>
+              </a:solidFill>
+              <a:latin typeface="Arial" panose="020B0604020202020204" pitchFamily="34" charset="0"/>
+              <a:cs typeface="Arial" panose="020B0604020202020204" pitchFamily="34" charset="0"/>
+            </a:endParaRPr>
+          </a:p>
+        </p:txBody>
+      </p:sp>
+      <p:sp>
+        <p:nvSpPr>
+          <p:cNvPr id="10" name="Flussdiagramm: Anzeige 9">
+            <a:extLst>
+              <a:ext uri="{FF2B5EF4-FFF2-40B4-BE49-F238E27FC236}">
+                <a16:creationId xmlns:a16="http://schemas.microsoft.com/office/drawing/2014/main" id="{B5231C3A-9128-BD35-670D-DAB96A5AF82C}"/>
+              </a:ext>
+            </a:extLst>
+          </p:cNvPr>
+          <p:cNvSpPr/>
+          <p:nvPr/>
+        </p:nvSpPr>
+        <p:spPr>
+          <a:xfrm>
+            <a:off x="8013005" y="1772816"/>
+            <a:ext cx="936104" cy="684075"/>
+          </a:xfrm>
+          <a:prstGeom prst="flowChartDisplay">
+            <a:avLst/>
+          </a:prstGeom>
+          <a:noFill/>
+          <a:ln w="15875">
+            <a:solidFill>
+              <a:schemeClr val="tx1">
+                <a:lumMod val="65000"/>
+                <a:lumOff val="35000"/>
+              </a:schemeClr>
+            </a:solidFill>
+          </a:ln>
+        </p:spPr>
+        <p:style>
+          <a:lnRef idx="2">
+            <a:schemeClr val="accent1">
+              <a:shade val="50000"/>
+            </a:schemeClr>
+          </a:lnRef>
+          <a:fillRef idx="1">
+            <a:schemeClr val="accent1"/>
+          </a:fillRef>
+          <a:effectRef idx="0">
+            <a:schemeClr val="accent1"/>
+          </a:effectRef>
+          <a:fontRef idx="minor">
+            <a:schemeClr val="lt1"/>
+          </a:fontRef>
+        </p:style>
+        <p:txBody>
+          <a:bodyPr lIns="0" tIns="36000" rIns="0" bIns="36000" rtlCol="0" anchor="ctr"/>
+          <a:lstStyle/>
+          <a:p>
+            <a:pPr algn="ctr"/>
+            <a:r>
+              <a:rPr lang="de-DE" sz="1200" dirty="0">
+                <a:solidFill>
+                  <a:schemeClr val="tx1"/>
+                </a:solidFill>
+                <a:latin typeface="Arial" panose="020B0604020202020204" pitchFamily="34" charset="0"/>
+                <a:cs typeface="Arial" panose="020B0604020202020204" pitchFamily="34" charset="0"/>
+              </a:rPr>
+              <a:t>Monitor</a:t>
+            </a:r>
+            <a:br>
+              <a:rPr lang="de-DE" sz="1200" dirty="0">
+                <a:solidFill>
+                  <a:schemeClr val="tx1"/>
+                </a:solidFill>
+                <a:latin typeface="Arial" panose="020B0604020202020204" pitchFamily="34" charset="0"/>
+                <a:cs typeface="Arial" panose="020B0604020202020204" pitchFamily="34" charset="0"/>
+              </a:rPr>
+            </a:br>
+            <a:r>
+              <a:rPr lang="de-DE" sz="1200" dirty="0">
+                <a:solidFill>
+                  <a:schemeClr val="tx1"/>
+                </a:solidFill>
+                <a:latin typeface="Arial" panose="020B0604020202020204" pitchFamily="34" charset="0"/>
+                <a:cs typeface="Arial" panose="020B0604020202020204" pitchFamily="34" charset="0"/>
+              </a:rPr>
+              <a:t>&amp; Alarm</a:t>
+            </a:r>
+          </a:p>
+        </p:txBody>
+      </p:sp>
+      <p:cxnSp>
+        <p:nvCxnSpPr>
+          <p:cNvPr id="12" name="Verbinder: gewinkelt 11">
+            <a:extLst>
+              <a:ext uri="{FF2B5EF4-FFF2-40B4-BE49-F238E27FC236}">
+                <a16:creationId xmlns:a16="http://schemas.microsoft.com/office/drawing/2014/main" id="{47B39FB2-72D4-932A-8352-B11B2B70FB65}"/>
+              </a:ext>
+            </a:extLst>
+          </p:cNvPr>
+          <p:cNvCxnSpPr>
+            <a:cxnSpLocks/>
+            <a:stCxn id="3" idx="1"/>
+            <a:endCxn id="6" idx="0"/>
+          </p:cNvCxnSpPr>
+          <p:nvPr/>
+        </p:nvCxnSpPr>
+        <p:spPr>
+          <a:xfrm rot="10800000" flipV="1">
+            <a:off x="6285148" y="1610108"/>
+            <a:ext cx="684076" cy="1170820"/>
+          </a:xfrm>
+          <a:prstGeom prst="bentConnector2">
+            <a:avLst/>
+          </a:prstGeom>
+          <a:ln w="15875">
+            <a:solidFill>
+              <a:schemeClr val="tx1">
+                <a:lumMod val="65000"/>
+                <a:lumOff val="35000"/>
+              </a:schemeClr>
+            </a:solidFill>
+            <a:headEnd type="triangle"/>
+            <a:tailEnd type="none"/>
+          </a:ln>
+          <a:effectLst/>
+        </p:spPr>
+        <p:style>
+          <a:lnRef idx="2">
+            <a:schemeClr val="accent1"/>
+          </a:lnRef>
+          <a:fillRef idx="0">
+            <a:schemeClr val="accent1"/>
+          </a:fillRef>
+          <a:effectRef idx="1">
+            <a:schemeClr val="accent1"/>
+          </a:effectRef>
+          <a:fontRef idx="minor">
+            <a:schemeClr val="tx1"/>
+          </a:fontRef>
+        </p:style>
+      </p:cxnSp>
+      <p:cxnSp>
+        <p:nvCxnSpPr>
+          <p:cNvPr id="16" name="Verbinder: gewinkelt 15">
+            <a:extLst>
+              <a:ext uri="{FF2B5EF4-FFF2-40B4-BE49-F238E27FC236}">
+                <a16:creationId xmlns:a16="http://schemas.microsoft.com/office/drawing/2014/main" id="{E92989F5-5050-EF6E-116C-0919382CB3AB}"/>
+              </a:ext>
+            </a:extLst>
+          </p:cNvPr>
+          <p:cNvCxnSpPr>
+            <a:cxnSpLocks/>
+            <a:stCxn id="10" idx="1"/>
+            <a:endCxn id="6" idx="0"/>
+          </p:cNvCxnSpPr>
+          <p:nvPr/>
+        </p:nvCxnSpPr>
+        <p:spPr>
+          <a:xfrm rot="10800000" flipV="1">
+            <a:off x="6285149" y="2114854"/>
+            <a:ext cx="1727857" cy="666074"/>
+          </a:xfrm>
+          <a:prstGeom prst="curvedConnector2">
+            <a:avLst/>
+          </a:prstGeom>
+          <a:ln w="15875">
+            <a:solidFill>
+              <a:schemeClr val="tx1">
+                <a:lumMod val="65000"/>
+                <a:lumOff val="35000"/>
+              </a:schemeClr>
+            </a:solidFill>
+            <a:headEnd type="triangle"/>
+            <a:tailEnd type="none"/>
+          </a:ln>
+          <a:effectLst/>
+        </p:spPr>
+        <p:style>
+          <a:lnRef idx="2">
+            <a:schemeClr val="accent1"/>
+          </a:lnRef>
+          <a:fillRef idx="0">
+            <a:schemeClr val="accent1"/>
+          </a:fillRef>
+          <a:effectRef idx="1">
+            <a:schemeClr val="accent1"/>
+          </a:effectRef>
+          <a:fontRef idx="minor">
+            <a:schemeClr val="tx1"/>
+          </a:fontRef>
+        </p:style>
+      </p:cxnSp>
     </p:spTree>
     <p:extLst>
       <p:ext uri="{BB962C8B-B14F-4D97-AF65-F5344CB8AC3E}">

--- a/doc/architecture.pptx
+++ b/doc/architecture.pptx
@@ -175,6 +175,12 @@
 </p:presentation>
 </file>
 
+<file path=ppt/authors.xml><?xml version="1.0" encoding="utf-8"?>
+<p188:authorLst xmlns:a="http://schemas.openxmlformats.org/drawingml/2006/main" xmlns:r="http://schemas.openxmlformats.org/officeDocument/2006/relationships" xmlns:p188="http://schemas.microsoft.com/office/powerpoint/2018/8/main">
+  <p188:author id="{D189D656-8E02-B9F1-10F5-52BD840A97A1}" name="Buchmann, Peter" initials="PB" userId="S::Peter.Buchmann@zew.de::70843252-1989-4c43-9d59-ecbae435e47f" providerId="AD"/>
+</p188:authorLst>
+</file>
+
 <file path=ppt/commentAuthors.xml><?xml version="1.0" encoding="utf-8"?>
 <p:cmAuthorLst xmlns:a="http://schemas.openxmlformats.org/drawingml/2006/main" xmlns:r="http://schemas.openxmlformats.org/officeDocument/2006/relationships" xmlns:p="http://schemas.openxmlformats.org/presentationml/2006/main">
   <p:cmAuthor id="0" name="fam" initials="f" lastIdx="2" clrIdx="0"/>
@@ -201,6 +207,28 @@
     </p:extLst>
   </p:cmAuthor>
 </p:cmAuthorLst>
+</file>
+
+<file path=ppt/comments/modernComment_57D_D2233FF2.xml><?xml version="1.0" encoding="utf-8"?>
+<p188:cmLst xmlns:a="http://schemas.openxmlformats.org/drawingml/2006/main" xmlns:r="http://schemas.openxmlformats.org/officeDocument/2006/relationships" xmlns:p188="http://schemas.microsoft.com/office/powerpoint/2018/8/main">
+  <p188:cm id="{A59F071B-7079-40FD-ACA5-17DC33330683}" authorId="{D189D656-8E02-B9F1-10F5-52BD840A97A1}" created="2026-02-11T09:09:52.119">
+    <ac:deMkLst xmlns:ac="http://schemas.microsoft.com/office/drawing/2013/main/command">
+      <pc:docMk xmlns:pc="http://schemas.microsoft.com/office/powerpoint/2013/main/command"/>
+      <pc:sldMk xmlns:pc="http://schemas.microsoft.com/office/powerpoint/2013/main/command" cId="3525525490" sldId="1405"/>
+      <ac:cxnSpMk id="17" creationId="{C8733E90-2C5F-6ED5-86DF-89D3B6C28EF0}"/>
+    </ac:deMkLst>
+    <p188:txBody>
+      <a:bodyPr/>
+      <a:lstStyle/>
+      <a:p>
+        <a:r>
+          <a:rPr lang="de-DE"/>
+          <a:t>Student assistants updates Excel file</a:t>
+        </a:r>
+      </a:p>
+    </p188:txBody>
+  </p188:cm>
+</p188:cmLst>
 </file>
 
 <file path=ppt/handoutMasters/handoutMaster1.xml><?xml version="1.0" encoding="utf-8"?>
@@ -6417,7 +6445,7 @@
           <p:nvPr/>
         </p:nvPicPr>
         <p:blipFill>
-          <a:blip r:embed="rId3">
+          <a:blip r:embed="rId4">
             <a:extLst>
               <a:ext uri="{28A0092B-C50C-407E-A947-70E740481C1C}">
                 <a14:useLocalDpi xmlns:a14="http://schemas.microsoft.com/office/drawing/2010/main" val="0"/>
@@ -6453,7 +6481,7 @@
           <p:nvPr/>
         </p:nvPicPr>
         <p:blipFill>
-          <a:blip r:embed="rId4">
+          <a:blip r:embed="rId5">
             <a:extLst>
               <a:ext uri="{28A0092B-C50C-407E-A947-70E740481C1C}">
                 <a14:useLocalDpi xmlns:a14="http://schemas.microsoft.com/office/drawing/2010/main" val="0"/>
@@ -6466,7 +6494,7 @@
         </p:blipFill>
         <p:spPr>
           <a:xfrm>
-            <a:off x="200472" y="2219968"/>
+            <a:off x="200472" y="1988840"/>
             <a:ext cx="2855617" cy="2505176"/>
           </a:xfrm>
           <a:prstGeom prst="rect">
@@ -6542,7 +6570,7 @@
             </a:pPr>
             <a:r>
               <a:rPr lang="en-GB" dirty="0">
-                <a:hlinkClick r:id="rId5"/>
+                <a:hlinkClick r:id="rId6"/>
               </a:rPr>
               <a:t>https://git.zew.de/ub-public-finance/ecb-monitor</a:t>
             </a:r>
@@ -6768,7 +6796,7 @@
         </p:nvSpPr>
         <p:spPr>
           <a:xfrm>
-            <a:off x="704528" y="4869160"/>
+            <a:off x="704528" y="4725144"/>
             <a:ext cx="2016224" cy="360040"/>
           </a:xfrm>
           <a:prstGeom prst="roundRect">
@@ -6798,7 +6826,7 @@
           </a:fontRef>
         </p:style>
         <p:txBody>
-          <a:bodyPr rtlCol="0" anchor="ctr"/>
+          <a:bodyPr lIns="0" tIns="0" rIns="0" bIns="0" rtlCol="0" anchor="ctr"/>
           <a:lstStyle/>
           <a:p>
             <a:pPr algn="ctr"/>
@@ -6829,7 +6857,7 @@
         </p:nvSpPr>
         <p:spPr>
           <a:xfrm>
-            <a:off x="704528" y="5445224"/>
+            <a:off x="704528" y="5733256"/>
             <a:ext cx="2016224" cy="360040"/>
           </a:xfrm>
           <a:prstGeom prst="roundRect">
@@ -6859,7 +6887,7 @@
           </a:fontRef>
         </p:style>
         <p:txBody>
-          <a:bodyPr rtlCol="0" anchor="ctr"/>
+          <a:bodyPr lIns="0" tIns="0" rIns="0" bIns="0" rtlCol="0" anchor="ctr"/>
           <a:lstStyle/>
           <a:p>
             <a:pPr algn="ctr"/>
@@ -6976,7 +7004,7 @@
         </p:nvSpPr>
         <p:spPr>
           <a:xfrm>
-            <a:off x="704528" y="6021288"/>
+            <a:off x="704528" y="6237312"/>
             <a:ext cx="2016224" cy="360040"/>
           </a:xfrm>
           <a:prstGeom prst="roundRect">
@@ -7006,7 +7034,7 @@
           </a:fontRef>
         </p:style>
         <p:txBody>
-          <a:bodyPr rtlCol="0" anchor="ctr"/>
+          <a:bodyPr lIns="0" tIns="0" rIns="0" bIns="0" rtlCol="0" anchor="ctr"/>
           <a:lstStyle/>
           <a:p>
             <a:pPr algn="ctr"/>
@@ -7078,7 +7106,7 @@
         <p:spPr>
           <a:xfrm flipV="1">
             <a:off x="2720752" y="3104964"/>
-            <a:ext cx="792088" cy="1944216"/>
+            <a:ext cx="792088" cy="1800200"/>
           </a:xfrm>
           <a:prstGeom prst="bentConnector3">
             <a:avLst>
@@ -7125,7 +7153,7 @@
         <p:spPr>
           <a:xfrm rot="10800000" flipV="1">
             <a:off x="2720752" y="3104964"/>
-            <a:ext cx="792088" cy="2520280"/>
+            <a:ext cx="792088" cy="2808312"/>
           </a:xfrm>
           <a:prstGeom prst="bentConnector3">
             <a:avLst>
@@ -7172,7 +7200,7 @@
         <p:spPr>
           <a:xfrm rot="10800000" flipV="1">
             <a:off x="2720752" y="3104964"/>
-            <a:ext cx="792088" cy="3096344"/>
+            <a:ext cx="792088" cy="3312368"/>
           </a:xfrm>
           <a:prstGeom prst="bentConnector3">
             <a:avLst>
@@ -7828,7 +7856,7 @@
         </p:nvSpPr>
         <p:spPr>
           <a:xfrm>
-            <a:off x="3584848" y="3573016"/>
+            <a:off x="3512840" y="3573016"/>
             <a:ext cx="1440160" cy="1107996"/>
           </a:xfrm>
           <a:prstGeom prst="rect">
@@ -8234,6 +8262,151 @@
           </a:fontRef>
         </p:style>
       </p:cxnSp>
+      <p:sp>
+        <p:nvSpPr>
+          <p:cNvPr id="15" name="Rechteck: abgerundete Ecken 14">
+            <a:extLst>
+              <a:ext uri="{FF2B5EF4-FFF2-40B4-BE49-F238E27FC236}">
+                <a16:creationId xmlns:a16="http://schemas.microsoft.com/office/drawing/2014/main" id="{B10E95C9-2373-D0A0-7686-A737FBED9387}"/>
+              </a:ext>
+            </a:extLst>
+          </p:cNvPr>
+          <p:cNvSpPr/>
+          <p:nvPr/>
+        </p:nvSpPr>
+        <p:spPr>
+          <a:xfrm>
+            <a:off x="704528" y="5157192"/>
+            <a:ext cx="2016224" cy="216024"/>
+          </a:xfrm>
+          <a:prstGeom prst="roundRect">
+            <a:avLst/>
+          </a:prstGeom>
+          <a:noFill/>
+          <a:ln w="28575">
+            <a:solidFill>
+              <a:srgbClr val="527DA4"/>
+            </a:solidFill>
+          </a:ln>
+        </p:spPr>
+        <p:style>
+          <a:lnRef idx="2">
+            <a:schemeClr val="accent1">
+              <a:shade val="50000"/>
+            </a:schemeClr>
+          </a:lnRef>
+          <a:fillRef idx="1">
+            <a:schemeClr val="accent1"/>
+          </a:fillRef>
+          <a:effectRef idx="0">
+            <a:schemeClr val="accent1"/>
+          </a:effectRef>
+          <a:fontRef idx="minor">
+            <a:schemeClr val="lt1"/>
+          </a:fontRef>
+        </p:style>
+        <p:txBody>
+          <a:bodyPr lIns="0" tIns="0" rIns="0" bIns="0" rtlCol="0" anchor="ctr"/>
+          <a:lstStyle/>
+          <a:p>
+            <a:pPr algn="ctr"/>
+            <a:r>
+              <a:rPr lang="de-DE" sz="1200" dirty="0">
+                <a:solidFill>
+                  <a:schemeClr val="tx1"/>
+                </a:solidFill>
+                <a:latin typeface="Arial" panose="020B0604020202020204" pitchFamily="34" charset="0"/>
+                <a:cs typeface="Arial" panose="020B0604020202020204" pitchFamily="34" charset="0"/>
+              </a:rPr>
+              <a:t>ECB </a:t>
+            </a:r>
+            <a:r>
+              <a:rPr lang="de-DE" sz="1200" dirty="0" err="1">
+                <a:solidFill>
+                  <a:schemeClr val="tx1"/>
+                </a:solidFill>
+                <a:latin typeface="Arial" panose="020B0604020202020204" pitchFamily="34" charset="0"/>
+                <a:cs typeface="Arial" panose="020B0604020202020204" pitchFamily="34" charset="0"/>
+              </a:rPr>
+              <a:t>panel</a:t>
+            </a:r>
+            <a:r>
+              <a:rPr lang="de-DE" sz="1200" dirty="0">
+                <a:solidFill>
+                  <a:schemeClr val="tx1"/>
+                </a:solidFill>
+                <a:latin typeface="Arial" panose="020B0604020202020204" pitchFamily="34" charset="0"/>
+                <a:cs typeface="Arial" panose="020B0604020202020204" pitchFamily="34" charset="0"/>
+              </a:rPr>
+              <a:t> </a:t>
+            </a:r>
+            <a:r>
+              <a:rPr lang="de-DE" sz="1200" dirty="0" err="1">
+                <a:solidFill>
+                  <a:schemeClr val="tx1"/>
+                </a:solidFill>
+                <a:latin typeface="Arial" panose="020B0604020202020204" pitchFamily="34" charset="0"/>
+                <a:cs typeface="Arial" panose="020B0604020202020204" pitchFamily="34" charset="0"/>
+              </a:rPr>
+              <a:t>updates</a:t>
+            </a:r>
+            <a:endParaRPr lang="de-DE" sz="1200" dirty="0">
+              <a:solidFill>
+                <a:schemeClr val="tx1"/>
+              </a:solidFill>
+              <a:latin typeface="Arial" panose="020B0604020202020204" pitchFamily="34" charset="0"/>
+              <a:cs typeface="Arial" panose="020B0604020202020204" pitchFamily="34" charset="0"/>
+            </a:endParaRPr>
+          </a:p>
+        </p:txBody>
+      </p:sp>
+      <p:cxnSp>
+        <p:nvCxnSpPr>
+          <p:cNvPr id="17" name="Verbinder: gewinkelt 16" descr="Student assistant updates Excel file">
+            <a:extLst>
+              <a:ext uri="{FF2B5EF4-FFF2-40B4-BE49-F238E27FC236}">
+                <a16:creationId xmlns:a16="http://schemas.microsoft.com/office/drawing/2014/main" id="{C8733E90-2C5F-6ED5-86DF-89D3B6C28EF0}"/>
+              </a:ext>
+            </a:extLst>
+          </p:cNvPr>
+          <p:cNvCxnSpPr>
+            <a:cxnSpLocks/>
+            <a:stCxn id="15" idx="3"/>
+            <a:endCxn id="2" idx="1"/>
+          </p:cNvCxnSpPr>
+          <p:nvPr/>
+        </p:nvCxnSpPr>
+        <p:spPr>
+          <a:xfrm flipV="1">
+            <a:off x="2720752" y="3104964"/>
+            <a:ext cx="792088" cy="2160240"/>
+          </a:xfrm>
+          <a:prstGeom prst="bentConnector3">
+            <a:avLst>
+              <a:gd name="adj1" fmla="val 50000"/>
+            </a:avLst>
+          </a:prstGeom>
+          <a:ln w="25400">
+            <a:headEnd type="none"/>
+            <a:tailEnd type="none"/>
+          </a:ln>
+          <a:effectLst/>
+        </p:spPr>
+        <p:style>
+          <a:lnRef idx="2">
+            <a:schemeClr val="accent1"/>
+          </a:lnRef>
+          <a:fillRef idx="0">
+            <a:schemeClr val="accent1"/>
+          </a:fillRef>
+          <a:effectRef idx="1">
+            <a:schemeClr val="accent1"/>
+          </a:effectRef>
+          <a:fontRef idx="minor">
+            <a:schemeClr val="tx1"/>
+          </a:fontRef>
+        </p:style>
+      </p:cxnSp>
     </p:spTree>
     <p:extLst>
       <p:ext uri="{BB962C8B-B14F-4D97-AF65-F5344CB8AC3E}">
@@ -8244,6 +8417,11 @@
   <p:clrMapOvr>
     <a:masterClrMapping/>
   </p:clrMapOvr>
+  <p:extLst>
+    <p:ext uri="{6950BFC3-D8DA-4A85-94F7-54DA5524770B}">
+      <p188:commentRel xmlns:p188="http://schemas.microsoft.com/office/powerpoint/2018/8/main" r:id="rId3"/>
+    </p:ext>
+  </p:extLst>
 </p:sld>
 </file>
 

--- a/doc/architecture.pptx
+++ b/doc/architecture.pptx
@@ -5,15 +5,16 @@
     <p:sldMasterId id="2147483648" r:id="rId1"/>
   </p:sldMasterIdLst>
   <p:notesMasterIdLst>
-    <p:notesMasterId r:id="rId5"/>
+    <p:notesMasterId r:id="rId6"/>
   </p:notesMasterIdLst>
   <p:handoutMasterIdLst>
-    <p:handoutMasterId r:id="rId6"/>
+    <p:handoutMasterId r:id="rId7"/>
   </p:handoutMasterIdLst>
   <p:sldIdLst>
     <p:sldId id="1406" r:id="rId2"/>
     <p:sldId id="1404" r:id="rId3"/>
     <p:sldId id="1405" r:id="rId4"/>
+    <p:sldId id="1407" r:id="rId5"/>
   </p:sldIdLst>
   <p:sldSz cx="9906000" cy="6858000" type="A4"/>
   <p:notesSz cx="6669088" cy="9926638"/>
@@ -1018,6 +1019,110 @@
     <p:extLst>
       <p:ext uri="{BB962C8B-B14F-4D97-AF65-F5344CB8AC3E}">
         <p14:creationId xmlns:p14="http://schemas.microsoft.com/office/powerpoint/2010/main" val="3998627090"/>
+      </p:ext>
+    </p:extLst>
+  </p:cSld>
+  <p:clrMapOvr>
+    <a:masterClrMapping/>
+  </p:clrMapOvr>
+</p:notes>
+</file>
+
+<file path=ppt/notesSlides/notesSlide4.xml><?xml version="1.0" encoding="utf-8"?>
+<p:notes xmlns:a="http://schemas.openxmlformats.org/drawingml/2006/main" xmlns:r="http://schemas.openxmlformats.org/officeDocument/2006/relationships" xmlns:p="http://schemas.openxmlformats.org/presentationml/2006/main">
+  <p:cSld>
+    <p:spTree>
+      <p:nvGrpSpPr>
+        <p:cNvPr id="1" name="">
+          <a:extLst>
+            <a:ext uri="{FF2B5EF4-FFF2-40B4-BE49-F238E27FC236}">
+              <a16:creationId xmlns:a16="http://schemas.microsoft.com/office/drawing/2014/main" id="{406869AD-0C6D-5AA8-0B82-B6777F9A045B}"/>
+            </a:ext>
+          </a:extLst>
+        </p:cNvPr>
+        <p:cNvGrpSpPr/>
+        <p:nvPr/>
+      </p:nvGrpSpPr>
+      <p:grpSpPr>
+        <a:xfrm>
+          <a:off x="0" y="0"/>
+          <a:ext cx="0" cy="0"/>
+          <a:chOff x="0" y="0"/>
+          <a:chExt cx="0" cy="0"/>
+        </a:xfrm>
+      </p:grpSpPr>
+      <p:sp>
+        <p:nvSpPr>
+          <p:cNvPr id="2" name="Folienbildplatzhalter 1">
+            <a:extLst>
+              <a:ext uri="{FF2B5EF4-FFF2-40B4-BE49-F238E27FC236}">
+                <a16:creationId xmlns:a16="http://schemas.microsoft.com/office/drawing/2014/main" id="{F68E1361-08D2-9739-99D5-9D17800AC54E}"/>
+              </a:ext>
+            </a:extLst>
+          </p:cNvPr>
+          <p:cNvSpPr>
+            <a:spLocks noGrp="1" noRot="1" noChangeAspect="1"/>
+          </p:cNvSpPr>
+          <p:nvPr>
+            <p:ph type="sldImg"/>
+          </p:nvPr>
+        </p:nvSpPr>
+        <p:spPr/>
+      </p:sp>
+      <p:sp>
+        <p:nvSpPr>
+          <p:cNvPr id="3" name="Notizenplatzhalter 2">
+            <a:extLst>
+              <a:ext uri="{FF2B5EF4-FFF2-40B4-BE49-F238E27FC236}">
+                <a16:creationId xmlns:a16="http://schemas.microsoft.com/office/drawing/2014/main" id="{080ECFA4-B0C6-5665-0683-BC298D23E159}"/>
+              </a:ext>
+            </a:extLst>
+          </p:cNvPr>
+          <p:cNvSpPr>
+            <a:spLocks noGrp="1"/>
+          </p:cNvSpPr>
+          <p:nvPr>
+            <p:ph type="body" idx="1"/>
+          </p:nvPr>
+        </p:nvSpPr>
+        <p:spPr/>
+        <p:txBody>
+          <a:bodyPr/>
+          <a:lstStyle/>
+          <a:p>
+            <a:endParaRPr lang="de-DE" dirty="0"/>
+          </a:p>
+        </p:txBody>
+      </p:sp>
+      <p:sp>
+        <p:nvSpPr>
+          <p:cNvPr id="4" name="Datumsplatzhalter 3">
+            <a:extLst>
+              <a:ext uri="{FF2B5EF4-FFF2-40B4-BE49-F238E27FC236}">
+                <a16:creationId xmlns:a16="http://schemas.microsoft.com/office/drawing/2014/main" id="{591FB0AA-C2CF-8469-F2EA-A4C254CA9387}"/>
+              </a:ext>
+            </a:extLst>
+          </p:cNvPr>
+          <p:cNvSpPr>
+            <a:spLocks noGrp="1"/>
+          </p:cNvSpPr>
+          <p:nvPr>
+            <p:ph type="dt" idx="10"/>
+          </p:nvPr>
+        </p:nvSpPr>
+        <p:spPr/>
+        <p:txBody>
+          <a:bodyPr/>
+          <a:lstStyle/>
+          <a:p>
+            <a:endParaRPr lang="de-DE"/>
+          </a:p>
+        </p:txBody>
+      </p:sp>
+    </p:spTree>
+    <p:extLst>
+      <p:ext uri="{BB962C8B-B14F-4D97-AF65-F5344CB8AC3E}">
+        <p14:creationId xmlns:p14="http://schemas.microsoft.com/office/powerpoint/2010/main" val="2612235228"/>
       </p:ext>
     </p:extLst>
   </p:cSld>
@@ -8407,6 +8512,41 @@
           </a:fontRef>
         </p:style>
       </p:cxnSp>
+      <p:sp>
+        <p:nvSpPr>
+          <p:cNvPr id="19" name="Textfeld 18">
+            <a:extLst>
+              <a:ext uri="{FF2B5EF4-FFF2-40B4-BE49-F238E27FC236}">
+                <a16:creationId xmlns:a16="http://schemas.microsoft.com/office/drawing/2014/main" id="{2EDD212D-7136-80A9-A6AE-0A38DFE6AF6C}"/>
+              </a:ext>
+            </a:extLst>
+          </p:cNvPr>
+          <p:cNvSpPr txBox="1"/>
+          <p:nvPr/>
+        </p:nvSpPr>
+        <p:spPr>
+          <a:xfrm>
+            <a:off x="2477814" y="3246961"/>
+            <a:ext cx="4955626" cy="369332"/>
+          </a:xfrm>
+          <a:prstGeom prst="rect">
+            <a:avLst/>
+          </a:prstGeom>
+          <a:noFill/>
+        </p:spPr>
+        <p:txBody>
+          <a:bodyPr wrap="square">
+            <a:spAutoFit/>
+          </a:bodyPr>
+          <a:lstStyle/>
+          <a:p>
+            <a:r>
+              <a:rPr lang="de-DE" dirty="0"/>
+              <a:t>https://www.zew.de/en/legal-note</a:t>
+            </a:r>
+          </a:p>
+        </p:txBody>
+      </p:sp>
     </p:spTree>
     <p:extLst>
       <p:ext uri="{BB962C8B-B14F-4D97-AF65-F5344CB8AC3E}">
@@ -8422,6 +8562,2413 @@
       <p188:commentRel xmlns:p188="http://schemas.microsoft.com/office/powerpoint/2018/8/main" r:id="rId3"/>
     </p:ext>
   </p:extLst>
+</p:sld>
+</file>
+
+<file path=ppt/slides/slide4.xml><?xml version="1.0" encoding="utf-8"?>
+<p:sld xmlns:a="http://schemas.openxmlformats.org/drawingml/2006/main" xmlns:r="http://schemas.openxmlformats.org/officeDocument/2006/relationships" xmlns:p="http://schemas.openxmlformats.org/presentationml/2006/main">
+  <p:cSld>
+    <p:spTree>
+      <p:nvGrpSpPr>
+        <p:cNvPr id="1" name="">
+          <a:extLst>
+            <a:ext uri="{FF2B5EF4-FFF2-40B4-BE49-F238E27FC236}">
+              <a16:creationId xmlns:a16="http://schemas.microsoft.com/office/drawing/2014/main" id="{735DC971-BE6E-6BE2-5394-2EDBD31C2E40}"/>
+            </a:ext>
+          </a:extLst>
+        </p:cNvPr>
+        <p:cNvGrpSpPr/>
+        <p:nvPr/>
+      </p:nvGrpSpPr>
+      <p:grpSpPr>
+        <a:xfrm>
+          <a:off x="0" y="0"/>
+          <a:ext cx="0" cy="0"/>
+          <a:chOff x="0" y="0"/>
+          <a:chExt cx="0" cy="0"/>
+        </a:xfrm>
+      </p:grpSpPr>
+      <p:sp>
+        <p:nvSpPr>
+          <p:cNvPr id="3" name="Foliennummernplatzhalter 2">
+            <a:extLst>
+              <a:ext uri="{FF2B5EF4-FFF2-40B4-BE49-F238E27FC236}">
+                <a16:creationId xmlns:a16="http://schemas.microsoft.com/office/drawing/2014/main" id="{BB20B746-C1F4-20EA-1E03-A17A9520B632}"/>
+              </a:ext>
+            </a:extLst>
+          </p:cNvPr>
+          <p:cNvSpPr>
+            <a:spLocks noGrp="1"/>
+          </p:cNvSpPr>
+          <p:nvPr>
+            <p:ph type="sldNum" sz="quarter" idx="4"/>
+          </p:nvPr>
+        </p:nvSpPr>
+        <p:spPr/>
+        <p:txBody>
+          <a:bodyPr/>
+          <a:lstStyle/>
+          <a:p>
+            <a:fld id="{E1A12CDA-83D3-4EF4-BC0D-8D5887487634}" type="slidenum">
+              <a:rPr lang="de-DE" smtClean="0"/>
+              <a:pPr/>
+              <a:t>4</a:t>
+            </a:fld>
+            <a:endParaRPr lang="de-DE" dirty="0"/>
+          </a:p>
+        </p:txBody>
+      </p:sp>
+      <p:sp>
+        <p:nvSpPr>
+          <p:cNvPr id="4" name="Titel 3">
+            <a:extLst>
+              <a:ext uri="{FF2B5EF4-FFF2-40B4-BE49-F238E27FC236}">
+                <a16:creationId xmlns:a16="http://schemas.microsoft.com/office/drawing/2014/main" id="{9426476D-53B6-A7B4-9533-BA5B99D70991}"/>
+              </a:ext>
+            </a:extLst>
+          </p:cNvPr>
+          <p:cNvSpPr>
+            <a:spLocks noGrp="1"/>
+          </p:cNvSpPr>
+          <p:nvPr>
+            <p:ph type="title"/>
+          </p:nvPr>
+        </p:nvSpPr>
+        <p:spPr>
+          <a:xfrm>
+            <a:off x="633413" y="763588"/>
+            <a:ext cx="9272587" cy="981794"/>
+          </a:xfrm>
+        </p:spPr>
+        <p:txBody>
+          <a:bodyPr/>
+          <a:lstStyle/>
+          <a:p>
+            <a:r>
+              <a:rPr lang="en-GB" noProof="0" dirty="0"/>
+              <a:t>IT System - Underbelly</a:t>
+            </a:r>
+          </a:p>
+        </p:txBody>
+      </p:sp>
+      <p:sp>
+        <p:nvSpPr>
+          <p:cNvPr id="7" name="Rechteck: abgerundete Ecken 6">
+            <a:extLst>
+              <a:ext uri="{FF2B5EF4-FFF2-40B4-BE49-F238E27FC236}">
+                <a16:creationId xmlns:a16="http://schemas.microsoft.com/office/drawing/2014/main" id="{3AEA5551-B689-F208-69F2-96C7EC08EF02}"/>
+              </a:ext>
+            </a:extLst>
+          </p:cNvPr>
+          <p:cNvSpPr/>
+          <p:nvPr/>
+        </p:nvSpPr>
+        <p:spPr>
+          <a:xfrm>
+            <a:off x="2677592" y="1640940"/>
+            <a:ext cx="1296144" cy="576064"/>
+          </a:xfrm>
+          <a:prstGeom prst="roundRect">
+            <a:avLst/>
+          </a:prstGeom>
+          <a:ln/>
+        </p:spPr>
+        <p:style>
+          <a:lnRef idx="2">
+            <a:schemeClr val="accent2"/>
+          </a:lnRef>
+          <a:fillRef idx="1">
+            <a:schemeClr val="lt1"/>
+          </a:fillRef>
+          <a:effectRef idx="0">
+            <a:schemeClr val="accent2"/>
+          </a:effectRef>
+          <a:fontRef idx="minor">
+            <a:schemeClr val="dk1"/>
+          </a:fontRef>
+        </p:style>
+        <p:txBody>
+          <a:bodyPr lIns="0" tIns="0" rIns="0" bIns="0" rtlCol="0" anchor="ctr"/>
+          <a:lstStyle/>
+          <a:p>
+            <a:pPr algn="ctr"/>
+            <a:r>
+              <a:rPr lang="de-DE" sz="1600" dirty="0" err="1">
+                <a:solidFill>
+                  <a:schemeClr val="tx1"/>
+                </a:solidFill>
+                <a:latin typeface="Arial" panose="020B0604020202020204" pitchFamily="34" charset="0"/>
+                <a:cs typeface="Arial" panose="020B0604020202020204" pitchFamily="34" charset="0"/>
+              </a:rPr>
+              <a:t>Few</a:t>
+            </a:r>
+            <a:br>
+              <a:rPr lang="de-DE" sz="1600" dirty="0">
+                <a:solidFill>
+                  <a:schemeClr val="tx1"/>
+                </a:solidFill>
+                <a:latin typeface="Arial" panose="020B0604020202020204" pitchFamily="34" charset="0"/>
+                <a:cs typeface="Arial" panose="020B0604020202020204" pitchFamily="34" charset="0"/>
+              </a:rPr>
+            </a:br>
+            <a:r>
+              <a:rPr lang="de-DE" sz="1600" dirty="0">
+                <a:solidFill>
+                  <a:schemeClr val="tx1"/>
+                </a:solidFill>
+                <a:latin typeface="Arial" panose="020B0604020202020204" pitchFamily="34" charset="0"/>
+                <a:cs typeface="Arial" panose="020B0604020202020204" pitchFamily="34" charset="0"/>
+              </a:rPr>
+              <a:t>HTML </a:t>
+            </a:r>
+            <a:r>
+              <a:rPr lang="de-DE" sz="1600" dirty="0" err="1">
+                <a:solidFill>
+                  <a:schemeClr val="tx1"/>
+                </a:solidFill>
+                <a:latin typeface="Arial" panose="020B0604020202020204" pitchFamily="34" charset="0"/>
+                <a:cs typeface="Arial" panose="020B0604020202020204" pitchFamily="34" charset="0"/>
+              </a:rPr>
+              <a:t>pages</a:t>
+            </a:r>
+            <a:endParaRPr lang="de-DE" sz="1600" dirty="0">
+              <a:solidFill>
+                <a:schemeClr val="tx1"/>
+              </a:solidFill>
+              <a:latin typeface="Arial" panose="020B0604020202020204" pitchFamily="34" charset="0"/>
+              <a:cs typeface="Arial" panose="020B0604020202020204" pitchFamily="34" charset="0"/>
+            </a:endParaRPr>
+          </a:p>
+        </p:txBody>
+      </p:sp>
+      <p:sp>
+        <p:nvSpPr>
+          <p:cNvPr id="8" name="Rechteck: abgerundete Ecken 7">
+            <a:extLst>
+              <a:ext uri="{FF2B5EF4-FFF2-40B4-BE49-F238E27FC236}">
+                <a16:creationId xmlns:a16="http://schemas.microsoft.com/office/drawing/2014/main" id="{DE9C637D-030D-3E12-A343-91CC9C8C8E1C}"/>
+              </a:ext>
+            </a:extLst>
+          </p:cNvPr>
+          <p:cNvSpPr/>
+          <p:nvPr/>
+        </p:nvSpPr>
+        <p:spPr>
+          <a:xfrm>
+            <a:off x="2362272" y="5869464"/>
+            <a:ext cx="1296144" cy="576064"/>
+          </a:xfrm>
+          <a:prstGeom prst="roundRect">
+            <a:avLst/>
+          </a:prstGeom>
+          <a:ln/>
+        </p:spPr>
+        <p:style>
+          <a:lnRef idx="2">
+            <a:schemeClr val="accent2"/>
+          </a:lnRef>
+          <a:fillRef idx="1">
+            <a:schemeClr val="lt1"/>
+          </a:fillRef>
+          <a:effectRef idx="0">
+            <a:schemeClr val="accent2"/>
+          </a:effectRef>
+          <a:fontRef idx="minor">
+            <a:schemeClr val="dk1"/>
+          </a:fontRef>
+        </p:style>
+        <p:txBody>
+          <a:bodyPr lIns="0" tIns="0" rIns="0" bIns="0" rtlCol="0" anchor="ctr"/>
+          <a:lstStyle/>
+          <a:p>
+            <a:pPr algn="ctr"/>
+            <a:r>
+              <a:rPr lang="de-DE" sz="1600" dirty="0">
+                <a:solidFill>
+                  <a:schemeClr val="tx1"/>
+                </a:solidFill>
+                <a:latin typeface="Arial" panose="020B0604020202020204" pitchFamily="34" charset="0"/>
+                <a:cs typeface="Arial" panose="020B0604020202020204" pitchFamily="34" charset="0"/>
+              </a:rPr>
+              <a:t>Linux</a:t>
+            </a:r>
+            <a:br>
+              <a:rPr lang="de-DE" sz="1600" dirty="0">
+                <a:solidFill>
+                  <a:schemeClr val="tx1"/>
+                </a:solidFill>
+                <a:latin typeface="Arial" panose="020B0604020202020204" pitchFamily="34" charset="0"/>
+                <a:cs typeface="Arial" panose="020B0604020202020204" pitchFamily="34" charset="0"/>
+              </a:rPr>
+            </a:br>
+            <a:r>
+              <a:rPr lang="de-DE" sz="1600" dirty="0">
+                <a:solidFill>
+                  <a:schemeClr val="tx1"/>
+                </a:solidFill>
+                <a:latin typeface="Arial" panose="020B0604020202020204" pitchFamily="34" charset="0"/>
+                <a:cs typeface="Arial" panose="020B0604020202020204" pitchFamily="34" charset="0"/>
+              </a:rPr>
+              <a:t>Setup</a:t>
+            </a:r>
+          </a:p>
+        </p:txBody>
+      </p:sp>
+      <p:sp>
+        <p:nvSpPr>
+          <p:cNvPr id="9" name="Rechteck: abgerundete Ecken 8">
+            <a:extLst>
+              <a:ext uri="{FF2B5EF4-FFF2-40B4-BE49-F238E27FC236}">
+                <a16:creationId xmlns:a16="http://schemas.microsoft.com/office/drawing/2014/main" id="{1C7C33B3-BB5C-DB07-EEDF-6334EEB4FBCB}"/>
+              </a:ext>
+            </a:extLst>
+          </p:cNvPr>
+          <p:cNvSpPr/>
+          <p:nvPr/>
+        </p:nvSpPr>
+        <p:spPr>
+          <a:xfrm>
+            <a:off x="3325664" y="5038790"/>
+            <a:ext cx="1296144" cy="576064"/>
+          </a:xfrm>
+          <a:prstGeom prst="roundRect">
+            <a:avLst/>
+          </a:prstGeom>
+          <a:ln/>
+        </p:spPr>
+        <p:style>
+          <a:lnRef idx="2">
+            <a:schemeClr val="accent2"/>
+          </a:lnRef>
+          <a:fillRef idx="1">
+            <a:schemeClr val="lt1"/>
+          </a:fillRef>
+          <a:effectRef idx="0">
+            <a:schemeClr val="accent2"/>
+          </a:effectRef>
+          <a:fontRef idx="minor">
+            <a:schemeClr val="dk1"/>
+          </a:fontRef>
+        </p:style>
+        <p:txBody>
+          <a:bodyPr lIns="0" tIns="0" rIns="0" bIns="0" rtlCol="0" anchor="ctr"/>
+          <a:lstStyle/>
+          <a:p>
+            <a:pPr algn="ctr"/>
+            <a:r>
+              <a:rPr lang="de-DE" sz="1600" dirty="0" err="1">
+                <a:solidFill>
+                  <a:schemeClr val="tx1"/>
+                </a:solidFill>
+                <a:latin typeface="Arial" panose="020B0604020202020204" pitchFamily="34" charset="0"/>
+                <a:cs typeface="Arial" panose="020B0604020202020204" pitchFamily="34" charset="0"/>
+              </a:rPr>
+              <a:t>Certificates</a:t>
+            </a:r>
+            <a:br>
+              <a:rPr lang="de-DE" sz="1600" dirty="0">
+                <a:solidFill>
+                  <a:schemeClr val="tx1"/>
+                </a:solidFill>
+                <a:latin typeface="Arial" panose="020B0604020202020204" pitchFamily="34" charset="0"/>
+                <a:cs typeface="Arial" panose="020B0604020202020204" pitchFamily="34" charset="0"/>
+              </a:rPr>
+            </a:br>
+            <a:r>
+              <a:rPr lang="de-DE" sz="1600" dirty="0">
+                <a:solidFill>
+                  <a:schemeClr val="tx1"/>
+                </a:solidFill>
+                <a:latin typeface="Arial" panose="020B0604020202020204" pitchFamily="34" charset="0"/>
+                <a:cs typeface="Arial" panose="020B0604020202020204" pitchFamily="34" charset="0"/>
+              </a:rPr>
+              <a:t>Sec-Headers</a:t>
+            </a:r>
+          </a:p>
+        </p:txBody>
+      </p:sp>
+      <p:sp>
+        <p:nvSpPr>
+          <p:cNvPr id="10" name="Rechteck: abgerundete Ecken 9">
+            <a:extLst>
+              <a:ext uri="{FF2B5EF4-FFF2-40B4-BE49-F238E27FC236}">
+                <a16:creationId xmlns:a16="http://schemas.microsoft.com/office/drawing/2014/main" id="{8C3238BE-31CB-A552-0EEE-C87318D1AF17}"/>
+              </a:ext>
+            </a:extLst>
+          </p:cNvPr>
+          <p:cNvSpPr/>
+          <p:nvPr/>
+        </p:nvSpPr>
+        <p:spPr>
+          <a:xfrm>
+            <a:off x="1856656" y="5046038"/>
+            <a:ext cx="1296144" cy="576064"/>
+          </a:xfrm>
+          <a:prstGeom prst="roundRect">
+            <a:avLst/>
+          </a:prstGeom>
+          <a:ln/>
+        </p:spPr>
+        <p:style>
+          <a:lnRef idx="2">
+            <a:schemeClr val="accent2"/>
+          </a:lnRef>
+          <a:fillRef idx="1">
+            <a:schemeClr val="lt1"/>
+          </a:fillRef>
+          <a:effectRef idx="0">
+            <a:schemeClr val="accent2"/>
+          </a:effectRef>
+          <a:fontRef idx="minor">
+            <a:schemeClr val="dk1"/>
+          </a:fontRef>
+        </p:style>
+        <p:txBody>
+          <a:bodyPr lIns="0" tIns="0" rIns="0" bIns="0" rtlCol="0" anchor="ctr"/>
+          <a:lstStyle/>
+          <a:p>
+            <a:pPr algn="ctr"/>
+            <a:br>
+              <a:rPr lang="de-DE" sz="1600" dirty="0">
+                <a:solidFill>
+                  <a:schemeClr val="tx1"/>
+                </a:solidFill>
+                <a:latin typeface="Arial" panose="020B0604020202020204" pitchFamily="34" charset="0"/>
+                <a:cs typeface="Arial" panose="020B0604020202020204" pitchFamily="34" charset="0"/>
+              </a:rPr>
+            </a:br>
+            <a:r>
+              <a:rPr lang="de-DE" sz="1600" dirty="0">
+                <a:solidFill>
+                  <a:schemeClr val="tx1"/>
+                </a:solidFill>
+                <a:latin typeface="Arial" panose="020B0604020202020204" pitchFamily="34" charset="0"/>
+                <a:cs typeface="Arial" panose="020B0604020202020204" pitchFamily="34" charset="0"/>
+              </a:rPr>
+              <a:t>Webserver + DNS</a:t>
+            </a:r>
+            <a:br>
+              <a:rPr lang="de-DE" sz="1600" dirty="0">
+                <a:solidFill>
+                  <a:schemeClr val="tx1"/>
+                </a:solidFill>
+                <a:latin typeface="Arial" panose="020B0604020202020204" pitchFamily="34" charset="0"/>
+                <a:cs typeface="Arial" panose="020B0604020202020204" pitchFamily="34" charset="0"/>
+              </a:rPr>
+            </a:br>
+            <a:endParaRPr lang="de-DE" sz="1600" dirty="0">
+              <a:solidFill>
+                <a:schemeClr val="tx1"/>
+              </a:solidFill>
+              <a:latin typeface="Arial" panose="020B0604020202020204" pitchFamily="34" charset="0"/>
+              <a:cs typeface="Arial" panose="020B0604020202020204" pitchFamily="34" charset="0"/>
+            </a:endParaRPr>
+          </a:p>
+        </p:txBody>
+      </p:sp>
+      <p:sp>
+        <p:nvSpPr>
+          <p:cNvPr id="11" name="Rechteck: abgerundete Ecken 10">
+            <a:extLst>
+              <a:ext uri="{FF2B5EF4-FFF2-40B4-BE49-F238E27FC236}">
+                <a16:creationId xmlns:a16="http://schemas.microsoft.com/office/drawing/2014/main" id="{3D489556-CB43-5166-2DF0-ABCFEE2C0AB5}"/>
+              </a:ext>
+            </a:extLst>
+          </p:cNvPr>
+          <p:cNvSpPr/>
+          <p:nvPr/>
+        </p:nvSpPr>
+        <p:spPr>
+          <a:xfrm>
+            <a:off x="6385026" y="5038790"/>
+            <a:ext cx="1296144" cy="576064"/>
+          </a:xfrm>
+          <a:prstGeom prst="roundRect">
+            <a:avLst/>
+          </a:prstGeom>
+          <a:ln/>
+        </p:spPr>
+        <p:style>
+          <a:lnRef idx="2">
+            <a:schemeClr val="accent2"/>
+          </a:lnRef>
+          <a:fillRef idx="1">
+            <a:schemeClr val="lt1"/>
+          </a:fillRef>
+          <a:effectRef idx="0">
+            <a:schemeClr val="accent2"/>
+          </a:effectRef>
+          <a:fontRef idx="minor">
+            <a:schemeClr val="dk1"/>
+          </a:fontRef>
+        </p:style>
+        <p:txBody>
+          <a:bodyPr lIns="0" tIns="0" rIns="0" bIns="0" rtlCol="0" anchor="ctr"/>
+          <a:lstStyle/>
+          <a:p>
+            <a:pPr algn="ctr"/>
+            <a:r>
+              <a:rPr lang="de-DE" sz="1600" dirty="0" err="1">
+                <a:solidFill>
+                  <a:schemeClr val="tx1"/>
+                </a:solidFill>
+                <a:latin typeface="Arial" panose="020B0604020202020204" pitchFamily="34" charset="0"/>
+                <a:cs typeface="Arial" panose="020B0604020202020204" pitchFamily="34" charset="0"/>
+              </a:rPr>
+              <a:t>Statistics</a:t>
+            </a:r>
+            <a:br>
+              <a:rPr lang="de-DE" sz="1600" dirty="0">
+                <a:solidFill>
+                  <a:schemeClr val="tx1"/>
+                </a:solidFill>
+                <a:latin typeface="Arial" panose="020B0604020202020204" pitchFamily="34" charset="0"/>
+                <a:cs typeface="Arial" panose="020B0604020202020204" pitchFamily="34" charset="0"/>
+              </a:rPr>
+            </a:br>
+            <a:r>
+              <a:rPr lang="de-DE" sz="1600" dirty="0" err="1">
+                <a:solidFill>
+                  <a:schemeClr val="tx1"/>
+                </a:solidFill>
+                <a:latin typeface="Arial" panose="020B0604020202020204" pitchFamily="34" charset="0"/>
+                <a:cs typeface="Arial" panose="020B0604020202020204" pitchFamily="34" charset="0"/>
+              </a:rPr>
+              <a:t>server</a:t>
+            </a:r>
+            <a:endParaRPr lang="de-DE" sz="1600" dirty="0">
+              <a:solidFill>
+                <a:schemeClr val="tx1"/>
+              </a:solidFill>
+              <a:latin typeface="Arial" panose="020B0604020202020204" pitchFamily="34" charset="0"/>
+              <a:cs typeface="Arial" panose="020B0604020202020204" pitchFamily="34" charset="0"/>
+            </a:endParaRPr>
+          </a:p>
+        </p:txBody>
+      </p:sp>
+      <p:sp>
+        <p:nvSpPr>
+          <p:cNvPr id="12" name="Rechteck: abgerundete Ecken 11">
+            <a:extLst>
+              <a:ext uri="{FF2B5EF4-FFF2-40B4-BE49-F238E27FC236}">
+                <a16:creationId xmlns:a16="http://schemas.microsoft.com/office/drawing/2014/main" id="{A95FC00B-A235-F77F-C879-C11DC0135BDE}"/>
+              </a:ext>
+            </a:extLst>
+          </p:cNvPr>
+          <p:cNvSpPr/>
+          <p:nvPr/>
+        </p:nvSpPr>
+        <p:spPr>
+          <a:xfrm>
+            <a:off x="5127310" y="3419942"/>
+            <a:ext cx="1296144" cy="576064"/>
+          </a:xfrm>
+          <a:prstGeom prst="roundRect">
+            <a:avLst/>
+          </a:prstGeom>
+          <a:ln/>
+        </p:spPr>
+        <p:style>
+          <a:lnRef idx="2">
+            <a:schemeClr val="accent2"/>
+          </a:lnRef>
+          <a:fillRef idx="1">
+            <a:schemeClr val="lt1"/>
+          </a:fillRef>
+          <a:effectRef idx="0">
+            <a:schemeClr val="accent2"/>
+          </a:effectRef>
+          <a:fontRef idx="minor">
+            <a:schemeClr val="dk1"/>
+          </a:fontRef>
+        </p:style>
+        <p:txBody>
+          <a:bodyPr lIns="0" tIns="0" rIns="0" bIns="0" rtlCol="0" anchor="ctr"/>
+          <a:lstStyle/>
+          <a:p>
+            <a:pPr algn="ctr"/>
+            <a:r>
+              <a:rPr lang="de-DE" sz="1600" dirty="0">
+                <a:solidFill>
+                  <a:schemeClr val="tx1"/>
+                </a:solidFill>
+                <a:latin typeface="Arial" panose="020B0604020202020204" pitchFamily="34" charset="0"/>
+                <a:cs typeface="Arial" panose="020B0604020202020204" pitchFamily="34" charset="0"/>
+              </a:rPr>
+              <a:t>Integration</a:t>
+            </a:r>
+            <a:br>
+              <a:rPr lang="de-DE" sz="1600" dirty="0">
+                <a:solidFill>
+                  <a:schemeClr val="tx1"/>
+                </a:solidFill>
+                <a:latin typeface="Arial" panose="020B0604020202020204" pitchFamily="34" charset="0"/>
+                <a:cs typeface="Arial" panose="020B0604020202020204" pitchFamily="34" charset="0"/>
+              </a:rPr>
+            </a:br>
+            <a:r>
+              <a:rPr lang="de-DE" sz="1600" dirty="0" err="1">
+                <a:solidFill>
+                  <a:schemeClr val="tx1"/>
+                </a:solidFill>
+                <a:latin typeface="Arial" panose="020B0604020202020204" pitchFamily="34" charset="0"/>
+                <a:cs typeface="Arial" panose="020B0604020202020204" pitchFamily="34" charset="0"/>
+              </a:rPr>
+              <a:t>into</a:t>
+            </a:r>
+            <a:r>
+              <a:rPr lang="de-DE" sz="1600" dirty="0">
+                <a:solidFill>
+                  <a:schemeClr val="tx1"/>
+                </a:solidFill>
+                <a:latin typeface="Arial" panose="020B0604020202020204" pitchFamily="34" charset="0"/>
+                <a:cs typeface="Arial" panose="020B0604020202020204" pitchFamily="34" charset="0"/>
+              </a:rPr>
+              <a:t> zew.de</a:t>
+            </a:r>
+          </a:p>
+        </p:txBody>
+      </p:sp>
+      <p:sp>
+        <p:nvSpPr>
+          <p:cNvPr id="13" name="Rechteck: abgerundete Ecken 12">
+            <a:extLst>
+              <a:ext uri="{FF2B5EF4-FFF2-40B4-BE49-F238E27FC236}">
+                <a16:creationId xmlns:a16="http://schemas.microsoft.com/office/drawing/2014/main" id="{2D59DE65-AC14-90B9-5418-1659A6595F93}"/>
+              </a:ext>
+            </a:extLst>
+          </p:cNvPr>
+          <p:cNvSpPr/>
+          <p:nvPr/>
+        </p:nvSpPr>
+        <p:spPr>
+          <a:xfrm>
+            <a:off x="3660800" y="3414242"/>
+            <a:ext cx="1296144" cy="576064"/>
+          </a:xfrm>
+          <a:prstGeom prst="roundRect">
+            <a:avLst/>
+          </a:prstGeom>
+          <a:ln/>
+        </p:spPr>
+        <p:style>
+          <a:lnRef idx="2">
+            <a:schemeClr val="accent2"/>
+          </a:lnRef>
+          <a:fillRef idx="1">
+            <a:schemeClr val="lt1"/>
+          </a:fillRef>
+          <a:effectRef idx="0">
+            <a:schemeClr val="accent2"/>
+          </a:effectRef>
+          <a:fontRef idx="minor">
+            <a:schemeClr val="dk1"/>
+          </a:fontRef>
+        </p:style>
+        <p:txBody>
+          <a:bodyPr lIns="0" tIns="0" rIns="0" bIns="0" rtlCol="0" anchor="ctr"/>
+          <a:lstStyle/>
+          <a:p>
+            <a:pPr algn="ctr"/>
+            <a:r>
+              <a:rPr lang="de-DE" sz="1600" dirty="0">
+                <a:solidFill>
+                  <a:schemeClr val="tx1"/>
+                </a:solidFill>
+                <a:latin typeface="Arial" panose="020B0604020202020204" pitchFamily="34" charset="0"/>
+                <a:cs typeface="Arial" panose="020B0604020202020204" pitchFamily="34" charset="0"/>
+              </a:rPr>
+              <a:t>Mobile</a:t>
+            </a:r>
+            <a:br>
+              <a:rPr lang="de-DE" sz="1600" dirty="0">
+                <a:solidFill>
+                  <a:schemeClr val="tx1"/>
+                </a:solidFill>
+                <a:latin typeface="Arial" panose="020B0604020202020204" pitchFamily="34" charset="0"/>
+                <a:cs typeface="Arial" panose="020B0604020202020204" pitchFamily="34" charset="0"/>
+              </a:rPr>
+            </a:br>
+            <a:r>
+              <a:rPr lang="de-DE" sz="1600" dirty="0" err="1">
+                <a:solidFill>
+                  <a:schemeClr val="tx1"/>
+                </a:solidFill>
+                <a:latin typeface="Arial" panose="020B0604020202020204" pitchFamily="34" charset="0"/>
+                <a:cs typeface="Arial" panose="020B0604020202020204" pitchFamily="34" charset="0"/>
+              </a:rPr>
+              <a:t>view</a:t>
+            </a:r>
+            <a:endParaRPr lang="de-DE" sz="1600" dirty="0">
+              <a:solidFill>
+                <a:schemeClr val="tx1"/>
+              </a:solidFill>
+              <a:latin typeface="Arial" panose="020B0604020202020204" pitchFamily="34" charset="0"/>
+              <a:cs typeface="Arial" panose="020B0604020202020204" pitchFamily="34" charset="0"/>
+            </a:endParaRPr>
+          </a:p>
+        </p:txBody>
+      </p:sp>
+      <p:sp>
+        <p:nvSpPr>
+          <p:cNvPr id="14" name="Rechteck: abgerundete Ecken 13">
+            <a:extLst>
+              <a:ext uri="{FF2B5EF4-FFF2-40B4-BE49-F238E27FC236}">
+                <a16:creationId xmlns:a16="http://schemas.microsoft.com/office/drawing/2014/main" id="{A9E11685-0E5C-E74E-EC51-458F80FCC137}"/>
+              </a:ext>
+            </a:extLst>
+          </p:cNvPr>
+          <p:cNvSpPr/>
+          <p:nvPr/>
+        </p:nvSpPr>
+        <p:spPr>
+          <a:xfrm>
+            <a:off x="8094180" y="3427190"/>
+            <a:ext cx="1296144" cy="576064"/>
+          </a:xfrm>
+          <a:prstGeom prst="roundRect">
+            <a:avLst/>
+          </a:prstGeom>
+          <a:ln/>
+        </p:spPr>
+        <p:style>
+          <a:lnRef idx="2">
+            <a:schemeClr val="accent2"/>
+          </a:lnRef>
+          <a:fillRef idx="1">
+            <a:schemeClr val="lt1"/>
+          </a:fillRef>
+          <a:effectRef idx="0">
+            <a:schemeClr val="accent2"/>
+          </a:effectRef>
+          <a:fontRef idx="minor">
+            <a:schemeClr val="dk1"/>
+          </a:fontRef>
+        </p:style>
+        <p:txBody>
+          <a:bodyPr lIns="0" tIns="0" rIns="0" bIns="0" rtlCol="0" anchor="ctr"/>
+          <a:lstStyle/>
+          <a:p>
+            <a:pPr algn="ctr"/>
+            <a:r>
+              <a:rPr lang="de-DE" sz="1600" dirty="0">
+                <a:solidFill>
+                  <a:schemeClr val="tx1"/>
+                </a:solidFill>
+                <a:latin typeface="Arial" panose="020B0604020202020204" pitchFamily="34" charset="0"/>
+                <a:cs typeface="Arial" panose="020B0604020202020204" pitchFamily="34" charset="0"/>
+              </a:rPr>
+              <a:t>Graphics</a:t>
+            </a:r>
+            <a:br>
+              <a:rPr lang="de-DE" sz="1600" dirty="0">
+                <a:solidFill>
+                  <a:schemeClr val="tx1"/>
+                </a:solidFill>
+                <a:latin typeface="Arial" panose="020B0604020202020204" pitchFamily="34" charset="0"/>
+                <a:cs typeface="Arial" panose="020B0604020202020204" pitchFamily="34" charset="0"/>
+              </a:rPr>
+            </a:br>
+            <a:r>
+              <a:rPr lang="de-DE" sz="1600" dirty="0" err="1">
+                <a:solidFill>
+                  <a:schemeClr val="tx1"/>
+                </a:solidFill>
+                <a:latin typeface="Arial" panose="020B0604020202020204" pitchFamily="34" charset="0"/>
+                <a:cs typeface="Arial" panose="020B0604020202020204" pitchFamily="34" charset="0"/>
+              </a:rPr>
+              <a:t>production</a:t>
+            </a:r>
+            <a:endParaRPr lang="de-DE" sz="1600" dirty="0">
+              <a:solidFill>
+                <a:schemeClr val="tx1"/>
+              </a:solidFill>
+              <a:latin typeface="Arial" panose="020B0604020202020204" pitchFamily="34" charset="0"/>
+              <a:cs typeface="Arial" panose="020B0604020202020204" pitchFamily="34" charset="0"/>
+            </a:endParaRPr>
+          </a:p>
+        </p:txBody>
+      </p:sp>
+      <p:sp>
+        <p:nvSpPr>
+          <p:cNvPr id="15" name="Rechteck: abgerundete Ecken 14">
+            <a:extLst>
+              <a:ext uri="{FF2B5EF4-FFF2-40B4-BE49-F238E27FC236}">
+                <a16:creationId xmlns:a16="http://schemas.microsoft.com/office/drawing/2014/main" id="{34BD95DD-0D76-E7C7-5FF1-45B611C349E0}"/>
+              </a:ext>
+            </a:extLst>
+          </p:cNvPr>
+          <p:cNvSpPr/>
+          <p:nvPr/>
+        </p:nvSpPr>
+        <p:spPr>
+          <a:xfrm>
+            <a:off x="6609184" y="3427190"/>
+            <a:ext cx="1296144" cy="576064"/>
+          </a:xfrm>
+          <a:prstGeom prst="roundRect">
+            <a:avLst/>
+          </a:prstGeom>
+          <a:ln/>
+        </p:spPr>
+        <p:style>
+          <a:lnRef idx="2">
+            <a:schemeClr val="accent2"/>
+          </a:lnRef>
+          <a:fillRef idx="1">
+            <a:schemeClr val="lt1"/>
+          </a:fillRef>
+          <a:effectRef idx="0">
+            <a:schemeClr val="accent2"/>
+          </a:effectRef>
+          <a:fontRef idx="minor">
+            <a:schemeClr val="dk1"/>
+          </a:fontRef>
+        </p:style>
+        <p:txBody>
+          <a:bodyPr lIns="0" tIns="0" rIns="0" bIns="0" rtlCol="0" anchor="ctr"/>
+          <a:lstStyle/>
+          <a:p>
+            <a:pPr algn="ctr"/>
+            <a:r>
+              <a:rPr lang="de-DE" sz="1600" dirty="0">
+                <a:solidFill>
+                  <a:schemeClr val="tx1"/>
+                </a:solidFill>
+                <a:latin typeface="Arial" panose="020B0604020202020204" pitchFamily="34" charset="0"/>
+                <a:cs typeface="Arial" panose="020B0604020202020204" pitchFamily="34" charset="0"/>
+              </a:rPr>
+              <a:t>I18N</a:t>
+            </a:r>
+          </a:p>
+        </p:txBody>
+      </p:sp>
+      <p:sp>
+        <p:nvSpPr>
+          <p:cNvPr id="16" name="Rechteck: abgerundete Ecken 15">
+            <a:extLst>
+              <a:ext uri="{FF2B5EF4-FFF2-40B4-BE49-F238E27FC236}">
+                <a16:creationId xmlns:a16="http://schemas.microsoft.com/office/drawing/2014/main" id="{092A960B-167A-F048-C0D7-63F1772A742E}"/>
+              </a:ext>
+            </a:extLst>
+          </p:cNvPr>
+          <p:cNvSpPr/>
+          <p:nvPr/>
+        </p:nvSpPr>
+        <p:spPr>
+          <a:xfrm>
+            <a:off x="775748" y="4234910"/>
+            <a:ext cx="1296144" cy="576064"/>
+          </a:xfrm>
+          <a:prstGeom prst="roundRect">
+            <a:avLst/>
+          </a:prstGeom>
+          <a:ln/>
+        </p:spPr>
+        <p:style>
+          <a:lnRef idx="2">
+            <a:schemeClr val="accent2"/>
+          </a:lnRef>
+          <a:fillRef idx="1">
+            <a:schemeClr val="lt1"/>
+          </a:fillRef>
+          <a:effectRef idx="0">
+            <a:schemeClr val="accent2"/>
+          </a:effectRef>
+          <a:fontRef idx="minor">
+            <a:schemeClr val="dk1"/>
+          </a:fontRef>
+        </p:style>
+        <p:txBody>
+          <a:bodyPr lIns="0" tIns="0" rIns="0" bIns="0" rtlCol="0" anchor="ctr"/>
+          <a:lstStyle/>
+          <a:p>
+            <a:pPr algn="ctr"/>
+            <a:r>
+              <a:rPr lang="de-DE" sz="1600" dirty="0">
+                <a:solidFill>
+                  <a:schemeClr val="tx1"/>
+                </a:solidFill>
+                <a:latin typeface="Arial" panose="020B0604020202020204" pitchFamily="34" charset="0"/>
+                <a:cs typeface="Arial" panose="020B0604020202020204" pitchFamily="34" charset="0"/>
+              </a:rPr>
+              <a:t>Router</a:t>
+            </a:r>
+            <a:br>
+              <a:rPr lang="de-DE" sz="1600" dirty="0">
+                <a:solidFill>
+                  <a:schemeClr val="tx1"/>
+                </a:solidFill>
+                <a:latin typeface="Arial" panose="020B0604020202020204" pitchFamily="34" charset="0"/>
+                <a:cs typeface="Arial" panose="020B0604020202020204" pitchFamily="34" charset="0"/>
+              </a:rPr>
+            </a:br>
+            <a:r>
+              <a:rPr lang="de-DE" sz="1600" dirty="0" err="1">
+                <a:solidFill>
+                  <a:schemeClr val="tx1"/>
+                </a:solidFill>
+                <a:latin typeface="Arial" panose="020B0604020202020204" pitchFamily="34" charset="0"/>
+                <a:cs typeface="Arial" panose="020B0604020202020204" pitchFamily="34" charset="0"/>
+              </a:rPr>
+              <a:t>Tpl</a:t>
+            </a:r>
+            <a:r>
+              <a:rPr lang="de-DE" sz="1600" dirty="0">
+                <a:solidFill>
+                  <a:schemeClr val="tx1"/>
+                </a:solidFill>
+                <a:latin typeface="Arial" panose="020B0604020202020204" pitchFamily="34" charset="0"/>
+                <a:cs typeface="Arial" panose="020B0604020202020204" pitchFamily="34" charset="0"/>
+              </a:rPr>
+              <a:t> </a:t>
+            </a:r>
+            <a:r>
+              <a:rPr lang="de-DE" sz="1600" dirty="0" err="1">
+                <a:solidFill>
+                  <a:schemeClr val="tx1"/>
+                </a:solidFill>
+                <a:latin typeface="Arial" panose="020B0604020202020204" pitchFamily="34" charset="0"/>
+                <a:cs typeface="Arial" panose="020B0604020202020204" pitchFamily="34" charset="0"/>
+              </a:rPr>
+              <a:t>renderer</a:t>
+            </a:r>
+            <a:endParaRPr lang="de-DE" sz="1600" dirty="0">
+              <a:solidFill>
+                <a:schemeClr val="tx1"/>
+              </a:solidFill>
+              <a:latin typeface="Arial" panose="020B0604020202020204" pitchFamily="34" charset="0"/>
+              <a:cs typeface="Arial" panose="020B0604020202020204" pitchFamily="34" charset="0"/>
+            </a:endParaRPr>
+          </a:p>
+        </p:txBody>
+      </p:sp>
+      <p:sp>
+        <p:nvSpPr>
+          <p:cNvPr id="17" name="Rechteck: abgerundete Ecken 16">
+            <a:extLst>
+              <a:ext uri="{FF2B5EF4-FFF2-40B4-BE49-F238E27FC236}">
+                <a16:creationId xmlns:a16="http://schemas.microsoft.com/office/drawing/2014/main" id="{AFD62CFD-8C48-A78D-0598-A5C992322639}"/>
+              </a:ext>
+            </a:extLst>
+          </p:cNvPr>
+          <p:cNvSpPr/>
+          <p:nvPr/>
+        </p:nvSpPr>
+        <p:spPr>
+          <a:xfrm>
+            <a:off x="632520" y="3417288"/>
+            <a:ext cx="1296144" cy="576064"/>
+          </a:xfrm>
+          <a:prstGeom prst="roundRect">
+            <a:avLst/>
+          </a:prstGeom>
+          <a:ln/>
+        </p:spPr>
+        <p:style>
+          <a:lnRef idx="2">
+            <a:schemeClr val="accent2"/>
+          </a:lnRef>
+          <a:fillRef idx="1">
+            <a:schemeClr val="lt1"/>
+          </a:fillRef>
+          <a:effectRef idx="0">
+            <a:schemeClr val="accent2"/>
+          </a:effectRef>
+          <a:fontRef idx="minor">
+            <a:schemeClr val="dk1"/>
+          </a:fontRef>
+        </p:style>
+        <p:txBody>
+          <a:bodyPr lIns="0" tIns="0" rIns="0" bIns="0" rtlCol="0" anchor="ctr"/>
+          <a:lstStyle/>
+          <a:p>
+            <a:pPr algn="ctr"/>
+            <a:r>
+              <a:rPr lang="de-DE" sz="1600" dirty="0">
+                <a:solidFill>
+                  <a:schemeClr val="tx1"/>
+                </a:solidFill>
+                <a:latin typeface="Arial" panose="020B0604020202020204" pitchFamily="34" charset="0"/>
+                <a:cs typeface="Arial" panose="020B0604020202020204" pitchFamily="34" charset="0"/>
+              </a:rPr>
+              <a:t>JS</a:t>
+            </a:r>
+            <a:br>
+              <a:rPr lang="de-DE" sz="1600" dirty="0">
+                <a:solidFill>
+                  <a:schemeClr val="tx1"/>
+                </a:solidFill>
+                <a:latin typeface="Arial" panose="020B0604020202020204" pitchFamily="34" charset="0"/>
+                <a:cs typeface="Arial" panose="020B0604020202020204" pitchFamily="34" charset="0"/>
+              </a:rPr>
+            </a:br>
+            <a:r>
+              <a:rPr lang="de-DE" sz="1600" dirty="0" err="1">
+                <a:solidFill>
+                  <a:schemeClr val="tx1"/>
+                </a:solidFill>
+                <a:latin typeface="Arial" panose="020B0604020202020204" pitchFamily="34" charset="0"/>
+                <a:cs typeface="Arial" panose="020B0604020202020204" pitchFamily="34" charset="0"/>
+              </a:rPr>
+              <a:t>event</a:t>
+            </a:r>
+            <a:r>
+              <a:rPr lang="de-DE" sz="1600" dirty="0">
+                <a:solidFill>
+                  <a:schemeClr val="tx1"/>
+                </a:solidFill>
+                <a:latin typeface="Arial" panose="020B0604020202020204" pitchFamily="34" charset="0"/>
+                <a:cs typeface="Arial" panose="020B0604020202020204" pitchFamily="34" charset="0"/>
+              </a:rPr>
+              <a:t> - </a:t>
+            </a:r>
+            <a:r>
+              <a:rPr lang="de-DE" sz="1600" dirty="0" err="1">
+                <a:solidFill>
+                  <a:schemeClr val="tx1"/>
+                </a:solidFill>
+                <a:latin typeface="Arial" panose="020B0604020202020204" pitchFamily="34" charset="0"/>
+                <a:cs typeface="Arial" panose="020B0604020202020204" pitchFamily="34" charset="0"/>
+              </a:rPr>
+              <a:t>async</a:t>
+            </a:r>
+            <a:endParaRPr lang="de-DE" sz="1600" dirty="0">
+              <a:solidFill>
+                <a:schemeClr val="tx1"/>
+              </a:solidFill>
+              <a:latin typeface="Arial" panose="020B0604020202020204" pitchFamily="34" charset="0"/>
+              <a:cs typeface="Arial" panose="020B0604020202020204" pitchFamily="34" charset="0"/>
+            </a:endParaRPr>
+          </a:p>
+        </p:txBody>
+      </p:sp>
+      <p:sp>
+        <p:nvSpPr>
+          <p:cNvPr id="18" name="Rechteck: abgerundete Ecken 17">
+            <a:extLst>
+              <a:ext uri="{FF2B5EF4-FFF2-40B4-BE49-F238E27FC236}">
+                <a16:creationId xmlns:a16="http://schemas.microsoft.com/office/drawing/2014/main" id="{7D89C7E2-68BB-F85F-E4BB-3022CA21D7E5}"/>
+              </a:ext>
+            </a:extLst>
+          </p:cNvPr>
+          <p:cNvSpPr/>
+          <p:nvPr/>
+        </p:nvSpPr>
+        <p:spPr>
+          <a:xfrm>
+            <a:off x="2290270" y="4260994"/>
+            <a:ext cx="1296144" cy="576064"/>
+          </a:xfrm>
+          <a:prstGeom prst="roundRect">
+            <a:avLst/>
+          </a:prstGeom>
+          <a:ln/>
+        </p:spPr>
+        <p:style>
+          <a:lnRef idx="2">
+            <a:schemeClr val="accent2"/>
+          </a:lnRef>
+          <a:fillRef idx="1">
+            <a:schemeClr val="lt1"/>
+          </a:fillRef>
+          <a:effectRef idx="0">
+            <a:schemeClr val="accent2"/>
+          </a:effectRef>
+          <a:fontRef idx="minor">
+            <a:schemeClr val="dk1"/>
+          </a:fontRef>
+        </p:style>
+        <p:txBody>
+          <a:bodyPr lIns="0" tIns="0" rIns="0" bIns="0" rtlCol="0" anchor="ctr"/>
+          <a:lstStyle/>
+          <a:p>
+            <a:pPr algn="ctr"/>
+            <a:r>
+              <a:rPr lang="de-DE" sz="1400" dirty="0">
+                <a:solidFill>
+                  <a:schemeClr val="tx1"/>
+                </a:solidFill>
+                <a:latin typeface="Arial" panose="020B0604020202020204" pitchFamily="34" charset="0"/>
+                <a:cs typeface="Arial" panose="020B0604020202020204" pitchFamily="34" charset="0"/>
+              </a:rPr>
+              <a:t>JS, CSS, </a:t>
+            </a:r>
+            <a:r>
+              <a:rPr lang="de-DE" sz="1400" dirty="0" err="1">
+                <a:solidFill>
+                  <a:schemeClr val="tx1"/>
+                </a:solidFill>
+                <a:latin typeface="Arial" panose="020B0604020202020204" pitchFamily="34" charset="0"/>
+                <a:cs typeface="Arial" panose="020B0604020202020204" pitchFamily="34" charset="0"/>
+              </a:rPr>
+              <a:t>Imgs</a:t>
+            </a:r>
+            <a:r>
+              <a:rPr lang="de-DE" sz="1400" dirty="0">
+                <a:solidFill>
+                  <a:schemeClr val="tx1"/>
+                </a:solidFill>
+                <a:latin typeface="Arial" panose="020B0604020202020204" pitchFamily="34" charset="0"/>
+                <a:cs typeface="Arial" panose="020B0604020202020204" pitchFamily="34" charset="0"/>
+              </a:rPr>
+              <a:t> Caching</a:t>
+            </a:r>
+          </a:p>
+        </p:txBody>
+      </p:sp>
+      <p:sp>
+        <p:nvSpPr>
+          <p:cNvPr id="19" name="Rechteck: abgerundete Ecken 18">
+            <a:extLst>
+              <a:ext uri="{FF2B5EF4-FFF2-40B4-BE49-F238E27FC236}">
+                <a16:creationId xmlns:a16="http://schemas.microsoft.com/office/drawing/2014/main" id="{363247E3-217F-BA20-D324-221F9D0A4205}"/>
+              </a:ext>
+            </a:extLst>
+          </p:cNvPr>
+          <p:cNvSpPr/>
+          <p:nvPr/>
+        </p:nvSpPr>
+        <p:spPr>
+          <a:xfrm>
+            <a:off x="6766332" y="4304828"/>
+            <a:ext cx="1296144" cy="576064"/>
+          </a:xfrm>
+          <a:prstGeom prst="roundRect">
+            <a:avLst/>
+          </a:prstGeom>
+          <a:ln/>
+        </p:spPr>
+        <p:style>
+          <a:lnRef idx="2">
+            <a:schemeClr val="accent2"/>
+          </a:lnRef>
+          <a:fillRef idx="1">
+            <a:schemeClr val="lt1"/>
+          </a:fillRef>
+          <a:effectRef idx="0">
+            <a:schemeClr val="accent2"/>
+          </a:effectRef>
+          <a:fontRef idx="minor">
+            <a:schemeClr val="dk1"/>
+          </a:fontRef>
+        </p:style>
+        <p:txBody>
+          <a:bodyPr lIns="0" tIns="0" rIns="0" bIns="0" rtlCol="0" anchor="ctr"/>
+          <a:lstStyle/>
+          <a:p>
+            <a:pPr algn="ctr"/>
+            <a:r>
+              <a:rPr lang="de-DE" sz="1600" dirty="0">
+                <a:solidFill>
+                  <a:schemeClr val="tx1"/>
+                </a:solidFill>
+                <a:latin typeface="Arial" panose="020B0604020202020204" pitchFamily="34" charset="0"/>
+                <a:cs typeface="Arial" panose="020B0604020202020204" pitchFamily="34" charset="0"/>
+              </a:rPr>
+              <a:t>Crawl</a:t>
+            </a:r>
+            <a:br>
+              <a:rPr lang="de-DE" sz="1600" dirty="0">
+                <a:solidFill>
+                  <a:schemeClr val="tx1"/>
+                </a:solidFill>
+                <a:latin typeface="Arial" panose="020B0604020202020204" pitchFamily="34" charset="0"/>
+                <a:cs typeface="Arial" panose="020B0604020202020204" pitchFamily="34" charset="0"/>
+              </a:rPr>
+            </a:br>
+            <a:r>
+              <a:rPr lang="de-DE" sz="1600" dirty="0" err="1">
+                <a:solidFill>
+                  <a:schemeClr val="tx1"/>
+                </a:solidFill>
+                <a:latin typeface="Arial" panose="020B0604020202020204" pitchFamily="34" charset="0"/>
+                <a:cs typeface="Arial" panose="020B0604020202020204" pitchFamily="34" charset="0"/>
+              </a:rPr>
+              <a:t>Downl</a:t>
+            </a:r>
+            <a:r>
+              <a:rPr lang="de-DE" sz="1600" dirty="0">
+                <a:solidFill>
+                  <a:schemeClr val="tx1"/>
+                </a:solidFill>
+                <a:latin typeface="Arial" panose="020B0604020202020204" pitchFamily="34" charset="0"/>
+                <a:cs typeface="Arial" panose="020B0604020202020204" pitchFamily="34" charset="0"/>
+              </a:rPr>
+              <a:t> </a:t>
+            </a:r>
+            <a:r>
+              <a:rPr lang="de-DE" sz="1600" dirty="0" err="1">
+                <a:solidFill>
+                  <a:schemeClr val="tx1"/>
+                </a:solidFill>
+                <a:latin typeface="Arial" panose="020B0604020202020204" pitchFamily="34" charset="0"/>
+                <a:cs typeface="Arial" panose="020B0604020202020204" pitchFamily="34" charset="0"/>
+              </a:rPr>
+              <a:t>Prep</a:t>
+            </a:r>
+            <a:endParaRPr lang="de-DE" sz="1600" dirty="0">
+              <a:solidFill>
+                <a:schemeClr val="tx1"/>
+              </a:solidFill>
+              <a:latin typeface="Arial" panose="020B0604020202020204" pitchFamily="34" charset="0"/>
+              <a:cs typeface="Arial" panose="020B0604020202020204" pitchFamily="34" charset="0"/>
+            </a:endParaRPr>
+          </a:p>
+        </p:txBody>
+      </p:sp>
+      <p:sp>
+        <p:nvSpPr>
+          <p:cNvPr id="20" name="Rechteck: abgerundete Ecken 19">
+            <a:extLst>
+              <a:ext uri="{FF2B5EF4-FFF2-40B4-BE49-F238E27FC236}">
+                <a16:creationId xmlns:a16="http://schemas.microsoft.com/office/drawing/2014/main" id="{D1AD7A61-E3CB-6575-393E-040DFA9A1D17}"/>
+              </a:ext>
+            </a:extLst>
+          </p:cNvPr>
+          <p:cNvSpPr/>
+          <p:nvPr/>
+        </p:nvSpPr>
+        <p:spPr>
+          <a:xfrm>
+            <a:off x="8249142" y="4304828"/>
+            <a:ext cx="1296144" cy="576064"/>
+          </a:xfrm>
+          <a:prstGeom prst="roundRect">
+            <a:avLst/>
+          </a:prstGeom>
+          <a:ln/>
+        </p:spPr>
+        <p:style>
+          <a:lnRef idx="2">
+            <a:schemeClr val="accent2"/>
+          </a:lnRef>
+          <a:fillRef idx="1">
+            <a:schemeClr val="lt1"/>
+          </a:fillRef>
+          <a:effectRef idx="0">
+            <a:schemeClr val="accent2"/>
+          </a:effectRef>
+          <a:fontRef idx="minor">
+            <a:schemeClr val="dk1"/>
+          </a:fontRef>
+        </p:style>
+        <p:txBody>
+          <a:bodyPr lIns="0" tIns="0" rIns="0" bIns="0" rtlCol="0" anchor="ctr"/>
+          <a:lstStyle/>
+          <a:p>
+            <a:pPr algn="ctr"/>
+            <a:r>
+              <a:rPr lang="de-DE" sz="1600" dirty="0" err="1">
+                <a:solidFill>
+                  <a:schemeClr val="tx1"/>
+                </a:solidFill>
+                <a:latin typeface="Arial" panose="020B0604020202020204" pitchFamily="34" charset="0"/>
+                <a:cs typeface="Arial" panose="020B0604020202020204" pitchFamily="34" charset="0"/>
+              </a:rPr>
+              <a:t>git</a:t>
+            </a:r>
+            <a:r>
+              <a:rPr lang="de-DE" sz="1600" dirty="0">
+                <a:solidFill>
+                  <a:schemeClr val="tx1"/>
+                </a:solidFill>
+                <a:latin typeface="Arial" panose="020B0604020202020204" pitchFamily="34" charset="0"/>
+                <a:cs typeface="Arial" panose="020B0604020202020204" pitchFamily="34" charset="0"/>
+              </a:rPr>
+              <a:t> </a:t>
+            </a:r>
+            <a:br>
+              <a:rPr lang="de-DE" sz="1600" dirty="0">
+                <a:solidFill>
+                  <a:schemeClr val="tx1"/>
+                </a:solidFill>
+                <a:latin typeface="Arial" panose="020B0604020202020204" pitchFamily="34" charset="0"/>
+                <a:cs typeface="Arial" panose="020B0604020202020204" pitchFamily="34" charset="0"/>
+              </a:rPr>
+            </a:br>
+            <a:r>
+              <a:rPr lang="de-DE" sz="1600" dirty="0">
+                <a:solidFill>
+                  <a:schemeClr val="tx1"/>
+                </a:solidFill>
+                <a:latin typeface="Arial" panose="020B0604020202020204" pitchFamily="34" charset="0"/>
+                <a:cs typeface="Arial" panose="020B0604020202020204" pitchFamily="34" charset="0"/>
+              </a:rPr>
+              <a:t>deploy</a:t>
+            </a:r>
+          </a:p>
+        </p:txBody>
+      </p:sp>
+      <p:sp>
+        <p:nvSpPr>
+          <p:cNvPr id="21" name="Rechteck: abgerundete Ecken 20">
+            <a:extLst>
+              <a:ext uri="{FF2B5EF4-FFF2-40B4-BE49-F238E27FC236}">
+                <a16:creationId xmlns:a16="http://schemas.microsoft.com/office/drawing/2014/main" id="{D0248910-17FB-4E48-C223-AEBDFC40FA2B}"/>
+              </a:ext>
+            </a:extLst>
+          </p:cNvPr>
+          <p:cNvSpPr/>
+          <p:nvPr/>
+        </p:nvSpPr>
+        <p:spPr>
+          <a:xfrm>
+            <a:off x="4880992" y="5046038"/>
+            <a:ext cx="1296144" cy="576064"/>
+          </a:xfrm>
+          <a:prstGeom prst="roundRect">
+            <a:avLst/>
+          </a:prstGeom>
+          <a:ln/>
+        </p:spPr>
+        <p:style>
+          <a:lnRef idx="2">
+            <a:schemeClr val="accent2"/>
+          </a:lnRef>
+          <a:fillRef idx="1">
+            <a:schemeClr val="lt1"/>
+          </a:fillRef>
+          <a:effectRef idx="0">
+            <a:schemeClr val="accent2"/>
+          </a:effectRef>
+          <a:fontRef idx="minor">
+            <a:schemeClr val="dk1"/>
+          </a:fontRef>
+        </p:style>
+        <p:txBody>
+          <a:bodyPr lIns="0" tIns="0" rIns="0" bIns="0" rtlCol="0" anchor="ctr"/>
+          <a:lstStyle/>
+          <a:p>
+            <a:pPr algn="ctr"/>
+            <a:r>
+              <a:rPr lang="de-DE" sz="1600" dirty="0">
+                <a:solidFill>
+                  <a:schemeClr val="tx1"/>
+                </a:solidFill>
+                <a:latin typeface="Arial" panose="020B0604020202020204" pitchFamily="34" charset="0"/>
+                <a:cs typeface="Arial" panose="020B0604020202020204" pitchFamily="34" charset="0"/>
+              </a:rPr>
+              <a:t>Python</a:t>
+            </a:r>
+            <a:br>
+              <a:rPr lang="de-DE" sz="1600" dirty="0">
+                <a:solidFill>
+                  <a:schemeClr val="tx1"/>
+                </a:solidFill>
+                <a:latin typeface="Arial" panose="020B0604020202020204" pitchFamily="34" charset="0"/>
+                <a:cs typeface="Arial" panose="020B0604020202020204" pitchFamily="34" charset="0"/>
+              </a:rPr>
+            </a:br>
+            <a:r>
+              <a:rPr lang="de-DE" sz="1600" dirty="0" err="1">
+                <a:solidFill>
+                  <a:schemeClr val="tx1"/>
+                </a:solidFill>
+                <a:latin typeface="Arial" panose="020B0604020202020204" pitchFamily="34" charset="0"/>
+                <a:cs typeface="Arial" panose="020B0604020202020204" pitchFamily="34" charset="0"/>
+              </a:rPr>
+              <a:t>mod</a:t>
+            </a:r>
+            <a:r>
+              <a:rPr lang="de-DE" sz="1600" dirty="0">
+                <a:solidFill>
+                  <a:schemeClr val="tx1"/>
+                </a:solidFill>
+                <a:latin typeface="Arial" panose="020B0604020202020204" pitchFamily="34" charset="0"/>
+                <a:cs typeface="Arial" panose="020B0604020202020204" pitchFamily="34" charset="0"/>
+              </a:rPr>
+              <a:t> </a:t>
+            </a:r>
+            <a:r>
+              <a:rPr lang="de-DE" sz="1600" dirty="0" err="1">
+                <a:solidFill>
+                  <a:schemeClr val="tx1"/>
+                </a:solidFill>
+                <a:latin typeface="Arial" panose="020B0604020202020204" pitchFamily="34" charset="0"/>
+                <a:cs typeface="Arial" panose="020B0604020202020204" pitchFamily="34" charset="0"/>
+              </a:rPr>
+              <a:t>safety</a:t>
+            </a:r>
+            <a:endParaRPr lang="de-DE" sz="1600" dirty="0">
+              <a:solidFill>
+                <a:schemeClr val="tx1"/>
+              </a:solidFill>
+              <a:latin typeface="Arial" panose="020B0604020202020204" pitchFamily="34" charset="0"/>
+              <a:cs typeface="Arial" panose="020B0604020202020204" pitchFamily="34" charset="0"/>
+            </a:endParaRPr>
+          </a:p>
+        </p:txBody>
+      </p:sp>
+      <p:sp>
+        <p:nvSpPr>
+          <p:cNvPr id="22" name="Rechteck: abgerundete Ecken 21">
+            <a:extLst>
+              <a:ext uri="{FF2B5EF4-FFF2-40B4-BE49-F238E27FC236}">
+                <a16:creationId xmlns:a16="http://schemas.microsoft.com/office/drawing/2014/main" id="{25D9D929-83E7-8C59-9CD6-08D7644687D3}"/>
+              </a:ext>
+            </a:extLst>
+          </p:cNvPr>
+          <p:cNvSpPr/>
+          <p:nvPr/>
+        </p:nvSpPr>
+        <p:spPr>
+          <a:xfrm>
+            <a:off x="7833570" y="5038790"/>
+            <a:ext cx="1296144" cy="576064"/>
+          </a:xfrm>
+          <a:prstGeom prst="roundRect">
+            <a:avLst/>
+          </a:prstGeom>
+          <a:ln/>
+        </p:spPr>
+        <p:style>
+          <a:lnRef idx="2">
+            <a:schemeClr val="accent2"/>
+          </a:lnRef>
+          <a:fillRef idx="1">
+            <a:schemeClr val="lt1"/>
+          </a:fillRef>
+          <a:effectRef idx="0">
+            <a:schemeClr val="accent2"/>
+          </a:effectRef>
+          <a:fontRef idx="minor">
+            <a:schemeClr val="dk1"/>
+          </a:fontRef>
+        </p:style>
+        <p:txBody>
+          <a:bodyPr lIns="0" tIns="0" rIns="0" bIns="0" rtlCol="0" anchor="ctr"/>
+          <a:lstStyle/>
+          <a:p>
+            <a:pPr algn="ctr"/>
+            <a:r>
+              <a:rPr lang="de-DE" sz="1600" dirty="0">
+                <a:solidFill>
+                  <a:schemeClr val="tx1"/>
+                </a:solidFill>
+                <a:latin typeface="Arial" panose="020B0604020202020204" pitchFamily="34" charset="0"/>
+                <a:cs typeface="Arial" panose="020B0604020202020204" pitchFamily="34" charset="0"/>
+              </a:rPr>
+              <a:t>Monitoring</a:t>
+            </a:r>
+            <a:br>
+              <a:rPr lang="de-DE" sz="1600" dirty="0">
+                <a:solidFill>
+                  <a:schemeClr val="tx1"/>
+                </a:solidFill>
+                <a:latin typeface="Arial" panose="020B0604020202020204" pitchFamily="34" charset="0"/>
+                <a:cs typeface="Arial" panose="020B0604020202020204" pitchFamily="34" charset="0"/>
+              </a:rPr>
+            </a:br>
+            <a:r>
+              <a:rPr lang="de-DE" sz="1600" dirty="0" err="1">
+                <a:solidFill>
+                  <a:schemeClr val="tx1"/>
+                </a:solidFill>
+                <a:latin typeface="Arial" panose="020B0604020202020204" pitchFamily="34" charset="0"/>
+                <a:cs typeface="Arial" panose="020B0604020202020204" pitchFamily="34" charset="0"/>
+              </a:rPr>
+              <a:t>server</a:t>
+            </a:r>
+            <a:endParaRPr lang="de-DE" sz="1600" dirty="0">
+              <a:solidFill>
+                <a:schemeClr val="tx1"/>
+              </a:solidFill>
+              <a:latin typeface="Arial" panose="020B0604020202020204" pitchFamily="34" charset="0"/>
+              <a:cs typeface="Arial" panose="020B0604020202020204" pitchFamily="34" charset="0"/>
+            </a:endParaRPr>
+          </a:p>
+        </p:txBody>
+      </p:sp>
+      <p:sp>
+        <p:nvSpPr>
+          <p:cNvPr id="23" name="Rechteck: abgerundete Ecken 22">
+            <a:extLst>
+              <a:ext uri="{FF2B5EF4-FFF2-40B4-BE49-F238E27FC236}">
+                <a16:creationId xmlns:a16="http://schemas.microsoft.com/office/drawing/2014/main" id="{4F0A26C6-9887-D932-3DB5-71917C84DB80}"/>
+              </a:ext>
+            </a:extLst>
+          </p:cNvPr>
+          <p:cNvSpPr/>
+          <p:nvPr/>
+        </p:nvSpPr>
+        <p:spPr>
+          <a:xfrm>
+            <a:off x="5386608" y="5873368"/>
+            <a:ext cx="1296144" cy="576064"/>
+          </a:xfrm>
+          <a:prstGeom prst="roundRect">
+            <a:avLst/>
+          </a:prstGeom>
+          <a:ln/>
+        </p:spPr>
+        <p:style>
+          <a:lnRef idx="2">
+            <a:schemeClr val="accent2"/>
+          </a:lnRef>
+          <a:fillRef idx="1">
+            <a:schemeClr val="lt1"/>
+          </a:fillRef>
+          <a:effectRef idx="0">
+            <a:schemeClr val="accent2"/>
+          </a:effectRef>
+          <a:fontRef idx="minor">
+            <a:schemeClr val="dk1"/>
+          </a:fontRef>
+        </p:style>
+        <p:txBody>
+          <a:bodyPr lIns="0" tIns="0" rIns="0" bIns="0" rtlCol="0" anchor="ctr"/>
+          <a:lstStyle/>
+          <a:p>
+            <a:pPr algn="ctr"/>
+            <a:r>
+              <a:rPr lang="de-DE" sz="1600" dirty="0">
+                <a:solidFill>
+                  <a:schemeClr val="tx1"/>
+                </a:solidFill>
+                <a:latin typeface="Arial" panose="020B0604020202020204" pitchFamily="34" charset="0"/>
+                <a:cs typeface="Arial" panose="020B0604020202020204" pitchFamily="34" charset="0"/>
+              </a:rPr>
+              <a:t>ACL</a:t>
+            </a:r>
+            <a:br>
+              <a:rPr lang="de-DE" sz="1600" dirty="0">
+                <a:solidFill>
+                  <a:schemeClr val="tx1"/>
+                </a:solidFill>
+                <a:latin typeface="Arial" panose="020B0604020202020204" pitchFamily="34" charset="0"/>
+                <a:cs typeface="Arial" panose="020B0604020202020204" pitchFamily="34" charset="0"/>
+              </a:rPr>
+            </a:br>
+            <a:r>
+              <a:rPr lang="de-DE" sz="1600" dirty="0" err="1">
+                <a:solidFill>
+                  <a:schemeClr val="tx1"/>
+                </a:solidFill>
+                <a:latin typeface="Arial" panose="020B0604020202020204" pitchFamily="34" charset="0"/>
+                <a:cs typeface="Arial" panose="020B0604020202020204" pitchFamily="34" charset="0"/>
+              </a:rPr>
+              <a:t>www</a:t>
+            </a:r>
+            <a:r>
+              <a:rPr lang="de-DE" sz="1600" dirty="0">
+                <a:solidFill>
+                  <a:schemeClr val="tx1"/>
+                </a:solidFill>
+                <a:latin typeface="Arial" panose="020B0604020202020204" pitchFamily="34" charset="0"/>
+                <a:cs typeface="Arial" panose="020B0604020202020204" pitchFamily="34" charset="0"/>
+              </a:rPr>
+              <a:t> / </a:t>
+            </a:r>
+            <a:r>
+              <a:rPr lang="de-DE" sz="1600" dirty="0" err="1">
+                <a:solidFill>
+                  <a:schemeClr val="tx1"/>
+                </a:solidFill>
+                <a:latin typeface="Arial" panose="020B0604020202020204" pitchFamily="34" charset="0"/>
+                <a:cs typeface="Arial" panose="020B0604020202020204" pitchFamily="34" charset="0"/>
+              </a:rPr>
+              <a:t>user</a:t>
+            </a:r>
+            <a:endParaRPr lang="de-DE" sz="1600" dirty="0">
+              <a:solidFill>
+                <a:schemeClr val="tx1"/>
+              </a:solidFill>
+              <a:latin typeface="Arial" panose="020B0604020202020204" pitchFamily="34" charset="0"/>
+              <a:cs typeface="Arial" panose="020B0604020202020204" pitchFamily="34" charset="0"/>
+            </a:endParaRPr>
+          </a:p>
+        </p:txBody>
+      </p:sp>
+      <p:sp>
+        <p:nvSpPr>
+          <p:cNvPr id="24" name="Rechteck: abgerundete Ecken 23">
+            <a:extLst>
+              <a:ext uri="{FF2B5EF4-FFF2-40B4-BE49-F238E27FC236}">
+                <a16:creationId xmlns:a16="http://schemas.microsoft.com/office/drawing/2014/main" id="{B3B653BE-9305-D119-9192-67BA34110736}"/>
+              </a:ext>
+            </a:extLst>
+          </p:cNvPr>
+          <p:cNvSpPr/>
+          <p:nvPr/>
+        </p:nvSpPr>
+        <p:spPr>
+          <a:xfrm>
+            <a:off x="3857710" y="5873368"/>
+            <a:ext cx="1296144" cy="576064"/>
+          </a:xfrm>
+          <a:prstGeom prst="roundRect">
+            <a:avLst/>
+          </a:prstGeom>
+          <a:ln/>
+        </p:spPr>
+        <p:style>
+          <a:lnRef idx="2">
+            <a:schemeClr val="accent2"/>
+          </a:lnRef>
+          <a:fillRef idx="1">
+            <a:schemeClr val="lt1"/>
+          </a:fillRef>
+          <a:effectRef idx="0">
+            <a:schemeClr val="accent2"/>
+          </a:effectRef>
+          <a:fontRef idx="minor">
+            <a:schemeClr val="dk1"/>
+          </a:fontRef>
+        </p:style>
+        <p:txBody>
+          <a:bodyPr lIns="0" tIns="0" rIns="0" bIns="0" rtlCol="0" anchor="ctr"/>
+          <a:lstStyle/>
+          <a:p>
+            <a:pPr algn="ctr"/>
+            <a:r>
+              <a:rPr lang="de-DE" sz="1600" dirty="0">
+                <a:solidFill>
+                  <a:schemeClr val="tx1"/>
+                </a:solidFill>
+                <a:latin typeface="Arial" panose="020B0604020202020204" pitchFamily="34" charset="0"/>
+                <a:cs typeface="Arial" panose="020B0604020202020204" pitchFamily="34" charset="0"/>
+              </a:rPr>
+              <a:t>OS</a:t>
+            </a:r>
+            <a:br>
+              <a:rPr lang="de-DE" sz="1600" dirty="0">
+                <a:solidFill>
+                  <a:schemeClr val="tx1"/>
+                </a:solidFill>
+                <a:latin typeface="Arial" panose="020B0604020202020204" pitchFamily="34" charset="0"/>
+                <a:cs typeface="Arial" panose="020B0604020202020204" pitchFamily="34" charset="0"/>
+              </a:rPr>
+            </a:br>
+            <a:r>
+              <a:rPr lang="de-DE" sz="1600" dirty="0">
+                <a:solidFill>
+                  <a:schemeClr val="tx1"/>
+                </a:solidFill>
+                <a:latin typeface="Arial" panose="020B0604020202020204" pitchFamily="34" charset="0"/>
+                <a:cs typeface="Arial" panose="020B0604020202020204" pitchFamily="34" charset="0"/>
+              </a:rPr>
+              <a:t>sec </a:t>
+            </a:r>
+            <a:r>
+              <a:rPr lang="de-DE" sz="1600" dirty="0" err="1">
+                <a:solidFill>
+                  <a:schemeClr val="tx1"/>
+                </a:solidFill>
+                <a:latin typeface="Arial" panose="020B0604020202020204" pitchFamily="34" charset="0"/>
+                <a:cs typeface="Arial" panose="020B0604020202020204" pitchFamily="34" charset="0"/>
+              </a:rPr>
+              <a:t>patches</a:t>
+            </a:r>
+            <a:endParaRPr lang="de-DE" sz="1600" dirty="0">
+              <a:solidFill>
+                <a:schemeClr val="tx1"/>
+              </a:solidFill>
+              <a:latin typeface="Arial" panose="020B0604020202020204" pitchFamily="34" charset="0"/>
+              <a:cs typeface="Arial" panose="020B0604020202020204" pitchFamily="34" charset="0"/>
+            </a:endParaRPr>
+          </a:p>
+        </p:txBody>
+      </p:sp>
+      <p:sp>
+        <p:nvSpPr>
+          <p:cNvPr id="25" name="Rechteck: abgerundete Ecken 24">
+            <a:extLst>
+              <a:ext uri="{FF2B5EF4-FFF2-40B4-BE49-F238E27FC236}">
+                <a16:creationId xmlns:a16="http://schemas.microsoft.com/office/drawing/2014/main" id="{3194E091-7CDE-BB9C-6816-A3D94CADF0C2}"/>
+              </a:ext>
+            </a:extLst>
+          </p:cNvPr>
+          <p:cNvSpPr/>
+          <p:nvPr/>
+        </p:nvSpPr>
+        <p:spPr>
+          <a:xfrm>
+            <a:off x="3771187" y="4279136"/>
+            <a:ext cx="1296144" cy="576064"/>
+          </a:xfrm>
+          <a:prstGeom prst="roundRect">
+            <a:avLst/>
+          </a:prstGeom>
+          <a:ln/>
+        </p:spPr>
+        <p:style>
+          <a:lnRef idx="2">
+            <a:schemeClr val="accent2"/>
+          </a:lnRef>
+          <a:fillRef idx="1">
+            <a:schemeClr val="lt1"/>
+          </a:fillRef>
+          <a:effectRef idx="0">
+            <a:schemeClr val="accent2"/>
+          </a:effectRef>
+          <a:fontRef idx="minor">
+            <a:schemeClr val="dk1"/>
+          </a:fontRef>
+        </p:style>
+        <p:txBody>
+          <a:bodyPr lIns="0" tIns="0" rIns="0" bIns="0" rtlCol="0" anchor="ctr"/>
+          <a:lstStyle/>
+          <a:p>
+            <a:pPr algn="ctr"/>
+            <a:r>
+              <a:rPr lang="de-DE" sz="1600" dirty="0" err="1">
+                <a:solidFill>
+                  <a:schemeClr val="tx1"/>
+                </a:solidFill>
+                <a:latin typeface="Arial" panose="020B0604020202020204" pitchFamily="34" charset="0"/>
+                <a:cs typeface="Arial" panose="020B0604020202020204" pitchFamily="34" charset="0"/>
+              </a:rPr>
+              <a:t>Markdown</a:t>
+            </a:r>
+            <a:br>
+              <a:rPr lang="de-DE" sz="1600" dirty="0">
+                <a:solidFill>
+                  <a:schemeClr val="tx1"/>
+                </a:solidFill>
+                <a:latin typeface="Arial" panose="020B0604020202020204" pitchFamily="34" charset="0"/>
+                <a:cs typeface="Arial" panose="020B0604020202020204" pitchFamily="34" charset="0"/>
+              </a:rPr>
+            </a:br>
+            <a:r>
+              <a:rPr lang="de-DE" sz="1600" dirty="0">
+                <a:solidFill>
+                  <a:schemeClr val="tx1"/>
+                </a:solidFill>
+                <a:latin typeface="Arial" panose="020B0604020202020204" pitchFamily="34" charset="0"/>
+                <a:cs typeface="Arial" panose="020B0604020202020204" pitchFamily="34" charset="0"/>
+              </a:rPr>
+              <a:t>Blog eng</a:t>
+            </a:r>
+          </a:p>
+        </p:txBody>
+      </p:sp>
+      <p:sp>
+        <p:nvSpPr>
+          <p:cNvPr id="26" name="Rechteck: abgerundete Ecken 25">
+            <a:extLst>
+              <a:ext uri="{FF2B5EF4-FFF2-40B4-BE49-F238E27FC236}">
+                <a16:creationId xmlns:a16="http://schemas.microsoft.com/office/drawing/2014/main" id="{100FBD3E-452A-3E39-D8E4-0FEE62C76028}"/>
+              </a:ext>
+            </a:extLst>
+          </p:cNvPr>
+          <p:cNvSpPr/>
+          <p:nvPr/>
+        </p:nvSpPr>
+        <p:spPr>
+          <a:xfrm>
+            <a:off x="833374" y="5877272"/>
+            <a:ext cx="1296144" cy="576064"/>
+          </a:xfrm>
+          <a:prstGeom prst="roundRect">
+            <a:avLst/>
+          </a:prstGeom>
+          <a:ln/>
+        </p:spPr>
+        <p:style>
+          <a:lnRef idx="2">
+            <a:schemeClr val="accent2"/>
+          </a:lnRef>
+          <a:fillRef idx="1">
+            <a:schemeClr val="lt1"/>
+          </a:fillRef>
+          <a:effectRef idx="0">
+            <a:schemeClr val="accent2"/>
+          </a:effectRef>
+          <a:fontRef idx="minor">
+            <a:schemeClr val="dk1"/>
+          </a:fontRef>
+        </p:style>
+        <p:txBody>
+          <a:bodyPr lIns="0" tIns="0" rIns="0" bIns="0" rtlCol="0" anchor="ctr"/>
+          <a:lstStyle/>
+          <a:p>
+            <a:pPr algn="ctr"/>
+            <a:r>
+              <a:rPr lang="de-DE" sz="1600" dirty="0">
+                <a:solidFill>
+                  <a:schemeClr val="tx1"/>
+                </a:solidFill>
+                <a:latin typeface="Arial" panose="020B0604020202020204" pitchFamily="34" charset="0"/>
+                <a:cs typeface="Arial" panose="020B0604020202020204" pitchFamily="34" charset="0"/>
+              </a:rPr>
+              <a:t>VM </a:t>
+            </a:r>
+            <a:r>
+              <a:rPr lang="de-DE" sz="1600" dirty="0" err="1">
+                <a:solidFill>
+                  <a:schemeClr val="tx1"/>
+                </a:solidFill>
+                <a:latin typeface="Arial" panose="020B0604020202020204" pitchFamily="34" charset="0"/>
+                <a:cs typeface="Arial" panose="020B0604020202020204" pitchFamily="34" charset="0"/>
+              </a:rPr>
+              <a:t>requ</a:t>
+            </a:r>
+            <a:br>
+              <a:rPr lang="de-DE" sz="1600" dirty="0">
+                <a:solidFill>
+                  <a:schemeClr val="tx1"/>
+                </a:solidFill>
+                <a:latin typeface="Arial" panose="020B0604020202020204" pitchFamily="34" charset="0"/>
+                <a:cs typeface="Arial" panose="020B0604020202020204" pitchFamily="34" charset="0"/>
+              </a:rPr>
+            </a:br>
+            <a:r>
+              <a:rPr lang="de-DE" sz="1600" dirty="0">
+                <a:solidFill>
+                  <a:schemeClr val="tx1"/>
+                </a:solidFill>
+                <a:latin typeface="Arial" panose="020B0604020202020204" pitchFamily="34" charset="0"/>
+                <a:cs typeface="Arial" panose="020B0604020202020204" pitchFamily="34" charset="0"/>
+              </a:rPr>
+              <a:t>VM </a:t>
+            </a:r>
+            <a:r>
+              <a:rPr lang="de-DE" sz="1600" dirty="0" err="1">
+                <a:solidFill>
+                  <a:schemeClr val="tx1"/>
+                </a:solidFill>
+                <a:latin typeface="Arial" panose="020B0604020202020204" pitchFamily="34" charset="0"/>
+                <a:cs typeface="Arial" panose="020B0604020202020204" pitchFamily="34" charset="0"/>
+              </a:rPr>
+              <a:t>backup</a:t>
+            </a:r>
+            <a:endParaRPr lang="de-DE" sz="1600" dirty="0">
+              <a:solidFill>
+                <a:schemeClr val="tx1"/>
+              </a:solidFill>
+              <a:latin typeface="Arial" panose="020B0604020202020204" pitchFamily="34" charset="0"/>
+              <a:cs typeface="Arial" panose="020B0604020202020204" pitchFamily="34" charset="0"/>
+            </a:endParaRPr>
+          </a:p>
+        </p:txBody>
+      </p:sp>
+      <p:sp>
+        <p:nvSpPr>
+          <p:cNvPr id="27" name="Rechteck: abgerundete Ecken 26">
+            <a:extLst>
+              <a:ext uri="{FF2B5EF4-FFF2-40B4-BE49-F238E27FC236}">
+                <a16:creationId xmlns:a16="http://schemas.microsoft.com/office/drawing/2014/main" id="{1B5C7ACD-2DC2-C78A-8E39-F62BD1EE7E15}"/>
+              </a:ext>
+            </a:extLst>
+          </p:cNvPr>
+          <p:cNvSpPr/>
+          <p:nvPr/>
+        </p:nvSpPr>
+        <p:spPr>
+          <a:xfrm>
+            <a:off x="5269706" y="4283298"/>
+            <a:ext cx="1296144" cy="576064"/>
+          </a:xfrm>
+          <a:prstGeom prst="roundRect">
+            <a:avLst/>
+          </a:prstGeom>
+          <a:ln/>
+        </p:spPr>
+        <p:style>
+          <a:lnRef idx="2">
+            <a:schemeClr val="accent2"/>
+          </a:lnRef>
+          <a:fillRef idx="1">
+            <a:schemeClr val="lt1"/>
+          </a:fillRef>
+          <a:effectRef idx="0">
+            <a:schemeClr val="accent2"/>
+          </a:effectRef>
+          <a:fontRef idx="minor">
+            <a:schemeClr val="dk1"/>
+          </a:fontRef>
+        </p:style>
+        <p:txBody>
+          <a:bodyPr lIns="0" tIns="0" rIns="0" bIns="0" rtlCol="0" anchor="ctr"/>
+          <a:lstStyle/>
+          <a:p>
+            <a:pPr algn="ctr"/>
+            <a:r>
+              <a:rPr lang="de-DE" sz="1600" dirty="0" err="1">
+                <a:solidFill>
+                  <a:schemeClr val="tx1"/>
+                </a:solidFill>
+                <a:latin typeface="Arial" panose="020B0604020202020204" pitchFamily="34" charset="0"/>
+                <a:cs typeface="Arial" panose="020B0604020202020204" pitchFamily="34" charset="0"/>
+              </a:rPr>
+              <a:t>cron</a:t>
+            </a:r>
+            <a:br>
+              <a:rPr lang="de-DE" sz="1600" dirty="0">
+                <a:solidFill>
+                  <a:schemeClr val="tx1"/>
+                </a:solidFill>
+                <a:latin typeface="Arial" panose="020B0604020202020204" pitchFamily="34" charset="0"/>
+                <a:cs typeface="Arial" panose="020B0604020202020204" pitchFamily="34" charset="0"/>
+              </a:rPr>
+            </a:br>
+            <a:r>
+              <a:rPr lang="de-DE" sz="1600" dirty="0" err="1">
+                <a:solidFill>
+                  <a:schemeClr val="tx1"/>
+                </a:solidFill>
+                <a:latin typeface="Arial" panose="020B0604020202020204" pitchFamily="34" charset="0"/>
+                <a:cs typeface="Arial" panose="020B0604020202020204" pitchFamily="34" charset="0"/>
+              </a:rPr>
+              <a:t>extension</a:t>
+            </a:r>
+            <a:endParaRPr lang="de-DE" sz="1600" dirty="0">
+              <a:solidFill>
+                <a:schemeClr val="tx1"/>
+              </a:solidFill>
+              <a:latin typeface="Arial" panose="020B0604020202020204" pitchFamily="34" charset="0"/>
+              <a:cs typeface="Arial" panose="020B0604020202020204" pitchFamily="34" charset="0"/>
+            </a:endParaRPr>
+          </a:p>
+        </p:txBody>
+      </p:sp>
+      <p:sp>
+        <p:nvSpPr>
+          <p:cNvPr id="28" name="Rechteck: abgerundete Ecken 27">
+            <a:extLst>
+              <a:ext uri="{FF2B5EF4-FFF2-40B4-BE49-F238E27FC236}">
+                <a16:creationId xmlns:a16="http://schemas.microsoft.com/office/drawing/2014/main" id="{B840F395-ABAB-7A30-A0CA-798CFB77124E}"/>
+              </a:ext>
+            </a:extLst>
+          </p:cNvPr>
+          <p:cNvSpPr/>
+          <p:nvPr/>
+        </p:nvSpPr>
+        <p:spPr>
+          <a:xfrm>
+            <a:off x="2099030" y="3403676"/>
+            <a:ext cx="1296144" cy="576064"/>
+          </a:xfrm>
+          <a:prstGeom prst="roundRect">
+            <a:avLst/>
+          </a:prstGeom>
+          <a:ln/>
+        </p:spPr>
+        <p:style>
+          <a:lnRef idx="2">
+            <a:schemeClr val="accent2"/>
+          </a:lnRef>
+          <a:fillRef idx="1">
+            <a:schemeClr val="lt1"/>
+          </a:fillRef>
+          <a:effectRef idx="0">
+            <a:schemeClr val="accent2"/>
+          </a:effectRef>
+          <a:fontRef idx="minor">
+            <a:schemeClr val="dk1"/>
+          </a:fontRef>
+        </p:style>
+        <p:txBody>
+          <a:bodyPr lIns="0" tIns="0" rIns="0" bIns="0" rtlCol="0" anchor="ctr"/>
+          <a:lstStyle/>
+          <a:p>
+            <a:pPr algn="ctr"/>
+            <a:r>
+              <a:rPr lang="de-DE" sz="1600" dirty="0">
+                <a:solidFill>
+                  <a:schemeClr val="tx1"/>
+                </a:solidFill>
+                <a:latin typeface="Arial" panose="020B0604020202020204" pitchFamily="34" charset="0"/>
+                <a:cs typeface="Arial" panose="020B0604020202020204" pitchFamily="34" charset="0"/>
+              </a:rPr>
+              <a:t>JS</a:t>
+            </a:r>
+            <a:br>
+              <a:rPr lang="de-DE" sz="1600" dirty="0">
+                <a:solidFill>
+                  <a:schemeClr val="tx1"/>
+                </a:solidFill>
+                <a:latin typeface="Arial" panose="020B0604020202020204" pitchFamily="34" charset="0"/>
+                <a:cs typeface="Arial" panose="020B0604020202020204" pitchFamily="34" charset="0"/>
+              </a:rPr>
+            </a:br>
+            <a:r>
+              <a:rPr lang="de-DE" sz="1600" dirty="0" err="1">
+                <a:solidFill>
+                  <a:schemeClr val="tx1"/>
+                </a:solidFill>
+                <a:latin typeface="Arial" panose="020B0604020202020204" pitchFamily="34" charset="0"/>
+                <a:cs typeface="Arial" panose="020B0604020202020204" pitchFamily="34" charset="0"/>
+              </a:rPr>
+              <a:t>init</a:t>
+            </a:r>
+            <a:r>
+              <a:rPr lang="de-DE" sz="1600" dirty="0">
+                <a:solidFill>
+                  <a:schemeClr val="tx1"/>
+                </a:solidFill>
+                <a:latin typeface="Arial" panose="020B0604020202020204" pitchFamily="34" charset="0"/>
+                <a:cs typeface="Arial" panose="020B0604020202020204" pitchFamily="34" charset="0"/>
+              </a:rPr>
+              <a:t> - update</a:t>
+            </a:r>
+          </a:p>
+        </p:txBody>
+      </p:sp>
+      <p:sp>
+        <p:nvSpPr>
+          <p:cNvPr id="29" name="Rechteck: abgerundete Ecken 28">
+            <a:extLst>
+              <a:ext uri="{FF2B5EF4-FFF2-40B4-BE49-F238E27FC236}">
+                <a16:creationId xmlns:a16="http://schemas.microsoft.com/office/drawing/2014/main" id="{570D6A95-7969-F45F-8E86-FC999C09F2D9}"/>
+              </a:ext>
+            </a:extLst>
+          </p:cNvPr>
+          <p:cNvSpPr/>
+          <p:nvPr/>
+        </p:nvSpPr>
+        <p:spPr>
+          <a:xfrm>
+            <a:off x="5673456" y="1644026"/>
+            <a:ext cx="1296144" cy="576064"/>
+          </a:xfrm>
+          <a:prstGeom prst="roundRect">
+            <a:avLst/>
+          </a:prstGeom>
+          <a:ln/>
+        </p:spPr>
+        <p:style>
+          <a:lnRef idx="2">
+            <a:schemeClr val="accent2"/>
+          </a:lnRef>
+          <a:fillRef idx="1">
+            <a:schemeClr val="lt1"/>
+          </a:fillRef>
+          <a:effectRef idx="0">
+            <a:schemeClr val="accent2"/>
+          </a:effectRef>
+          <a:fontRef idx="minor">
+            <a:schemeClr val="dk1"/>
+          </a:fontRef>
+        </p:style>
+        <p:txBody>
+          <a:bodyPr lIns="0" tIns="0" rIns="0" bIns="0" rtlCol="0" anchor="ctr"/>
+          <a:lstStyle/>
+          <a:p>
+            <a:pPr algn="ctr"/>
+            <a:r>
+              <a:rPr lang="de-DE" sz="1600" dirty="0">
+                <a:solidFill>
+                  <a:schemeClr val="tx1"/>
+                </a:solidFill>
+                <a:latin typeface="Arial" panose="020B0604020202020204" pitchFamily="34" charset="0"/>
+                <a:cs typeface="Arial" panose="020B0604020202020204" pitchFamily="34" charset="0"/>
+              </a:rPr>
+              <a:t>Visible</a:t>
+            </a:r>
+            <a:br>
+              <a:rPr lang="de-DE" sz="1600" dirty="0">
+                <a:solidFill>
+                  <a:schemeClr val="tx1"/>
+                </a:solidFill>
+                <a:latin typeface="Arial" panose="020B0604020202020204" pitchFamily="34" charset="0"/>
+                <a:cs typeface="Arial" panose="020B0604020202020204" pitchFamily="34" charset="0"/>
+              </a:rPr>
+            </a:br>
+            <a:r>
+              <a:rPr lang="de-DE" sz="1600" dirty="0">
+                <a:solidFill>
+                  <a:schemeClr val="tx1"/>
+                </a:solidFill>
+                <a:latin typeface="Arial" panose="020B0604020202020204" pitchFamily="34" charset="0"/>
+                <a:cs typeface="Arial" panose="020B0604020202020204" pitchFamily="34" charset="0"/>
+              </a:rPr>
+              <a:t>Website</a:t>
+            </a:r>
+          </a:p>
+        </p:txBody>
+      </p:sp>
+      <p:sp>
+        <p:nvSpPr>
+          <p:cNvPr id="30" name="Rechteck: abgerundete Ecken 29">
+            <a:extLst>
+              <a:ext uri="{FF2B5EF4-FFF2-40B4-BE49-F238E27FC236}">
+                <a16:creationId xmlns:a16="http://schemas.microsoft.com/office/drawing/2014/main" id="{9BBB60EB-A5BB-E39E-2C18-A79A4E45934D}"/>
+              </a:ext>
+            </a:extLst>
+          </p:cNvPr>
+          <p:cNvSpPr/>
+          <p:nvPr/>
+        </p:nvSpPr>
+        <p:spPr>
+          <a:xfrm>
+            <a:off x="4174044" y="1640940"/>
+            <a:ext cx="1296144" cy="576064"/>
+          </a:xfrm>
+          <a:prstGeom prst="roundRect">
+            <a:avLst/>
+          </a:prstGeom>
+          <a:ln/>
+        </p:spPr>
+        <p:style>
+          <a:lnRef idx="2">
+            <a:schemeClr val="accent2"/>
+          </a:lnRef>
+          <a:fillRef idx="1">
+            <a:schemeClr val="lt1"/>
+          </a:fillRef>
+          <a:effectRef idx="0">
+            <a:schemeClr val="accent2"/>
+          </a:effectRef>
+          <a:fontRef idx="minor">
+            <a:schemeClr val="dk1"/>
+          </a:fontRef>
+        </p:style>
+        <p:txBody>
+          <a:bodyPr lIns="0" tIns="0" rIns="0" bIns="0" rtlCol="0" anchor="ctr"/>
+          <a:lstStyle/>
+          <a:p>
+            <a:pPr algn="ctr"/>
+            <a:r>
+              <a:rPr lang="de-DE" sz="1600" dirty="0" err="1">
+                <a:solidFill>
+                  <a:schemeClr val="tx1"/>
+                </a:solidFill>
+                <a:latin typeface="Arial" panose="020B0604020202020204" pitchFamily="34" charset="0"/>
+                <a:cs typeface="Arial" panose="020B0604020202020204" pitchFamily="34" charset="0"/>
+              </a:rPr>
+              <a:t>Few</a:t>
+            </a:r>
+            <a:r>
+              <a:rPr lang="de-DE" sz="1600" dirty="0">
+                <a:solidFill>
+                  <a:schemeClr val="tx1"/>
+                </a:solidFill>
+                <a:latin typeface="Arial" panose="020B0604020202020204" pitchFamily="34" charset="0"/>
+                <a:cs typeface="Arial" panose="020B0604020202020204" pitchFamily="34" charset="0"/>
+              </a:rPr>
+              <a:t> </a:t>
+            </a:r>
+            <a:r>
+              <a:rPr lang="de-DE" sz="1600" dirty="0" err="1">
+                <a:solidFill>
+                  <a:schemeClr val="tx1"/>
+                </a:solidFill>
+                <a:latin typeface="Arial" panose="020B0604020202020204" pitchFamily="34" charset="0"/>
+                <a:cs typeface="Arial" panose="020B0604020202020204" pitchFamily="34" charset="0"/>
+              </a:rPr>
+              <a:t>loops</a:t>
+            </a:r>
+            <a:br>
+              <a:rPr lang="de-DE" sz="1600" dirty="0">
+                <a:solidFill>
+                  <a:schemeClr val="tx1"/>
+                </a:solidFill>
+                <a:latin typeface="Arial" panose="020B0604020202020204" pitchFamily="34" charset="0"/>
+                <a:cs typeface="Arial" panose="020B0604020202020204" pitchFamily="34" charset="0"/>
+              </a:rPr>
+            </a:br>
+            <a:r>
+              <a:rPr lang="de-DE" sz="1600" dirty="0" err="1">
+                <a:solidFill>
+                  <a:schemeClr val="tx1"/>
+                </a:solidFill>
+                <a:latin typeface="Arial" panose="020B0604020202020204" pitchFamily="34" charset="0"/>
+                <a:cs typeface="Arial" panose="020B0604020202020204" pitchFamily="34" charset="0"/>
+              </a:rPr>
+              <a:t>over</a:t>
+            </a:r>
+            <a:r>
+              <a:rPr lang="de-DE" sz="1600" dirty="0">
+                <a:solidFill>
+                  <a:schemeClr val="tx1"/>
+                </a:solidFill>
+                <a:latin typeface="Arial" panose="020B0604020202020204" pitchFamily="34" charset="0"/>
+                <a:cs typeface="Arial" panose="020B0604020202020204" pitchFamily="34" charset="0"/>
+              </a:rPr>
+              <a:t> </a:t>
+            </a:r>
+            <a:r>
+              <a:rPr lang="de-DE" sz="1600" dirty="0" err="1">
+                <a:solidFill>
+                  <a:schemeClr val="tx1"/>
+                </a:solidFill>
+                <a:latin typeface="Arial" panose="020B0604020202020204" pitchFamily="34" charset="0"/>
+                <a:cs typeface="Arial" panose="020B0604020202020204" pitchFamily="34" charset="0"/>
+              </a:rPr>
+              <a:t>data</a:t>
+            </a:r>
+            <a:endParaRPr lang="de-DE" sz="1600" dirty="0">
+              <a:solidFill>
+                <a:schemeClr val="tx1"/>
+              </a:solidFill>
+              <a:latin typeface="Arial" panose="020B0604020202020204" pitchFamily="34" charset="0"/>
+              <a:cs typeface="Arial" panose="020B0604020202020204" pitchFamily="34" charset="0"/>
+            </a:endParaRPr>
+          </a:p>
+        </p:txBody>
+      </p:sp>
+      <p:sp>
+        <p:nvSpPr>
+          <p:cNvPr id="31" name="Rechteck: abgerundete Ecken 30">
+            <a:extLst>
+              <a:ext uri="{FF2B5EF4-FFF2-40B4-BE49-F238E27FC236}">
+                <a16:creationId xmlns:a16="http://schemas.microsoft.com/office/drawing/2014/main" id="{FE35D4B2-35CF-C854-555D-638E3BFB2072}"/>
+              </a:ext>
+            </a:extLst>
+          </p:cNvPr>
+          <p:cNvSpPr/>
+          <p:nvPr/>
+        </p:nvSpPr>
+        <p:spPr>
+          <a:xfrm>
+            <a:off x="8125300" y="2683316"/>
+            <a:ext cx="1296144" cy="576064"/>
+          </a:xfrm>
+          <a:prstGeom prst="roundRect">
+            <a:avLst/>
+          </a:prstGeom>
+          <a:ln/>
+        </p:spPr>
+        <p:style>
+          <a:lnRef idx="2">
+            <a:schemeClr val="accent2"/>
+          </a:lnRef>
+          <a:fillRef idx="1">
+            <a:schemeClr val="lt1"/>
+          </a:fillRef>
+          <a:effectRef idx="0">
+            <a:schemeClr val="accent2"/>
+          </a:effectRef>
+          <a:fontRef idx="minor">
+            <a:schemeClr val="dk1"/>
+          </a:fontRef>
+        </p:style>
+        <p:txBody>
+          <a:bodyPr lIns="0" tIns="0" rIns="0" bIns="0" rtlCol="0" anchor="ctr"/>
+          <a:lstStyle/>
+          <a:p>
+            <a:pPr algn="ctr"/>
+            <a:r>
+              <a:rPr lang="de-DE" sz="1600" strike="sngStrike" dirty="0" err="1">
+                <a:solidFill>
+                  <a:schemeClr val="tx1"/>
+                </a:solidFill>
+                <a:latin typeface="Arial" panose="020B0604020202020204" pitchFamily="34" charset="0"/>
+                <a:cs typeface="Arial" panose="020B0604020202020204" pitchFamily="34" charset="0"/>
+              </a:rPr>
+              <a:t>Barrier</a:t>
+            </a:r>
+            <a:br>
+              <a:rPr lang="de-DE" sz="1600" strike="sngStrike" dirty="0">
+                <a:solidFill>
+                  <a:schemeClr val="tx1"/>
+                </a:solidFill>
+                <a:latin typeface="Arial" panose="020B0604020202020204" pitchFamily="34" charset="0"/>
+                <a:cs typeface="Arial" panose="020B0604020202020204" pitchFamily="34" charset="0"/>
+              </a:rPr>
+            </a:br>
+            <a:r>
+              <a:rPr lang="de-DE" sz="1600" strike="sngStrike" dirty="0" err="1">
+                <a:solidFill>
+                  <a:schemeClr val="tx1"/>
+                </a:solidFill>
+                <a:latin typeface="Arial" panose="020B0604020202020204" pitchFamily="34" charset="0"/>
+                <a:cs typeface="Arial" panose="020B0604020202020204" pitchFamily="34" charset="0"/>
+              </a:rPr>
+              <a:t>free</a:t>
+            </a:r>
+            <a:r>
+              <a:rPr lang="de-DE" sz="1600" strike="sngStrike" dirty="0">
+                <a:solidFill>
+                  <a:schemeClr val="tx1"/>
+                </a:solidFill>
+                <a:latin typeface="Arial" panose="020B0604020202020204" pitchFamily="34" charset="0"/>
+                <a:cs typeface="Arial" panose="020B0604020202020204" pitchFamily="34" charset="0"/>
+              </a:rPr>
+              <a:t> </a:t>
+            </a:r>
+            <a:r>
+              <a:rPr lang="de-DE" sz="1600" strike="sngStrike" dirty="0" err="1">
+                <a:solidFill>
+                  <a:schemeClr val="tx1"/>
+                </a:solidFill>
+                <a:latin typeface="Arial" panose="020B0604020202020204" pitchFamily="34" charset="0"/>
+                <a:cs typeface="Arial" panose="020B0604020202020204" pitchFamily="34" charset="0"/>
+              </a:rPr>
+              <a:t>view</a:t>
+            </a:r>
+            <a:endParaRPr lang="de-DE" sz="1600" strike="sngStrike" dirty="0">
+              <a:solidFill>
+                <a:schemeClr val="tx1"/>
+              </a:solidFill>
+              <a:latin typeface="Arial" panose="020B0604020202020204" pitchFamily="34" charset="0"/>
+              <a:cs typeface="Arial" panose="020B0604020202020204" pitchFamily="34" charset="0"/>
+            </a:endParaRPr>
+          </a:p>
+        </p:txBody>
+      </p:sp>
+      <p:sp>
+        <p:nvSpPr>
+          <p:cNvPr id="32" name="Rechteck: abgerundete Ecken 31">
+            <a:extLst>
+              <a:ext uri="{FF2B5EF4-FFF2-40B4-BE49-F238E27FC236}">
+                <a16:creationId xmlns:a16="http://schemas.microsoft.com/office/drawing/2014/main" id="{D2FA104B-42E7-A131-1432-E73B48DDDEE8}"/>
+              </a:ext>
+            </a:extLst>
+          </p:cNvPr>
+          <p:cNvSpPr/>
+          <p:nvPr/>
+        </p:nvSpPr>
+        <p:spPr>
+          <a:xfrm>
+            <a:off x="5139494" y="2705399"/>
+            <a:ext cx="1296144" cy="576064"/>
+          </a:xfrm>
+          <a:prstGeom prst="roundRect">
+            <a:avLst/>
+          </a:prstGeom>
+          <a:ln/>
+        </p:spPr>
+        <p:style>
+          <a:lnRef idx="2">
+            <a:schemeClr val="accent2"/>
+          </a:lnRef>
+          <a:fillRef idx="1">
+            <a:schemeClr val="lt1"/>
+          </a:fillRef>
+          <a:effectRef idx="0">
+            <a:schemeClr val="accent2"/>
+          </a:effectRef>
+          <a:fontRef idx="minor">
+            <a:schemeClr val="dk1"/>
+          </a:fontRef>
+        </p:style>
+        <p:txBody>
+          <a:bodyPr lIns="0" tIns="0" rIns="0" bIns="0" rtlCol="0" anchor="ctr"/>
+          <a:lstStyle/>
+          <a:p>
+            <a:pPr algn="ctr"/>
+            <a:r>
+              <a:rPr lang="de-DE" sz="1600" dirty="0">
+                <a:solidFill>
+                  <a:schemeClr val="tx1"/>
+                </a:solidFill>
+                <a:latin typeface="Arial" panose="020B0604020202020204" pitchFamily="34" charset="0"/>
+                <a:cs typeface="Arial" panose="020B0604020202020204" pitchFamily="34" charset="0"/>
+              </a:rPr>
+              <a:t>CSS</a:t>
+            </a:r>
+            <a:br>
+              <a:rPr lang="de-DE" sz="1600" dirty="0">
+                <a:solidFill>
+                  <a:schemeClr val="tx1"/>
+                </a:solidFill>
+                <a:latin typeface="Arial" panose="020B0604020202020204" pitchFamily="34" charset="0"/>
+                <a:cs typeface="Arial" panose="020B0604020202020204" pitchFamily="34" charset="0"/>
+              </a:rPr>
+            </a:br>
+            <a:r>
+              <a:rPr lang="de-DE" sz="1600" dirty="0" err="1">
+                <a:solidFill>
+                  <a:schemeClr val="tx1"/>
+                </a:solidFill>
+                <a:latin typeface="Arial" panose="020B0604020202020204" pitchFamily="34" charset="0"/>
+                <a:cs typeface="Arial" panose="020B0604020202020204" pitchFamily="34" charset="0"/>
+              </a:rPr>
+              <a:t>styling</a:t>
+            </a:r>
+            <a:endParaRPr lang="de-DE" sz="1600" dirty="0">
+              <a:solidFill>
+                <a:schemeClr val="tx1"/>
+              </a:solidFill>
+              <a:latin typeface="Arial" panose="020B0604020202020204" pitchFamily="34" charset="0"/>
+              <a:cs typeface="Arial" panose="020B0604020202020204" pitchFamily="34" charset="0"/>
+            </a:endParaRPr>
+          </a:p>
+        </p:txBody>
+      </p:sp>
+      <p:sp>
+        <p:nvSpPr>
+          <p:cNvPr id="33" name="Rechteck: abgerundete Ecken 32">
+            <a:extLst>
+              <a:ext uri="{FF2B5EF4-FFF2-40B4-BE49-F238E27FC236}">
+                <a16:creationId xmlns:a16="http://schemas.microsoft.com/office/drawing/2014/main" id="{2632E240-708E-E8AD-88D5-05EB98D3254E}"/>
+              </a:ext>
+            </a:extLst>
+          </p:cNvPr>
+          <p:cNvSpPr/>
+          <p:nvPr/>
+        </p:nvSpPr>
+        <p:spPr>
+          <a:xfrm>
+            <a:off x="3656856" y="2708772"/>
+            <a:ext cx="1296144" cy="576064"/>
+          </a:xfrm>
+          <a:prstGeom prst="roundRect">
+            <a:avLst/>
+          </a:prstGeom>
+          <a:ln/>
+        </p:spPr>
+        <p:style>
+          <a:lnRef idx="2">
+            <a:schemeClr val="accent2"/>
+          </a:lnRef>
+          <a:fillRef idx="1">
+            <a:schemeClr val="lt1"/>
+          </a:fillRef>
+          <a:effectRef idx="0">
+            <a:schemeClr val="accent2"/>
+          </a:effectRef>
+          <a:fontRef idx="minor">
+            <a:schemeClr val="dk1"/>
+          </a:fontRef>
+        </p:style>
+        <p:txBody>
+          <a:bodyPr lIns="0" tIns="0" rIns="0" bIns="0" rtlCol="0" anchor="ctr"/>
+          <a:lstStyle/>
+          <a:p>
+            <a:pPr algn="ctr"/>
+            <a:r>
+              <a:rPr lang="de-DE" sz="1600" dirty="0" err="1">
+                <a:solidFill>
+                  <a:schemeClr val="tx1"/>
+                </a:solidFill>
+                <a:latin typeface="Arial" panose="020B0604020202020204" pitchFamily="34" charset="0"/>
+                <a:cs typeface="Arial" panose="020B0604020202020204" pitchFamily="34" charset="0"/>
+              </a:rPr>
+              <a:t>eCharts</a:t>
+            </a:r>
+            <a:br>
+              <a:rPr lang="de-DE" sz="1600" dirty="0">
+                <a:solidFill>
+                  <a:schemeClr val="tx1"/>
+                </a:solidFill>
+                <a:latin typeface="Arial" panose="020B0604020202020204" pitchFamily="34" charset="0"/>
+                <a:cs typeface="Arial" panose="020B0604020202020204" pitchFamily="34" charset="0"/>
+              </a:rPr>
+            </a:br>
+            <a:r>
+              <a:rPr lang="de-DE" sz="1600" dirty="0" err="1">
+                <a:solidFill>
+                  <a:schemeClr val="tx1"/>
+                </a:solidFill>
+                <a:latin typeface="Arial" panose="020B0604020202020204" pitchFamily="34" charset="0"/>
+                <a:cs typeface="Arial" panose="020B0604020202020204" pitchFamily="34" charset="0"/>
+              </a:rPr>
+              <a:t>lib</a:t>
+            </a:r>
+            <a:endParaRPr lang="de-DE" sz="1600" dirty="0">
+              <a:solidFill>
+                <a:schemeClr val="tx1"/>
+              </a:solidFill>
+              <a:latin typeface="Arial" panose="020B0604020202020204" pitchFamily="34" charset="0"/>
+              <a:cs typeface="Arial" panose="020B0604020202020204" pitchFamily="34" charset="0"/>
+            </a:endParaRPr>
+          </a:p>
+        </p:txBody>
+      </p:sp>
+    </p:spTree>
+    <p:extLst>
+      <p:ext uri="{BB962C8B-B14F-4D97-AF65-F5344CB8AC3E}">
+        <p14:creationId xmlns:p14="http://schemas.microsoft.com/office/powerpoint/2010/main" val="777353703"/>
+      </p:ext>
+    </p:extLst>
+  </p:cSld>
+  <p:clrMapOvr>
+    <a:masterClrMapping/>
+  </p:clrMapOvr>
 </p:sld>
 </file>
 

--- a/doc/architecture.pptx
+++ b/doc/architecture.pptx
@@ -210,28 +210,6 @@
 </p:cmAuthorLst>
 </file>
 
-<file path=ppt/comments/modernComment_57D_D2233FF2.xml><?xml version="1.0" encoding="utf-8"?>
-<p188:cmLst xmlns:a="http://schemas.openxmlformats.org/drawingml/2006/main" xmlns:r="http://schemas.openxmlformats.org/officeDocument/2006/relationships" xmlns:p188="http://schemas.microsoft.com/office/powerpoint/2018/8/main">
-  <p188:cm id="{A59F071B-7079-40FD-ACA5-17DC33330683}" authorId="{D189D656-8E02-B9F1-10F5-52BD840A97A1}" created="2026-02-11T09:09:52.119">
-    <ac:deMkLst xmlns:ac="http://schemas.microsoft.com/office/drawing/2013/main/command">
-      <pc:docMk xmlns:pc="http://schemas.microsoft.com/office/powerpoint/2013/main/command"/>
-      <pc:sldMk xmlns:pc="http://schemas.microsoft.com/office/powerpoint/2013/main/command" cId="3525525490" sldId="1405"/>
-      <ac:cxnSpMk id="17" creationId="{C8733E90-2C5F-6ED5-86DF-89D3B6C28EF0}"/>
-    </ac:deMkLst>
-    <p188:txBody>
-      <a:bodyPr/>
-      <a:lstStyle/>
-      <a:p>
-        <a:r>
-          <a:rPr lang="de-DE"/>
-          <a:t>Student assistants updates Excel file</a:t>
-        </a:r>
-      </a:p>
-    </p188:txBody>
-  </p188:cm>
-</p188:cmLst>
-</file>
-
 <file path=ppt/handoutMasters/handoutMaster1.xml><?xml version="1.0" encoding="utf-8"?>
 <p:handoutMaster xmlns:a="http://schemas.openxmlformats.org/drawingml/2006/main" xmlns:r="http://schemas.openxmlformats.org/officeDocument/2006/relationships" xmlns:p="http://schemas.openxmlformats.org/presentationml/2006/main">
   <p:cSld>
@@ -1090,7 +1068,132 @@
           <a:bodyPr/>
           <a:lstStyle/>
           <a:p>
+            <a:r>
+              <a:rPr lang="de-DE" dirty="0"/>
+              <a:t>The </a:t>
+            </a:r>
+            <a:r>
+              <a:rPr lang="de-DE" dirty="0" err="1"/>
+              <a:t>thicker</a:t>
+            </a:r>
+            <a:r>
+              <a:rPr lang="de-DE" dirty="0"/>
+              <a:t> </a:t>
+            </a:r>
+            <a:r>
+              <a:rPr lang="de-DE" dirty="0" err="1"/>
+              <a:t>the</a:t>
+            </a:r>
+            <a:r>
+              <a:rPr lang="de-DE" dirty="0"/>
+              <a:t> frame </a:t>
+            </a:r>
+            <a:r>
+              <a:rPr lang="de-DE" dirty="0" err="1"/>
+              <a:t>border</a:t>
+            </a:r>
+            <a:r>
+              <a:rPr lang="de-DE" dirty="0"/>
+              <a:t>, </a:t>
+            </a:r>
+            <a:r>
+              <a:rPr lang="de-DE" dirty="0" err="1"/>
+              <a:t>the</a:t>
+            </a:r>
+            <a:r>
+              <a:rPr lang="de-DE" dirty="0"/>
+              <a:t> </a:t>
+            </a:r>
+            <a:r>
+              <a:rPr lang="de-DE" dirty="0" err="1"/>
+              <a:t>more</a:t>
+            </a:r>
+            <a:r>
+              <a:rPr lang="de-DE" dirty="0"/>
+              <a:t> </a:t>
+            </a:r>
+            <a:r>
+              <a:rPr lang="de-DE" dirty="0" err="1"/>
+              <a:t>hours</a:t>
+            </a:r>
+            <a:r>
+              <a:rPr lang="de-DE" dirty="0"/>
+              <a:t> </a:t>
+            </a:r>
+            <a:r>
+              <a:rPr lang="de-DE" dirty="0" err="1"/>
+              <a:t>required</a:t>
+            </a:r>
             <a:endParaRPr lang="de-DE" dirty="0"/>
+          </a:p>
+          <a:p>
+            <a:r>
+              <a:rPr lang="de-DE" dirty="0"/>
+              <a:t>Grey </a:t>
+            </a:r>
+            <a:r>
+              <a:rPr lang="de-DE" dirty="0" err="1"/>
+              <a:t>background</a:t>
+            </a:r>
+            <a:r>
+              <a:rPr lang="de-DE" dirty="0"/>
+              <a:t>: Admin, </a:t>
+            </a:r>
+            <a:r>
+              <a:rPr lang="de-DE" dirty="0" err="1"/>
+              <a:t>white</a:t>
+            </a:r>
+            <a:r>
+              <a:rPr lang="de-DE" dirty="0"/>
+              <a:t>: Coding</a:t>
+            </a:r>
+            <a:br>
+              <a:rPr lang="de-DE" dirty="0"/>
+            </a:br>
+            <a:r>
+              <a:rPr lang="de-DE" dirty="0"/>
+              <a:t>AI: Can </a:t>
+            </a:r>
+            <a:r>
+              <a:rPr lang="de-DE" dirty="0" err="1"/>
+              <a:t>give</a:t>
+            </a:r>
+            <a:r>
+              <a:rPr lang="de-DE" dirty="0"/>
+              <a:t> </a:t>
+            </a:r>
+            <a:r>
+              <a:rPr lang="de-DE" dirty="0" err="1"/>
+              <a:t>scaffolds</a:t>
+            </a:r>
+            <a:r>
+              <a:rPr lang="de-DE" dirty="0"/>
+              <a:t> </a:t>
+            </a:r>
+            <a:r>
+              <a:rPr lang="de-DE" dirty="0" err="1"/>
+              <a:t>across</a:t>
+            </a:r>
+            <a:r>
+              <a:rPr lang="de-DE" dirty="0"/>
+              <a:t> </a:t>
+            </a:r>
+            <a:r>
+              <a:rPr lang="de-DE" dirty="0" err="1"/>
+              <a:t>two</a:t>
+            </a:r>
+            <a:r>
+              <a:rPr lang="de-DE" dirty="0"/>
+              <a:t> </a:t>
+            </a:r>
+            <a:r>
+              <a:rPr lang="de-DE" dirty="0" err="1"/>
+              <a:t>boxes</a:t>
+            </a:r>
+            <a:r>
+              <a:rPr lang="de-DE" dirty="0"/>
+              <a:t>. </a:t>
+            </a:r>
           </a:p>
         </p:txBody>
       </p:sp>
@@ -6004,7 +6107,7 @@
         <p:spPr>
           <a:xfrm>
             <a:off x="633413" y="763588"/>
-            <a:ext cx="9272587" cy="981794"/>
+            <a:ext cx="9272587" cy="649188"/>
           </a:xfrm>
         </p:spPr>
         <p:txBody>
@@ -6053,15 +6156,7 @@
             </a:pPr>
             <a:r>
               <a:rPr lang="en-GB" sz="2400" dirty="0"/>
-              <a:t>Website combines </a:t>
-            </a:r>
-            <a:r>
-              <a:rPr lang="en-GB" sz="2400" dirty="0" err="1"/>
-              <a:t>disparat</a:t>
-            </a:r>
-            <a:r>
-              <a:rPr lang="en-GB" sz="2400" dirty="0"/>
-              <a:t> information</a:t>
+              <a:t>Website combines disparate information</a:t>
             </a:r>
             <a:br>
               <a:rPr lang="en-GB" sz="2400" dirty="0"/>
@@ -6147,25 +6242,8 @@
             </a:pPr>
             <a:r>
               <a:rPr lang="en-GB" sz="2400" dirty="0"/>
-              <a:t>Editorials around academic research </a:t>
-            </a:r>
-          </a:p>
-          <a:p>
-            <a:pPr marL="342900" indent="-342900">
-              <a:lnSpc>
-                <a:spcPct val="100000"/>
-              </a:lnSpc>
-              <a:buFont typeface="Arial" panose="020B0604020202020204" pitchFamily="34" charset="0"/>
-              <a:buChar char="•"/>
-            </a:pPr>
-            <a:endParaRPr lang="en-GB" sz="2400" noProof="0" dirty="0"/>
-          </a:p>
-          <a:p>
-            <a:pPr marL="342900" indent="-342900">
-              <a:buFont typeface="Arial" panose="020B0604020202020204" pitchFamily="34" charset="0"/>
-              <a:buChar char="•"/>
-            </a:pPr>
-            <a:endParaRPr lang="en-GB" sz="2400" dirty="0"/>
+              <a:t>Editorials around academic research</a:t>
+            </a:r>
           </a:p>
           <a:p>
             <a:pPr marL="342900" indent="-342900">
@@ -6246,7 +6324,7 @@
         <p:spPr>
           <a:xfrm>
             <a:off x="633413" y="763588"/>
-            <a:ext cx="9272587" cy="981794"/>
+            <a:ext cx="9272587" cy="649188"/>
           </a:xfrm>
         </p:spPr>
         <p:txBody>
@@ -6373,7 +6451,7 @@
             </a:pPr>
             <a:r>
               <a:rPr lang="en-GB" sz="2400" dirty="0"/>
-              <a:t>Based on open source software</a:t>
+              <a:t>Based 100% on Open-Source software</a:t>
             </a:r>
           </a:p>
           <a:p>
@@ -6383,11 +6461,11 @@
             </a:pPr>
             <a:r>
               <a:rPr lang="en-GB" dirty="0"/>
-              <a:t>Debian, Apache, Python, Flask, </a:t>
+              <a:t>Debian Linux, Apache, Python, Flask, </a:t>
             </a:r>
             <a:r>
               <a:rPr lang="en-GB" dirty="0" err="1"/>
-              <a:t>Echarts</a:t>
+              <a:t>ECharts</a:t>
             </a:r>
             <a:endParaRPr lang="en-GB" dirty="0"/>
           </a:p>
@@ -6398,24 +6476,11 @@
             </a:pPr>
             <a:r>
               <a:rPr lang="en-GB" dirty="0"/>
-              <a:t>coding, data and content as git repository</a:t>
+              <a:t>Code, data and content as git repository</a:t>
             </a:r>
           </a:p>
           <a:p>
             <a:pPr marL="342900" indent="-342900">
-              <a:buFont typeface="Arial" panose="020B0604020202020204" pitchFamily="34" charset="0"/>
-              <a:buChar char="•"/>
-            </a:pPr>
-            <a:r>
-              <a:rPr lang="en-GB" sz="2400" dirty="0"/>
-              <a:t> </a:t>
-            </a:r>
-          </a:p>
-          <a:p>
-            <a:pPr marL="342900" indent="-342900">
-              <a:lnSpc>
-                <a:spcPct val="100000"/>
-              </a:lnSpc>
               <a:buFont typeface="Arial" panose="020B0604020202020204" pitchFamily="34" charset="0"/>
               <a:buChar char="•"/>
             </a:pPr>
@@ -6503,7 +6568,7 @@
         </p:nvCxnSpPr>
         <p:spPr>
           <a:xfrm>
-            <a:off x="4808984" y="3097399"/>
+            <a:off x="4808984" y="2882491"/>
             <a:ext cx="792088" cy="547625"/>
           </a:xfrm>
           <a:prstGeom prst="bentConnector3">
@@ -6550,7 +6615,7 @@
           <p:nvPr/>
         </p:nvPicPr>
         <p:blipFill>
-          <a:blip r:embed="rId4">
+          <a:blip r:embed="rId3">
             <a:extLst>
               <a:ext uri="{28A0092B-C50C-407E-A947-70E740481C1C}">
                 <a14:useLocalDpi xmlns:a14="http://schemas.microsoft.com/office/drawing/2010/main" val="0"/>
@@ -6563,7 +6628,7 @@
         </p:blipFill>
         <p:spPr>
           <a:xfrm>
-            <a:off x="5457056" y="2228406"/>
+            <a:off x="5457056" y="2013498"/>
             <a:ext cx="2905530" cy="3000794"/>
           </a:xfrm>
           <a:prstGeom prst="rect">
@@ -6586,7 +6651,7 @@
           <p:nvPr/>
         </p:nvPicPr>
         <p:blipFill>
-          <a:blip r:embed="rId5">
+          <a:blip r:embed="rId4" cstate="print">
             <a:extLst>
               <a:ext uri="{28A0092B-C50C-407E-A947-70E740481C1C}">
                 <a14:useLocalDpi xmlns:a14="http://schemas.microsoft.com/office/drawing/2010/main" val="0"/>
@@ -6599,8 +6664,8 @@
         </p:blipFill>
         <p:spPr>
           <a:xfrm>
-            <a:off x="200472" y="1988840"/>
-            <a:ext cx="2855617" cy="2505176"/>
+            <a:off x="632520" y="2394376"/>
+            <a:ext cx="2149782" cy="1885961"/>
           </a:xfrm>
           <a:prstGeom prst="rect">
             <a:avLst/>
@@ -6625,8 +6690,8 @@
         </p:nvSpPr>
         <p:spPr>
           <a:xfrm>
-            <a:off x="633413" y="763588"/>
-            <a:ext cx="9000107" cy="981794"/>
+            <a:off x="633413" y="776050"/>
+            <a:ext cx="9000107" cy="420702"/>
           </a:xfrm>
         </p:spPr>
         <p:txBody>
@@ -6658,7 +6723,7 @@
         </p:nvSpPr>
         <p:spPr>
           <a:xfrm>
-            <a:off x="633600" y="1484784"/>
+            <a:off x="633600" y="1414659"/>
             <a:ext cx="8639175" cy="502173"/>
           </a:xfrm>
         </p:spPr>
@@ -6675,20 +6740,10 @@
             </a:pPr>
             <a:r>
               <a:rPr lang="en-GB" dirty="0">
-                <a:hlinkClick r:id="rId6"/>
+                <a:hlinkClick r:id="rId5"/>
               </a:rPr>
               <a:t>https://git.zew.de/ub-public-finance/ecb-monitor</a:t>
             </a:r>
-            <a:endParaRPr lang="en-GB" dirty="0"/>
-          </a:p>
-          <a:p>
-            <a:pPr marL="342900" indent="-342900">
-              <a:lnSpc>
-                <a:spcPct val="100000"/>
-              </a:lnSpc>
-              <a:buFont typeface="Arial" panose="020B0604020202020204" pitchFamily="34" charset="0"/>
-              <a:buChar char="•"/>
-            </a:pPr>
             <a:endParaRPr lang="en-GB" noProof="0" dirty="0"/>
           </a:p>
           <a:p>
@@ -6724,7 +6779,7 @@
         </p:nvSpPr>
         <p:spPr>
           <a:xfrm>
-            <a:off x="3512840" y="2636912"/>
+            <a:off x="3512840" y="2422004"/>
             <a:ext cx="1296144" cy="936104"/>
           </a:xfrm>
           <a:prstGeom prst="roundRect">
@@ -6812,7 +6867,7 @@
         </p:nvSpPr>
         <p:spPr>
           <a:xfrm>
-            <a:off x="5601072" y="2780928"/>
+            <a:off x="5601072" y="2566020"/>
             <a:ext cx="1368152" cy="1728192"/>
           </a:xfrm>
           <a:prstGeom prst="roundRect">
@@ -6901,7 +6956,7 @@
         </p:nvSpPr>
         <p:spPr>
           <a:xfrm>
-            <a:off x="704528" y="4725144"/>
+            <a:off x="704528" y="4365104"/>
             <a:ext cx="2016224" cy="360040"/>
           </a:xfrm>
           <a:prstGeom prst="roundRect">
@@ -6943,8 +6998,25 @@
                 <a:latin typeface="Arial" panose="020B0604020202020204" pitchFamily="34" charset="0"/>
                 <a:cs typeface="Arial" panose="020B0604020202020204" pitchFamily="34" charset="0"/>
               </a:rPr>
-              <a:t>Editorials</a:t>
-            </a:r>
+              <a:t>Blog, </a:t>
+            </a:r>
+            <a:r>
+              <a:rPr lang="de-DE" dirty="0" err="1">
+                <a:solidFill>
+                  <a:schemeClr val="tx1"/>
+                </a:solidFill>
+                <a:latin typeface="Arial" panose="020B0604020202020204" pitchFamily="34" charset="0"/>
+                <a:cs typeface="Arial" panose="020B0604020202020204" pitchFamily="34" charset="0"/>
+              </a:rPr>
+              <a:t>editorials</a:t>
+            </a:r>
+            <a:endParaRPr lang="de-DE" dirty="0">
+              <a:solidFill>
+                <a:schemeClr val="tx1"/>
+              </a:solidFill>
+              <a:latin typeface="Arial" panose="020B0604020202020204" pitchFamily="34" charset="0"/>
+              <a:cs typeface="Arial" panose="020B0604020202020204" pitchFamily="34" charset="0"/>
+            </a:endParaRPr>
           </a:p>
         </p:txBody>
       </p:sp>
@@ -6962,7 +7034,7 @@
         </p:nvSpPr>
         <p:spPr>
           <a:xfrm>
-            <a:off x="704528" y="5733256"/>
+            <a:off x="704528" y="5373216"/>
             <a:ext cx="2016224" cy="360040"/>
           </a:xfrm>
           <a:prstGeom prst="roundRect">
@@ -7109,7 +7181,7 @@
         </p:nvSpPr>
         <p:spPr>
           <a:xfrm>
-            <a:off x="704528" y="6237312"/>
+            <a:off x="704528" y="5877272"/>
             <a:ext cx="2016224" cy="360040"/>
           </a:xfrm>
           <a:prstGeom prst="roundRect">
@@ -7210,8 +7282,8 @@
         </p:nvCxnSpPr>
         <p:spPr>
           <a:xfrm flipV="1">
-            <a:off x="2720752" y="3104964"/>
-            <a:ext cx="792088" cy="1800200"/>
+            <a:off x="2720752" y="2890056"/>
+            <a:ext cx="792088" cy="1655068"/>
           </a:xfrm>
           <a:prstGeom prst="bentConnector3">
             <a:avLst>
@@ -7257,8 +7329,8 @@
         </p:nvCxnSpPr>
         <p:spPr>
           <a:xfrm rot="10800000" flipV="1">
-            <a:off x="2720752" y="3104964"/>
-            <a:ext cx="792088" cy="2808312"/>
+            <a:off x="2720752" y="2890056"/>
+            <a:ext cx="792088" cy="2663180"/>
           </a:xfrm>
           <a:prstGeom prst="bentConnector3">
             <a:avLst>
@@ -7304,8 +7376,8 @@
         </p:nvCxnSpPr>
         <p:spPr>
           <a:xfrm rot="10800000" flipV="1">
-            <a:off x="2720752" y="3104964"/>
-            <a:ext cx="792088" cy="3312368"/>
+            <a:off x="2720752" y="2890056"/>
+            <a:ext cx="792088" cy="3167236"/>
           </a:xfrm>
           <a:prstGeom prst="bentConnector3">
             <a:avLst>
@@ -7351,7 +7423,7 @@
         </p:nvCxnSpPr>
         <p:spPr>
           <a:xfrm>
-            <a:off x="4808984" y="3104964"/>
+            <a:off x="4808984" y="2890056"/>
             <a:ext cx="792088" cy="540060"/>
           </a:xfrm>
           <a:prstGeom prst="bentConnector3">
@@ -7394,7 +7466,7 @@
         </p:nvSpPr>
         <p:spPr>
           <a:xfrm>
-            <a:off x="7373946" y="5599819"/>
+            <a:off x="7373946" y="5384911"/>
             <a:ext cx="2016224" cy="360040"/>
           </a:xfrm>
           <a:prstGeom prst="roundRect">
@@ -7462,7 +7534,7 @@
         </p:nvSpPr>
         <p:spPr>
           <a:xfrm>
-            <a:off x="7373946" y="6093296"/>
+            <a:off x="7373946" y="5878388"/>
             <a:ext cx="2016224" cy="360040"/>
           </a:xfrm>
           <a:prstGeom prst="roundRect">
@@ -7530,7 +7602,7 @@
         </p:nvSpPr>
         <p:spPr>
           <a:xfrm>
-            <a:off x="7354474" y="4732707"/>
+            <a:off x="7354474" y="4517799"/>
             <a:ext cx="2016224" cy="687091"/>
           </a:xfrm>
           <a:prstGeom prst="roundRect">
@@ -7641,7 +7713,7 @@
         </p:nvCxnSpPr>
         <p:spPr>
           <a:xfrm>
-            <a:off x="6969224" y="3645024"/>
+            <a:off x="6969224" y="3430116"/>
             <a:ext cx="385250" cy="1431229"/>
           </a:xfrm>
           <a:prstGeom prst="bentConnector3">
@@ -7688,7 +7760,7 @@
         </p:nvCxnSpPr>
         <p:spPr>
           <a:xfrm>
-            <a:off x="6969224" y="3645024"/>
+            <a:off x="6969224" y="3430116"/>
             <a:ext cx="404722" cy="2134815"/>
           </a:xfrm>
           <a:prstGeom prst="bentConnector3">
@@ -7735,7 +7807,7 @@
         </p:nvCxnSpPr>
         <p:spPr>
           <a:xfrm>
-            <a:off x="6969224" y="3645024"/>
+            <a:off x="6969224" y="3430116"/>
             <a:ext cx="404722" cy="2628292"/>
           </a:xfrm>
           <a:prstGeom prst="bentConnector3">
@@ -7778,7 +7850,7 @@
         </p:nvSpPr>
         <p:spPr>
           <a:xfrm>
-            <a:off x="7694395" y="4365104"/>
+            <a:off x="7694395" y="4150196"/>
             <a:ext cx="1841851" cy="215444"/>
           </a:xfrm>
           <a:prstGeom prst="rect">
@@ -7851,7 +7923,7 @@
         </p:nvSpPr>
         <p:spPr>
           <a:xfrm>
-            <a:off x="4964348" y="2494057"/>
+            <a:off x="4964348" y="2279149"/>
             <a:ext cx="407163" cy="369332"/>
           </a:xfrm>
           <a:prstGeom prst="rect">
@@ -7906,7 +7978,7 @@
         </p:nvSpPr>
         <p:spPr>
           <a:xfrm>
-            <a:off x="4953713" y="3707740"/>
+            <a:off x="4953713" y="3492832"/>
             <a:ext cx="503343" cy="369332"/>
           </a:xfrm>
           <a:prstGeom prst="rect">
@@ -7961,7 +8033,7 @@
         </p:nvSpPr>
         <p:spPr>
           <a:xfrm>
-            <a:off x="3512840" y="3573016"/>
+            <a:off x="3512840" y="3358108"/>
             <a:ext cx="1440160" cy="1107996"/>
           </a:xfrm>
           <a:prstGeom prst="rect">
@@ -8125,7 +8197,7 @@
         </p:nvSpPr>
         <p:spPr>
           <a:xfrm>
-            <a:off x="6969224" y="1268070"/>
+            <a:off x="6969224" y="1053162"/>
             <a:ext cx="936104" cy="684075"/>
           </a:xfrm>
           <a:prstGeom prst="flowChartDisplay">
@@ -8196,7 +8268,7 @@
         </p:nvSpPr>
         <p:spPr>
           <a:xfrm>
-            <a:off x="8013005" y="1772816"/>
+            <a:off x="8013005" y="1557908"/>
             <a:ext cx="936104" cy="684075"/>
           </a:xfrm>
           <a:prstGeom prst="flowChartDisplay">
@@ -8283,7 +8355,7 @@
         </p:nvCxnSpPr>
         <p:spPr>
           <a:xfrm rot="10800000" flipV="1">
-            <a:off x="6285148" y="1610108"/>
+            <a:off x="6285148" y="1395200"/>
             <a:ext cx="684076" cy="1170820"/>
           </a:xfrm>
           <a:prstGeom prst="bentConnector2">
@@ -8334,7 +8406,7 @@
         </p:nvCxnSpPr>
         <p:spPr>
           <a:xfrm rot="10800000" flipV="1">
-            <a:off x="6285149" y="2114854"/>
+            <a:off x="6285149" y="1899946"/>
             <a:ext cx="1727857" cy="666074"/>
           </a:xfrm>
           <a:prstGeom prst="curvedConnector2">
@@ -8381,7 +8453,7 @@
         </p:nvSpPr>
         <p:spPr>
           <a:xfrm>
-            <a:off x="704528" y="5157192"/>
+            <a:off x="704528" y="4797152"/>
             <a:ext cx="2016224" cy="216024"/>
           </a:xfrm>
           <a:prstGeom prst="roundRect">
@@ -8433,7 +8505,7 @@
                 <a:latin typeface="Arial" panose="020B0604020202020204" pitchFamily="34" charset="0"/>
                 <a:cs typeface="Arial" panose="020B0604020202020204" pitchFamily="34" charset="0"/>
               </a:rPr>
-              <a:t>panel</a:t>
+              <a:t>council</a:t>
             </a:r>
             <a:r>
               <a:rPr lang="de-DE" sz="1200" dirty="0">
@@ -8483,8 +8555,8 @@
         </p:nvCxnSpPr>
         <p:spPr>
           <a:xfrm flipV="1">
-            <a:off x="2720752" y="3104964"/>
-            <a:ext cx="792088" cy="2160240"/>
+            <a:off x="2720752" y="2890056"/>
+            <a:ext cx="792088" cy="2015108"/>
           </a:xfrm>
           <a:prstGeom prst="bentConnector3">
             <a:avLst>
@@ -8512,41 +8584,6 @@
           </a:fontRef>
         </p:style>
       </p:cxnSp>
-      <p:sp>
-        <p:nvSpPr>
-          <p:cNvPr id="19" name="Textfeld 18">
-            <a:extLst>
-              <a:ext uri="{FF2B5EF4-FFF2-40B4-BE49-F238E27FC236}">
-                <a16:creationId xmlns:a16="http://schemas.microsoft.com/office/drawing/2014/main" id="{2EDD212D-7136-80A9-A6AE-0A38DFE6AF6C}"/>
-              </a:ext>
-            </a:extLst>
-          </p:cNvPr>
-          <p:cNvSpPr txBox="1"/>
-          <p:nvPr/>
-        </p:nvSpPr>
-        <p:spPr>
-          <a:xfrm>
-            <a:off x="2477814" y="3246961"/>
-            <a:ext cx="4955626" cy="369332"/>
-          </a:xfrm>
-          <a:prstGeom prst="rect">
-            <a:avLst/>
-          </a:prstGeom>
-          <a:noFill/>
-        </p:spPr>
-        <p:txBody>
-          <a:bodyPr wrap="square">
-            <a:spAutoFit/>
-          </a:bodyPr>
-          <a:lstStyle/>
-          <a:p>
-            <a:r>
-              <a:rPr lang="de-DE" dirty="0"/>
-              <a:t>https://www.zew.de/en/legal-note</a:t>
-            </a:r>
-          </a:p>
-        </p:txBody>
-      </p:sp>
     </p:spTree>
     <p:extLst>
       <p:ext uri="{BB962C8B-B14F-4D97-AF65-F5344CB8AC3E}">
@@ -8557,11 +8594,6 @@
   <p:clrMapOvr>
     <a:masterClrMapping/>
   </p:clrMapOvr>
-  <p:extLst>
-    <p:ext uri="{6950BFC3-D8DA-4A85-94F7-54DA5524770B}">
-      <p188:commentRel xmlns:p188="http://schemas.microsoft.com/office/powerpoint/2018/8/main" r:id="rId3"/>
-    </p:ext>
-  </p:extLst>
 </p:sld>
 </file>
 
@@ -8590,31 +8622,64 @@
       </p:grpSpPr>
       <p:sp>
         <p:nvSpPr>
-          <p:cNvPr id="3" name="Foliennummernplatzhalter 2">
+          <p:cNvPr id="35" name="Flussdiagramm: Manuelle Verarbeitung 34">
             <a:extLst>
               <a:ext uri="{FF2B5EF4-FFF2-40B4-BE49-F238E27FC236}">
-                <a16:creationId xmlns:a16="http://schemas.microsoft.com/office/drawing/2014/main" id="{BB20B746-C1F4-20EA-1E03-A17A9520B632}"/>
+                <a16:creationId xmlns:a16="http://schemas.microsoft.com/office/drawing/2014/main" id="{E2386A96-FB57-FC9F-D60A-F523B6B1A741}"/>
               </a:ext>
             </a:extLst>
           </p:cNvPr>
-          <p:cNvSpPr>
-            <a:spLocks noGrp="1"/>
-          </p:cNvSpPr>
-          <p:nvPr>
-            <p:ph type="sldNum" sz="quarter" idx="4"/>
-          </p:nvPr>
-        </p:nvSpPr>
-        <p:spPr/>
-        <p:txBody>
-          <a:bodyPr/>
+          <p:cNvSpPr/>
+          <p:nvPr/>
+        </p:nvSpPr>
+        <p:spPr>
+          <a:xfrm flipV="1">
+            <a:off x="714713" y="1412776"/>
+            <a:ext cx="8690657" cy="5112560"/>
+          </a:xfrm>
+          <a:prstGeom prst="flowChartManualOperation">
+            <a:avLst/>
+          </a:prstGeom>
+          <a:solidFill>
+            <a:schemeClr val="accent1">
+              <a:lumMod val="20000"/>
+              <a:lumOff val="80000"/>
+            </a:schemeClr>
+          </a:solidFill>
+          <a:ln w="28575">
+            <a:solidFill>
+              <a:schemeClr val="accent1"/>
+            </a:solidFill>
+          </a:ln>
+        </p:spPr>
+        <p:style>
+          <a:lnRef idx="2">
+            <a:schemeClr val="accent1">
+              <a:shade val="50000"/>
+            </a:schemeClr>
+          </a:lnRef>
+          <a:fillRef idx="1">
+            <a:schemeClr val="accent1"/>
+          </a:fillRef>
+          <a:effectRef idx="0">
+            <a:schemeClr val="accent1"/>
+          </a:effectRef>
+          <a:fontRef idx="minor">
+            <a:schemeClr val="lt1"/>
+          </a:fontRef>
+        </p:style>
+        <p:txBody>
+          <a:bodyPr rtlCol="0" anchor="ctr"/>
           <a:lstStyle/>
           <a:p>
-            <a:fld id="{E1A12CDA-83D3-4EF4-BC0D-8D5887487634}" type="slidenum">
-              <a:rPr lang="de-DE" smtClean="0"/>
-              <a:pPr/>
-              <a:t>4</a:t>
-            </a:fld>
-            <a:endParaRPr lang="de-DE" dirty="0"/>
+            <a:pPr algn="ctr"/>
+            <a:endParaRPr lang="de-DE" dirty="0">
+              <a:solidFill>
+                <a:schemeClr val="tx1"/>
+              </a:solidFill>
+              <a:latin typeface="Arial" panose="020B0604020202020204" pitchFamily="34" charset="0"/>
+              <a:cs typeface="Arial" panose="020B0604020202020204" pitchFamily="34" charset="0"/>
+            </a:endParaRPr>
           </a:p>
         </p:txBody>
       </p:sp>
@@ -8637,7 +8702,7 @@
         <p:spPr>
           <a:xfrm>
             <a:off x="633413" y="763588"/>
-            <a:ext cx="9272587" cy="981794"/>
+            <a:ext cx="9272587" cy="601010"/>
           </a:xfrm>
         </p:spPr>
         <p:txBody>
@@ -8665,7 +8730,7 @@
         </p:nvSpPr>
         <p:spPr>
           <a:xfrm>
-            <a:off x="2677592" y="1640940"/>
+            <a:off x="4428823" y="1632643"/>
             <a:ext cx="1296144" cy="576064"/>
           </a:xfrm>
           <a:prstGeom prst="roundRect">
@@ -8693,6 +8758,16 @@
           <a:p>
             <a:pPr algn="ctr"/>
             <a:r>
+              <a:rPr lang="de-DE" sz="1600" dirty="0">
+                <a:solidFill>
+                  <a:schemeClr val="tx1"/>
+                </a:solidFill>
+                <a:latin typeface="Arial" panose="020B0604020202020204" pitchFamily="34" charset="0"/>
+                <a:cs typeface="Arial" panose="020B0604020202020204" pitchFamily="34" charset="0"/>
+              </a:rPr>
+              <a:t>a </a:t>
+            </a:r>
+            <a:r>
               <a:rPr lang="de-DE" sz="1600" dirty="0" err="1">
                 <a:solidFill>
                   <a:schemeClr val="tx1"/>
@@ -8700,7 +8775,7 @@
                 <a:latin typeface="Arial" panose="020B0604020202020204" pitchFamily="34" charset="0"/>
                 <a:cs typeface="Arial" panose="020B0604020202020204" pitchFamily="34" charset="0"/>
               </a:rPr>
-              <a:t>Few</a:t>
+              <a:t>few</a:t>
             </a:r>
             <a:br>
               <a:rPr lang="de-DE" sz="1600" dirty="0">
@@ -8755,12 +8830,17 @@
         </p:nvSpPr>
         <p:spPr>
           <a:xfrm>
-            <a:off x="2362272" y="5869464"/>
+            <a:off x="2147400" y="5728386"/>
             <a:ext cx="1296144" cy="576064"/>
           </a:xfrm>
           <a:prstGeom prst="roundRect">
             <a:avLst/>
           </a:prstGeom>
+          <a:solidFill>
+            <a:schemeClr val="bg1">
+              <a:lumMod val="95000"/>
+            </a:schemeClr>
+          </a:solidFill>
           <a:ln/>
         </p:spPr>
         <p:style>
@@ -8802,6 +8882,16 @@
               </a:rPr>
             </a:br>
             <a:r>
+              <a:rPr lang="de-DE" sz="1600" dirty="0" err="1">
+                <a:solidFill>
+                  <a:schemeClr val="tx1"/>
+                </a:solidFill>
+                <a:latin typeface="Arial" panose="020B0604020202020204" pitchFamily="34" charset="0"/>
+                <a:cs typeface="Arial" panose="020B0604020202020204" pitchFamily="34" charset="0"/>
+              </a:rPr>
+              <a:t>setup</a:t>
+            </a:r>
+            <a:r>
               <a:rPr lang="de-DE" sz="1600" dirty="0">
                 <a:solidFill>
                   <a:schemeClr val="tx1"/>
@@ -8809,8 +8899,25 @@
                 <a:latin typeface="Arial" panose="020B0604020202020204" pitchFamily="34" charset="0"/>
                 <a:cs typeface="Arial" panose="020B0604020202020204" pitchFamily="34" charset="0"/>
               </a:rPr>
-              <a:t>Setup</a:t>
-            </a:r>
+              <a:t>, </a:t>
+            </a:r>
+            <a:r>
+              <a:rPr lang="de-DE" sz="1600" dirty="0" err="1">
+                <a:solidFill>
+                  <a:schemeClr val="tx1"/>
+                </a:solidFill>
+                <a:latin typeface="Arial" panose="020B0604020202020204" pitchFamily="34" charset="0"/>
+                <a:cs typeface="Arial" panose="020B0604020202020204" pitchFamily="34" charset="0"/>
+              </a:rPr>
+              <a:t>ssh</a:t>
+            </a:r>
+            <a:endParaRPr lang="de-DE" sz="1600" dirty="0">
+              <a:solidFill>
+                <a:schemeClr val="tx1"/>
+              </a:solidFill>
+              <a:latin typeface="Arial" panose="020B0604020202020204" pitchFamily="34" charset="0"/>
+              <a:cs typeface="Arial" panose="020B0604020202020204" pitchFamily="34" charset="0"/>
+            </a:endParaRPr>
           </a:p>
         </p:txBody>
       </p:sp>
@@ -8828,12 +8935,17 @@
         </p:nvSpPr>
         <p:spPr>
           <a:xfrm>
-            <a:off x="3325664" y="5038790"/>
+            <a:off x="6577212" y="5749139"/>
             <a:ext cx="1296144" cy="576064"/>
           </a:xfrm>
           <a:prstGeom prst="roundRect">
             <a:avLst/>
           </a:prstGeom>
+          <a:solidFill>
+            <a:schemeClr val="bg1">
+              <a:lumMod val="95000"/>
+            </a:schemeClr>
+          </a:solidFill>
           <a:ln/>
         </p:spPr>
         <p:style>
@@ -8882,7 +8994,7 @@
                 <a:latin typeface="Arial" panose="020B0604020202020204" pitchFamily="34" charset="0"/>
                 <a:cs typeface="Arial" panose="020B0604020202020204" pitchFamily="34" charset="0"/>
               </a:rPr>
-              <a:t>Sec-Headers</a:t>
+              <a:t>sec-headers</a:t>
             </a:r>
           </a:p>
         </p:txBody>
@@ -8901,13 +9013,18 @@
         </p:nvSpPr>
         <p:spPr>
           <a:xfrm>
-            <a:off x="1856656" y="5046038"/>
+            <a:off x="8041475" y="5749826"/>
             <a:ext cx="1296144" cy="576064"/>
           </a:xfrm>
           <a:prstGeom prst="roundRect">
             <a:avLst/>
           </a:prstGeom>
-          <a:ln/>
+          <a:solidFill>
+            <a:schemeClr val="bg1">
+              <a:lumMod val="95000"/>
+            </a:schemeClr>
+          </a:solidFill>
+          <a:ln w="57150"/>
         </p:spPr>
         <p:style>
           <a:lnRef idx="2">
@@ -8980,12 +9097,17 @@
         </p:nvSpPr>
         <p:spPr>
           <a:xfrm>
-            <a:off x="6385026" y="5038790"/>
+            <a:off x="2171365" y="4997426"/>
             <a:ext cx="1296144" cy="576064"/>
           </a:xfrm>
           <a:prstGeom prst="roundRect">
             <a:avLst/>
           </a:prstGeom>
+          <a:solidFill>
+            <a:schemeClr val="bg1">
+              <a:lumMod val="95000"/>
+            </a:schemeClr>
+          </a:solidFill>
           <a:ln/>
         </p:spPr>
         <p:style>
@@ -9060,7 +9182,7 @@
         </p:nvSpPr>
         <p:spPr>
           <a:xfrm>
-            <a:off x="5127310" y="3419942"/>
+            <a:off x="6590317" y="2676102"/>
             <a:ext cx="1296144" cy="576064"/>
           </a:xfrm>
           <a:prstGeom prst="roundRect">
@@ -9107,14 +9229,14 @@
               </a:rPr>
             </a:br>
             <a:r>
-              <a:rPr lang="de-DE" sz="1600" dirty="0" err="1">
-                <a:solidFill>
-                  <a:schemeClr val="tx1"/>
-                </a:solidFill>
-                <a:latin typeface="Arial" panose="020B0604020202020204" pitchFamily="34" charset="0"/>
-                <a:cs typeface="Arial" panose="020B0604020202020204" pitchFamily="34" charset="0"/>
-              </a:rPr>
-              <a:t>into</a:t>
+              <a:rPr lang="de-DE" sz="1400" dirty="0">
+                <a:solidFill>
+                  <a:schemeClr val="tx1"/>
+                </a:solidFill>
+                <a:latin typeface="Arial" panose="020B0604020202020204" pitchFamily="34" charset="0"/>
+                <a:cs typeface="Arial" panose="020B0604020202020204" pitchFamily="34" charset="0"/>
+              </a:rPr>
+              <a:t>w.</a:t>
             </a:r>
             <a:r>
               <a:rPr lang="de-DE" sz="1600" dirty="0">
@@ -9143,7 +9265,7 @@
         </p:nvSpPr>
         <p:spPr>
           <a:xfrm>
-            <a:off x="3660800" y="3414242"/>
+            <a:off x="5133705" y="2660937"/>
             <a:ext cx="1296144" cy="576064"/>
           </a:xfrm>
           <a:prstGeom prst="roundRect">
@@ -9223,13 +9345,13 @@
         </p:nvSpPr>
         <p:spPr>
           <a:xfrm>
-            <a:off x="8094180" y="3427190"/>
+            <a:off x="6598999" y="3451193"/>
             <a:ext cx="1296144" cy="576064"/>
           </a:xfrm>
           <a:prstGeom prst="roundRect">
             <a:avLst/>
           </a:prstGeom>
-          <a:ln/>
+          <a:ln w="57150"/>
         </p:spPr>
         <p:style>
           <a:lnRef idx="2">
@@ -9258,7 +9380,27 @@
                 <a:latin typeface="Arial" panose="020B0604020202020204" pitchFamily="34" charset="0"/>
                 <a:cs typeface="Arial" panose="020B0604020202020204" pitchFamily="34" charset="0"/>
               </a:rPr>
-              <a:t>Graphics</a:t>
+              <a:t>„</a:t>
+            </a:r>
+            <a:r>
+              <a:rPr lang="de-DE" sz="1600" dirty="0" err="1">
+                <a:solidFill>
+                  <a:schemeClr val="tx1"/>
+                </a:solidFill>
+                <a:latin typeface="Arial" panose="020B0604020202020204" pitchFamily="34" charset="0"/>
+                <a:cs typeface="Arial" panose="020B0604020202020204" pitchFamily="34" charset="0"/>
+              </a:rPr>
+              <a:t>geoJson</a:t>
+            </a:r>
+            <a:r>
+              <a:rPr lang="de-DE" sz="1600" dirty="0">
+                <a:solidFill>
+                  <a:schemeClr val="tx1"/>
+                </a:solidFill>
+                <a:latin typeface="Arial" panose="020B0604020202020204" pitchFamily="34" charset="0"/>
+                <a:cs typeface="Arial" panose="020B0604020202020204" pitchFamily="34" charset="0"/>
+              </a:rPr>
+              <a:t>“</a:t>
             </a:r>
             <a:br>
               <a:rPr lang="de-DE" sz="1600" dirty="0">
@@ -9277,7 +9419,7 @@
                 <a:latin typeface="Arial" panose="020B0604020202020204" pitchFamily="34" charset="0"/>
                 <a:cs typeface="Arial" panose="020B0604020202020204" pitchFamily="34" charset="0"/>
               </a:rPr>
-              <a:t>production</a:t>
+              <a:t>transforms</a:t>
             </a:r>
             <a:endParaRPr lang="de-DE" sz="1600" dirty="0">
               <a:solidFill>
@@ -9303,7 +9445,7 @@
         </p:nvSpPr>
         <p:spPr>
           <a:xfrm>
-            <a:off x="6609184" y="3427190"/>
+            <a:off x="2172557" y="4235748"/>
             <a:ext cx="1296144" cy="576064"/>
           </a:xfrm>
           <a:prstGeom prst="roundRect">
@@ -9338,7 +9480,26 @@
                 <a:latin typeface="Arial" panose="020B0604020202020204" pitchFamily="34" charset="0"/>
                 <a:cs typeface="Arial" panose="020B0604020202020204" pitchFamily="34" charset="0"/>
               </a:rPr>
-              <a:t>I18N</a:t>
+              <a:t>i18n</a:t>
+            </a:r>
+            <a:br>
+              <a:rPr lang="de-DE" sz="1600" dirty="0">
+                <a:solidFill>
+                  <a:schemeClr val="tx1"/>
+                </a:solidFill>
+                <a:latin typeface="Arial" panose="020B0604020202020204" pitchFamily="34" charset="0"/>
+                <a:cs typeface="Arial" panose="020B0604020202020204" pitchFamily="34" charset="0"/>
+              </a:rPr>
+            </a:br>
+            <a:r>
+              <a:rPr lang="de-DE" sz="1600" dirty="0">
+                <a:solidFill>
+                  <a:schemeClr val="tx1"/>
+                </a:solidFill>
+                <a:latin typeface="Arial" panose="020B0604020202020204" pitchFamily="34" charset="0"/>
+                <a:cs typeface="Arial" panose="020B0604020202020204" pitchFamily="34" charset="0"/>
+              </a:rPr>
+              <a:t>HTML and JS</a:t>
             </a:r>
           </a:p>
         </p:txBody>
@@ -9357,7 +9518,7 @@
         </p:nvSpPr>
         <p:spPr>
           <a:xfrm>
-            <a:off x="775748" y="4234910"/>
+            <a:off x="682736" y="4235748"/>
             <a:ext cx="1296144" cy="576064"/>
           </a:xfrm>
           <a:prstGeom prst="roundRect">
@@ -9411,7 +9572,7 @@
                 <a:latin typeface="Arial" panose="020B0604020202020204" pitchFamily="34" charset="0"/>
                 <a:cs typeface="Arial" panose="020B0604020202020204" pitchFamily="34" charset="0"/>
               </a:rPr>
-              <a:t>Tpl</a:t>
+              <a:t>tpl</a:t>
             </a:r>
             <a:r>
               <a:rPr lang="de-DE" sz="1600" dirty="0">
@@ -9457,13 +9618,13 @@
         </p:nvSpPr>
         <p:spPr>
           <a:xfrm>
-            <a:off x="632520" y="3417288"/>
+            <a:off x="739804" y="3442396"/>
             <a:ext cx="1296144" cy="576064"/>
           </a:xfrm>
           <a:prstGeom prst="roundRect">
             <a:avLst/>
           </a:prstGeom>
-          <a:ln/>
+          <a:ln w="57150"/>
         </p:spPr>
         <p:style>
           <a:lnRef idx="2">
@@ -9557,7 +9718,7 @@
         </p:nvSpPr>
         <p:spPr>
           <a:xfrm>
-            <a:off x="2290270" y="4260994"/>
+            <a:off x="6598999" y="4270462"/>
             <a:ext cx="1296144" cy="576064"/>
           </a:xfrm>
           <a:prstGeom prst="roundRect">
@@ -9612,8 +9773,25 @@
                 <a:latin typeface="Arial" panose="020B0604020202020204" pitchFamily="34" charset="0"/>
                 <a:cs typeface="Arial" panose="020B0604020202020204" pitchFamily="34" charset="0"/>
               </a:rPr>
-              <a:t> Caching</a:t>
-            </a:r>
+              <a:t> </a:t>
+            </a:r>
+            <a:r>
+              <a:rPr lang="de-DE" sz="1600" dirty="0">
+                <a:solidFill>
+                  <a:schemeClr val="tx1"/>
+                </a:solidFill>
+                <a:latin typeface="Arial" panose="020B0604020202020204" pitchFamily="34" charset="0"/>
+                <a:cs typeface="Arial" panose="020B0604020202020204" pitchFamily="34" charset="0"/>
+              </a:rPr>
+              <a:t>Caching</a:t>
+            </a:r>
+            <a:endParaRPr lang="de-DE" sz="1400" dirty="0">
+              <a:solidFill>
+                <a:schemeClr val="tx1"/>
+              </a:solidFill>
+              <a:latin typeface="Arial" panose="020B0604020202020204" pitchFamily="34" charset="0"/>
+              <a:cs typeface="Arial" panose="020B0604020202020204" pitchFamily="34" charset="0"/>
+            </a:endParaRPr>
           </a:p>
         </p:txBody>
       </p:sp>
@@ -9631,13 +9809,16 @@
         </p:nvSpPr>
         <p:spPr>
           <a:xfrm>
-            <a:off x="6766332" y="4304828"/>
+            <a:off x="5097978" y="5007215"/>
             <a:ext cx="1296144" cy="576064"/>
           </a:xfrm>
           <a:prstGeom prst="roundRect">
             <a:avLst/>
           </a:prstGeom>
-          <a:ln/>
+          <a:solidFill>
+            <a:schemeClr val="bg1"/>
+          </a:solidFill>
+          <a:ln w="57150"/>
         </p:spPr>
         <p:style>
           <a:lnRef idx="2">
@@ -9666,7 +9847,7 @@
                 <a:latin typeface="Arial" panose="020B0604020202020204" pitchFamily="34" charset="0"/>
                 <a:cs typeface="Arial" panose="020B0604020202020204" pitchFamily="34" charset="0"/>
               </a:rPr>
-              <a:t>Crawl</a:t>
+              <a:t>Crawl &amp;</a:t>
             </a:r>
             <a:br>
               <a:rPr lang="de-DE" sz="1600" dirty="0">
@@ -9685,27 +9866,7 @@
                 <a:latin typeface="Arial" panose="020B0604020202020204" pitchFamily="34" charset="0"/>
                 <a:cs typeface="Arial" panose="020B0604020202020204" pitchFamily="34" charset="0"/>
               </a:rPr>
-              <a:t>Downl</a:t>
-            </a:r>
-            <a:r>
-              <a:rPr lang="de-DE" sz="1600" dirty="0">
-                <a:solidFill>
-                  <a:schemeClr val="tx1"/>
-                </a:solidFill>
-                <a:latin typeface="Arial" panose="020B0604020202020204" pitchFamily="34" charset="0"/>
-                <a:cs typeface="Arial" panose="020B0604020202020204" pitchFamily="34" charset="0"/>
-              </a:rPr>
-              <a:t> </a:t>
-            </a:r>
-            <a:r>
-              <a:rPr lang="de-DE" sz="1600" dirty="0" err="1">
-                <a:solidFill>
-                  <a:schemeClr val="tx1"/>
-                </a:solidFill>
-                <a:latin typeface="Arial" panose="020B0604020202020204" pitchFamily="34" charset="0"/>
-                <a:cs typeface="Arial" panose="020B0604020202020204" pitchFamily="34" charset="0"/>
-              </a:rPr>
-              <a:t>Prep</a:t>
+              <a:t>download</a:t>
             </a:r>
             <a:endParaRPr lang="de-DE" sz="1600" dirty="0">
               <a:solidFill>
@@ -9731,13 +9892,18 @@
         </p:nvSpPr>
         <p:spPr>
           <a:xfrm>
-            <a:off x="8249142" y="4304828"/>
+            <a:off x="696076" y="5007215"/>
             <a:ext cx="1296144" cy="576064"/>
           </a:xfrm>
           <a:prstGeom prst="roundRect">
             <a:avLst/>
           </a:prstGeom>
-          <a:ln/>
+          <a:solidFill>
+            <a:schemeClr val="bg1">
+              <a:lumMod val="95000"/>
+            </a:schemeClr>
+          </a:solidFill>
+          <a:ln w="57150"/>
         </p:spPr>
         <p:style>
           <a:lnRef idx="2">
@@ -9776,7 +9942,7 @@
                 <a:latin typeface="Arial" panose="020B0604020202020204" pitchFamily="34" charset="0"/>
                 <a:cs typeface="Arial" panose="020B0604020202020204" pitchFamily="34" charset="0"/>
               </a:rPr>
-              <a:t> </a:t>
+              <a:t> deploy</a:t>
             </a:r>
             <a:br>
               <a:rPr lang="de-DE" sz="1600" dirty="0">
@@ -9788,6 +9954,16 @@
               </a:rPr>
             </a:br>
             <a:r>
+              <a:rPr lang="de-DE" sz="1600" dirty="0" err="1">
+                <a:solidFill>
+                  <a:schemeClr val="tx1"/>
+                </a:solidFill>
+                <a:latin typeface="Arial" panose="020B0604020202020204" pitchFamily="34" charset="0"/>
+                <a:cs typeface="Arial" panose="020B0604020202020204" pitchFamily="34" charset="0"/>
+              </a:rPr>
+              <a:t>bidirect</a:t>
+            </a:r>
+            <a:r>
               <a:rPr lang="de-DE" sz="1600" dirty="0">
                 <a:solidFill>
                   <a:schemeClr val="tx1"/>
@@ -9795,7 +9971,7 @@
                 <a:latin typeface="Arial" panose="020B0604020202020204" pitchFamily="34" charset="0"/>
                 <a:cs typeface="Arial" panose="020B0604020202020204" pitchFamily="34" charset="0"/>
               </a:rPr>
-              <a:t>deploy</a:t>
+              <a:t>.</a:t>
             </a:r>
           </a:p>
         </p:txBody>
@@ -9814,12 +9990,17 @@
         </p:nvSpPr>
         <p:spPr>
           <a:xfrm>
-            <a:off x="4880992" y="5046038"/>
+            <a:off x="5097978" y="4270462"/>
             <a:ext cx="1296144" cy="576064"/>
           </a:xfrm>
           <a:prstGeom prst="roundRect">
             <a:avLst/>
           </a:prstGeom>
+          <a:solidFill>
+            <a:schemeClr val="bg1">
+              <a:lumMod val="95000"/>
+            </a:schemeClr>
+          </a:solidFill>
           <a:ln/>
         </p:spPr>
         <p:style>
@@ -9914,12 +10095,17 @@
         </p:nvSpPr>
         <p:spPr>
           <a:xfrm>
-            <a:off x="7833570" y="5038790"/>
+            <a:off x="3662724" y="4997426"/>
             <a:ext cx="1296144" cy="576064"/>
           </a:xfrm>
           <a:prstGeom prst="roundRect">
             <a:avLst/>
           </a:prstGeom>
+          <a:solidFill>
+            <a:schemeClr val="bg1">
+              <a:lumMod val="95000"/>
+            </a:schemeClr>
+          </a:solidFill>
           <a:ln/>
         </p:spPr>
         <p:style>
@@ -9994,13 +10180,18 @@
         </p:nvSpPr>
         <p:spPr>
           <a:xfrm>
-            <a:off x="5386608" y="5873368"/>
+            <a:off x="5097978" y="5732290"/>
             <a:ext cx="1296144" cy="576064"/>
           </a:xfrm>
           <a:prstGeom prst="roundRect">
             <a:avLst/>
           </a:prstGeom>
-          <a:ln/>
+          <a:solidFill>
+            <a:schemeClr val="bg1">
+              <a:lumMod val="95000"/>
+            </a:schemeClr>
+          </a:solidFill>
+          <a:ln w="57150"/>
         </p:spPr>
         <p:style>
           <a:lnRef idx="2">
@@ -10094,12 +10285,17 @@
         </p:nvSpPr>
         <p:spPr>
           <a:xfrm>
-            <a:off x="3857710" y="5873368"/>
+            <a:off x="3622689" y="5732290"/>
             <a:ext cx="1296144" cy="576064"/>
           </a:xfrm>
           <a:prstGeom prst="roundRect">
             <a:avLst/>
           </a:prstGeom>
+          <a:solidFill>
+            <a:schemeClr val="bg1">
+              <a:lumMod val="95000"/>
+            </a:schemeClr>
+          </a:solidFill>
           <a:ln/>
         </p:spPr>
         <p:style>
@@ -10184,7 +10380,7 @@
         </p:nvSpPr>
         <p:spPr>
           <a:xfrm>
-            <a:off x="3771187" y="4279136"/>
+            <a:off x="3656856" y="4256082"/>
             <a:ext cx="1296144" cy="576064"/>
           </a:xfrm>
           <a:prstGeom prst="roundRect">
@@ -10212,6 +10408,16 @@
           <a:p>
             <a:pPr algn="ctr"/>
             <a:r>
+              <a:rPr lang="de-DE" sz="1600" dirty="0">
+                <a:solidFill>
+                  <a:schemeClr val="tx1"/>
+                </a:solidFill>
+                <a:latin typeface="Arial" panose="020B0604020202020204" pitchFamily="34" charset="0"/>
+                <a:cs typeface="Arial" panose="020B0604020202020204" pitchFamily="34" charset="0"/>
+              </a:rPr>
+              <a:t>Blog </a:t>
+            </a:r>
+            <a:r>
               <a:rPr lang="de-DE" sz="1600" dirty="0" err="1">
                 <a:solidFill>
                   <a:schemeClr val="tx1"/>
@@ -10219,7 +10425,7 @@
                 <a:latin typeface="Arial" panose="020B0604020202020204" pitchFamily="34" charset="0"/>
                 <a:cs typeface="Arial" panose="020B0604020202020204" pitchFamily="34" charset="0"/>
               </a:rPr>
-              <a:t>Markdown</a:t>
+              <a:t>engine</a:t>
             </a:r>
             <a:br>
               <a:rPr lang="de-DE" sz="1600" dirty="0">
@@ -10231,15 +10437,22 @@
               </a:rPr>
             </a:br>
             <a:r>
-              <a:rPr lang="de-DE" sz="1600" dirty="0">
-                <a:solidFill>
-                  <a:schemeClr val="tx1"/>
-                </a:solidFill>
-                <a:latin typeface="Arial" panose="020B0604020202020204" pitchFamily="34" charset="0"/>
-                <a:cs typeface="Arial" panose="020B0604020202020204" pitchFamily="34" charset="0"/>
-              </a:rPr>
-              <a:t>Blog eng</a:t>
-            </a:r>
+              <a:rPr lang="de-DE" sz="1600" dirty="0" err="1">
+                <a:solidFill>
+                  <a:schemeClr val="tx1"/>
+                </a:solidFill>
+                <a:latin typeface="Arial" panose="020B0604020202020204" pitchFamily="34" charset="0"/>
+                <a:cs typeface="Arial" panose="020B0604020202020204" pitchFamily="34" charset="0"/>
+              </a:rPr>
+              <a:t>markdown</a:t>
+            </a:r>
+            <a:endParaRPr lang="de-DE" sz="1600" dirty="0">
+              <a:solidFill>
+                <a:schemeClr val="tx1"/>
+              </a:solidFill>
+              <a:latin typeface="Arial" panose="020B0604020202020204" pitchFamily="34" charset="0"/>
+              <a:cs typeface="Arial" panose="020B0604020202020204" pitchFamily="34" charset="0"/>
+            </a:endParaRPr>
           </a:p>
         </p:txBody>
       </p:sp>
@@ -10257,12 +10470,17 @@
         </p:nvSpPr>
         <p:spPr>
           <a:xfrm>
-            <a:off x="833374" y="5877272"/>
+            <a:off x="686844" y="5728386"/>
             <a:ext cx="1296144" cy="576064"/>
           </a:xfrm>
           <a:prstGeom prst="roundRect">
             <a:avLst/>
           </a:prstGeom>
+          <a:solidFill>
+            <a:schemeClr val="bg1">
+              <a:lumMod val="95000"/>
+            </a:schemeClr>
+          </a:solidFill>
           <a:ln/>
         </p:spPr>
         <p:style>
@@ -10357,13 +10575,18 @@
         </p:nvSpPr>
         <p:spPr>
           <a:xfrm>
-            <a:off x="5269706" y="4283298"/>
+            <a:off x="8029364" y="5007215"/>
             <a:ext cx="1296144" cy="576064"/>
           </a:xfrm>
           <a:prstGeom prst="roundRect">
             <a:avLst/>
           </a:prstGeom>
-          <a:ln/>
+          <a:solidFill>
+            <a:schemeClr val="bg1">
+              <a:lumMod val="95000"/>
+            </a:schemeClr>
+          </a:solidFill>
+          <a:ln w="57150"/>
         </p:spPr>
         <p:style>
           <a:lnRef idx="2">
@@ -10437,13 +10660,13 @@
         </p:nvSpPr>
         <p:spPr>
           <a:xfrm>
-            <a:off x="2099030" y="3403676"/>
+            <a:off x="2206314" y="3442396"/>
             <a:ext cx="1296144" cy="576064"/>
           </a:xfrm>
           <a:prstGeom prst="roundRect">
             <a:avLst/>
           </a:prstGeom>
-          <a:ln/>
+          <a:ln w="57150"/>
         </p:spPr>
         <p:style>
           <a:lnRef idx="2">
@@ -10520,7 +10743,7 @@
         </p:nvSpPr>
         <p:spPr>
           <a:xfrm>
-            <a:off x="5673456" y="1644026"/>
+            <a:off x="2932371" y="1635729"/>
             <a:ext cx="1296144" cy="576064"/>
           </a:xfrm>
           <a:prstGeom prst="roundRect">
@@ -10555,7 +10778,7 @@
                 <a:latin typeface="Arial" panose="020B0604020202020204" pitchFamily="34" charset="0"/>
                 <a:cs typeface="Arial" panose="020B0604020202020204" pitchFamily="34" charset="0"/>
               </a:rPr>
-              <a:t>Visible</a:t>
+              <a:t>a visible</a:t>
             </a:r>
             <a:br>
               <a:rPr lang="de-DE" sz="1600" dirty="0">
@@ -10567,15 +10790,22 @@
               </a:rPr>
             </a:br>
             <a:r>
-              <a:rPr lang="de-DE" sz="1600" dirty="0">
-                <a:solidFill>
-                  <a:schemeClr val="tx1"/>
-                </a:solidFill>
-                <a:latin typeface="Arial" panose="020B0604020202020204" pitchFamily="34" charset="0"/>
-                <a:cs typeface="Arial" panose="020B0604020202020204" pitchFamily="34" charset="0"/>
-              </a:rPr>
-              <a:t>Website</a:t>
-            </a:r>
+              <a:rPr lang="de-DE" sz="1600" dirty="0" err="1">
+                <a:solidFill>
+                  <a:schemeClr val="tx1"/>
+                </a:solidFill>
+                <a:latin typeface="Arial" panose="020B0604020202020204" pitchFamily="34" charset="0"/>
+                <a:cs typeface="Arial" panose="020B0604020202020204" pitchFamily="34" charset="0"/>
+              </a:rPr>
+              <a:t>website</a:t>
+            </a:r>
+            <a:endParaRPr lang="de-DE" sz="1600" dirty="0">
+              <a:solidFill>
+                <a:schemeClr val="tx1"/>
+              </a:solidFill>
+              <a:latin typeface="Arial" panose="020B0604020202020204" pitchFamily="34" charset="0"/>
+              <a:cs typeface="Arial" panose="020B0604020202020204" pitchFamily="34" charset="0"/>
+            </a:endParaRPr>
           </a:p>
         </p:txBody>
       </p:sp>
@@ -10593,7 +10823,7 @@
         </p:nvSpPr>
         <p:spPr>
           <a:xfrm>
-            <a:off x="4174044" y="1640940"/>
+            <a:off x="5925275" y="1632643"/>
             <a:ext cx="1296144" cy="576064"/>
           </a:xfrm>
           <a:prstGeom prst="roundRect">
@@ -10621,6 +10851,16 @@
           <a:p>
             <a:pPr algn="ctr"/>
             <a:r>
+              <a:rPr lang="de-DE" sz="1600" dirty="0">
+                <a:solidFill>
+                  <a:schemeClr val="tx1"/>
+                </a:solidFill>
+                <a:latin typeface="Arial" panose="020B0604020202020204" pitchFamily="34" charset="0"/>
+                <a:cs typeface="Arial" panose="020B0604020202020204" pitchFamily="34" charset="0"/>
+              </a:rPr>
+              <a:t>a </a:t>
+            </a:r>
+            <a:r>
               <a:rPr lang="de-DE" sz="1600" dirty="0" err="1">
                 <a:solidFill>
                   <a:schemeClr val="tx1"/>
@@ -10628,7 +10868,7 @@
                 <a:latin typeface="Arial" panose="020B0604020202020204" pitchFamily="34" charset="0"/>
                 <a:cs typeface="Arial" panose="020B0604020202020204" pitchFamily="34" charset="0"/>
               </a:rPr>
-              <a:t>Few</a:t>
+              <a:t>few</a:t>
             </a:r>
             <a:r>
               <a:rPr lang="de-DE" sz="1600" dirty="0">
@@ -10713,13 +10953,207 @@
         </p:nvSpPr>
         <p:spPr>
           <a:xfrm>
-            <a:off x="8125300" y="2683316"/>
+            <a:off x="3677252" y="2672806"/>
             <a:ext cx="1296144" cy="576064"/>
           </a:xfrm>
-          <a:prstGeom prst="roundRect">
+          <a:custGeom>
             <a:avLst/>
-          </a:prstGeom>
-          <a:ln/>
+            <a:gdLst>
+              <a:gd name="csX0" fmla="*/ 0 w 1296144"/>
+              <a:gd name="csY0" fmla="*/ 96013 h 576064"/>
+              <a:gd name="csX1" fmla="*/ 96013 w 1296144"/>
+              <a:gd name="csY1" fmla="*/ 0 h 576064"/>
+              <a:gd name="csX2" fmla="*/ 659113 w 1296144"/>
+              <a:gd name="csY2" fmla="*/ 0 h 576064"/>
+              <a:gd name="csX3" fmla="*/ 1200131 w 1296144"/>
+              <a:gd name="csY3" fmla="*/ 0 h 576064"/>
+              <a:gd name="csX4" fmla="*/ 1296144 w 1296144"/>
+              <a:gd name="csY4" fmla="*/ 96013 h 576064"/>
+              <a:gd name="csX5" fmla="*/ 1296144 w 1296144"/>
+              <a:gd name="csY5" fmla="*/ 480051 h 576064"/>
+              <a:gd name="csX6" fmla="*/ 1200131 w 1296144"/>
+              <a:gd name="csY6" fmla="*/ 576064 h 576064"/>
+              <a:gd name="csX7" fmla="*/ 648072 w 1296144"/>
+              <a:gd name="csY7" fmla="*/ 576064 h 576064"/>
+              <a:gd name="csX8" fmla="*/ 96013 w 1296144"/>
+              <a:gd name="csY8" fmla="*/ 576064 h 576064"/>
+              <a:gd name="csX9" fmla="*/ 0 w 1296144"/>
+              <a:gd name="csY9" fmla="*/ 480051 h 576064"/>
+              <a:gd name="csX10" fmla="*/ 0 w 1296144"/>
+              <a:gd name="csY10" fmla="*/ 96013 h 576064"/>
+            </a:gdLst>
+            <a:ahLst/>
+            <a:cxnLst>
+              <a:cxn ang="0">
+                <a:pos x="csX0" y="csY0"/>
+              </a:cxn>
+              <a:cxn ang="0">
+                <a:pos x="csX1" y="csY1"/>
+              </a:cxn>
+              <a:cxn ang="0">
+                <a:pos x="csX2" y="csY2"/>
+              </a:cxn>
+              <a:cxn ang="0">
+                <a:pos x="csX3" y="csY3"/>
+              </a:cxn>
+              <a:cxn ang="0">
+                <a:pos x="csX4" y="csY4"/>
+              </a:cxn>
+              <a:cxn ang="0">
+                <a:pos x="csX5" y="csY5"/>
+              </a:cxn>
+              <a:cxn ang="0">
+                <a:pos x="csX6" y="csY6"/>
+              </a:cxn>
+              <a:cxn ang="0">
+                <a:pos x="csX7" y="csY7"/>
+              </a:cxn>
+              <a:cxn ang="0">
+                <a:pos x="csX8" y="csY8"/>
+              </a:cxn>
+              <a:cxn ang="0">
+                <a:pos x="csX9" y="csY9"/>
+              </a:cxn>
+              <a:cxn ang="0">
+                <a:pos x="csX10" y="csY10"/>
+              </a:cxn>
+            </a:cxnLst>
+            <a:rect l="l" t="t" r="r" b="b"/>
+            <a:pathLst>
+              <a:path w="1296144" h="576064" fill="none" extrusionOk="0">
+                <a:moveTo>
+                  <a:pt x="0" y="96013"/>
+                </a:moveTo>
+                <a:cubicBezTo>
+                  <a:pt x="2396" y="52775"/>
+                  <a:pt x="40171" y="2310"/>
+                  <a:pt x="96013" y="0"/>
+                </a:cubicBezTo>
+                <a:cubicBezTo>
+                  <a:pt x="244468" y="-52652"/>
+                  <a:pt x="464726" y="64118"/>
+                  <a:pt x="659113" y="0"/>
+                </a:cubicBezTo>
+                <a:cubicBezTo>
+                  <a:pt x="853500" y="-64118"/>
+                  <a:pt x="1019101" y="56389"/>
+                  <a:pt x="1200131" y="0"/>
+                </a:cubicBezTo>
+                <a:cubicBezTo>
+                  <a:pt x="1248660" y="290"/>
+                  <a:pt x="1294103" y="53444"/>
+                  <a:pt x="1296144" y="96013"/>
+                </a:cubicBezTo>
+                <a:cubicBezTo>
+                  <a:pt x="1301752" y="190296"/>
+                  <a:pt x="1278886" y="366026"/>
+                  <a:pt x="1296144" y="480051"/>
+                </a:cubicBezTo>
+                <a:cubicBezTo>
+                  <a:pt x="1295952" y="546284"/>
+                  <a:pt x="1248746" y="582366"/>
+                  <a:pt x="1200131" y="576064"/>
+                </a:cubicBezTo>
+                <a:cubicBezTo>
+                  <a:pt x="1074195" y="591456"/>
+                  <a:pt x="899015" y="571452"/>
+                  <a:pt x="648072" y="576064"/>
+                </a:cubicBezTo>
+                <a:cubicBezTo>
+                  <a:pt x="397129" y="580676"/>
+                  <a:pt x="285546" y="516528"/>
+                  <a:pt x="96013" y="576064"/>
+                </a:cubicBezTo>
+                <a:cubicBezTo>
+                  <a:pt x="42812" y="574310"/>
+                  <a:pt x="12704" y="530481"/>
+                  <a:pt x="0" y="480051"/>
+                </a:cubicBezTo>
+                <a:cubicBezTo>
+                  <a:pt x="-24223" y="293371"/>
+                  <a:pt x="5945" y="199432"/>
+                  <a:pt x="0" y="96013"/>
+                </a:cubicBezTo>
+                <a:close/>
+              </a:path>
+              <a:path w="1296144" h="576064" stroke="0" extrusionOk="0">
+                <a:moveTo>
+                  <a:pt x="0" y="96013"/>
+                </a:moveTo>
+                <a:cubicBezTo>
+                  <a:pt x="-8446" y="40181"/>
+                  <a:pt x="45876" y="8321"/>
+                  <a:pt x="96013" y="0"/>
+                </a:cubicBezTo>
+                <a:cubicBezTo>
+                  <a:pt x="238399" y="-61986"/>
+                  <a:pt x="453589" y="43565"/>
+                  <a:pt x="637031" y="0"/>
+                </a:cubicBezTo>
+                <a:cubicBezTo>
+                  <a:pt x="820473" y="-43565"/>
+                  <a:pt x="963372" y="25424"/>
+                  <a:pt x="1200131" y="0"/>
+                </a:cubicBezTo>
+                <a:cubicBezTo>
+                  <a:pt x="1250845" y="4212"/>
+                  <a:pt x="1295395" y="41331"/>
+                  <a:pt x="1296144" y="96013"/>
+                </a:cubicBezTo>
+                <a:cubicBezTo>
+                  <a:pt x="1302709" y="262061"/>
+                  <a:pt x="1271189" y="339936"/>
+                  <a:pt x="1296144" y="480051"/>
+                </a:cubicBezTo>
+                <a:cubicBezTo>
+                  <a:pt x="1288440" y="529044"/>
+                  <a:pt x="1249367" y="579050"/>
+                  <a:pt x="1200131" y="576064"/>
+                </a:cubicBezTo>
+                <a:cubicBezTo>
+                  <a:pt x="947367" y="617008"/>
+                  <a:pt x="906331" y="560047"/>
+                  <a:pt x="681196" y="576064"/>
+                </a:cubicBezTo>
+                <a:cubicBezTo>
+                  <a:pt x="456062" y="592081"/>
+                  <a:pt x="227245" y="509072"/>
+                  <a:pt x="96013" y="576064"/>
+                </a:cubicBezTo>
+                <a:cubicBezTo>
+                  <a:pt x="39003" y="570946"/>
+                  <a:pt x="-5891" y="534736"/>
+                  <a:pt x="0" y="480051"/>
+                </a:cubicBezTo>
+                <a:cubicBezTo>
+                  <a:pt x="-409" y="351530"/>
+                  <a:pt x="13914" y="222183"/>
+                  <a:pt x="0" y="96013"/>
+                </a:cubicBezTo>
+                <a:close/>
+              </a:path>
+            </a:pathLst>
+          </a:custGeom>
+          <a:ln w="76200">
+            <a:solidFill>
+              <a:schemeClr val="bg1">
+                <a:lumMod val="85000"/>
+              </a:schemeClr>
+            </a:solidFill>
+            <a:prstDash val="sysDash"/>
+            <a:extLst>
+              <a:ext uri="{C807C97D-BFC1-408E-A445-0C87EB9F89A2}">
+                <ask:lineSketchStyleProps xmlns:ask="http://schemas.microsoft.com/office/drawing/2018/sketchyshapes" sd="3896661861">
+                  <a:prstGeom prst="roundRect">
+                    <a:avLst/>
+                  </a:prstGeom>
+                  <ask:type>
+                    <ask:lineSketchScribble/>
+                  </ask:type>
+                </ask:lineSketchStyleProps>
+              </a:ext>
+            </a:extLst>
+          </a:ln>
         </p:spPr>
         <p:style>
           <a:lnRef idx="2">
@@ -10743,7 +11177,9 @@
             <a:r>
               <a:rPr lang="de-DE" sz="1600" strike="sngStrike" dirty="0" err="1">
                 <a:solidFill>
-                  <a:schemeClr val="tx1"/>
+                  <a:schemeClr val="bg1">
+                    <a:lumMod val="75000"/>
+                  </a:schemeClr>
                 </a:solidFill>
                 <a:latin typeface="Arial" panose="020B0604020202020204" pitchFamily="34" charset="0"/>
                 <a:cs typeface="Arial" panose="020B0604020202020204" pitchFamily="34" charset="0"/>
@@ -10753,7 +11189,9 @@
             <a:br>
               <a:rPr lang="de-DE" sz="1600" strike="sngStrike" dirty="0">
                 <a:solidFill>
-                  <a:schemeClr val="tx1"/>
+                  <a:schemeClr val="bg1">
+                    <a:lumMod val="75000"/>
+                  </a:schemeClr>
                 </a:solidFill>
                 <a:latin typeface="Arial" panose="020B0604020202020204" pitchFamily="34" charset="0"/>
                 <a:cs typeface="Arial" panose="020B0604020202020204" pitchFamily="34" charset="0"/>
@@ -10762,7 +11200,9 @@
             <a:r>
               <a:rPr lang="de-DE" sz="1600" strike="sngStrike" dirty="0" err="1">
                 <a:solidFill>
-                  <a:schemeClr val="tx1"/>
+                  <a:schemeClr val="bg1">
+                    <a:lumMod val="75000"/>
+                  </a:schemeClr>
                 </a:solidFill>
                 <a:latin typeface="Arial" panose="020B0604020202020204" pitchFamily="34" charset="0"/>
                 <a:cs typeface="Arial" panose="020B0604020202020204" pitchFamily="34" charset="0"/>
@@ -10772,7 +11212,9 @@
             <a:r>
               <a:rPr lang="de-DE" sz="1600" strike="sngStrike" dirty="0">
                 <a:solidFill>
-                  <a:schemeClr val="tx1"/>
+                  <a:schemeClr val="bg1">
+                    <a:lumMod val="75000"/>
+                  </a:schemeClr>
                 </a:solidFill>
                 <a:latin typeface="Arial" panose="020B0604020202020204" pitchFamily="34" charset="0"/>
                 <a:cs typeface="Arial" panose="020B0604020202020204" pitchFamily="34" charset="0"/>
@@ -10782,7 +11224,9 @@
             <a:r>
               <a:rPr lang="de-DE" sz="1600" strike="sngStrike" dirty="0" err="1">
                 <a:solidFill>
-                  <a:schemeClr val="tx1"/>
+                  <a:schemeClr val="bg1">
+                    <a:lumMod val="75000"/>
+                  </a:schemeClr>
                 </a:solidFill>
                 <a:latin typeface="Arial" panose="020B0604020202020204" pitchFamily="34" charset="0"/>
                 <a:cs typeface="Arial" panose="020B0604020202020204" pitchFamily="34" charset="0"/>
@@ -10791,7 +11235,9 @@
             </a:r>
             <a:endParaRPr lang="de-DE" sz="1600" strike="sngStrike" dirty="0">
               <a:solidFill>
-                <a:schemeClr val="tx1"/>
+                <a:schemeClr val="bg1">
+                  <a:lumMod val="75000"/>
+                </a:schemeClr>
               </a:solidFill>
               <a:latin typeface="Arial" panose="020B0604020202020204" pitchFamily="34" charset="0"/>
               <a:cs typeface="Arial" panose="020B0604020202020204" pitchFamily="34" charset="0"/>
@@ -10813,13 +11259,13 @@
         </p:nvSpPr>
         <p:spPr>
           <a:xfrm>
-            <a:off x="5139494" y="2705399"/>
+            <a:off x="2207562" y="2669433"/>
             <a:ext cx="1296144" cy="576064"/>
           </a:xfrm>
           <a:prstGeom prst="roundRect">
             <a:avLst/>
           </a:prstGeom>
-          <a:ln/>
+          <a:ln w="57150"/>
         </p:spPr>
         <p:style>
           <a:lnRef idx="2">
@@ -10893,13 +11339,13 @@
         </p:nvSpPr>
         <p:spPr>
           <a:xfrm>
-            <a:off x="3656856" y="2708772"/>
+            <a:off x="3679019" y="3451193"/>
             <a:ext cx="1296144" cy="576064"/>
           </a:xfrm>
           <a:prstGeom prst="roundRect">
             <a:avLst/>
           </a:prstGeom>
-          <a:ln/>
+          <a:ln w="76200"/>
         </p:spPr>
         <p:style>
           <a:lnRef idx="2">
@@ -10948,6 +11394,338 @@
                 <a:cs typeface="Arial" panose="020B0604020202020204" pitchFamily="34" charset="0"/>
               </a:rPr>
               <a:t>lib</a:t>
+            </a:r>
+            <a:r>
+              <a:rPr lang="de-DE" sz="1600" dirty="0">
+                <a:solidFill>
+                  <a:schemeClr val="tx1"/>
+                </a:solidFill>
+                <a:latin typeface="Arial" panose="020B0604020202020204" pitchFamily="34" charset="0"/>
+                <a:cs typeface="Arial" panose="020B0604020202020204" pitchFamily="34" charset="0"/>
+              </a:rPr>
+              <a:t> - JS</a:t>
+            </a:r>
+          </a:p>
+        </p:txBody>
+      </p:sp>
+      <p:sp>
+        <p:nvSpPr>
+          <p:cNvPr id="2" name="Rechteck: abgerundete Ecken 1">
+            <a:extLst>
+              <a:ext uri="{FF2B5EF4-FFF2-40B4-BE49-F238E27FC236}">
+                <a16:creationId xmlns:a16="http://schemas.microsoft.com/office/drawing/2014/main" id="{87777E8D-2978-FB72-C0E9-F3A806B6484A}"/>
+              </a:ext>
+            </a:extLst>
+          </p:cNvPr>
+          <p:cNvSpPr/>
+          <p:nvPr/>
+        </p:nvSpPr>
+        <p:spPr>
+          <a:xfrm>
+            <a:off x="8029364" y="4270462"/>
+            <a:ext cx="1296144" cy="576064"/>
+          </a:xfrm>
+          <a:prstGeom prst="roundRect">
+            <a:avLst/>
+          </a:prstGeom>
+          <a:solidFill>
+            <a:schemeClr val="bg1">
+              <a:lumMod val="95000"/>
+            </a:schemeClr>
+          </a:solidFill>
+          <a:ln/>
+        </p:spPr>
+        <p:style>
+          <a:lnRef idx="2">
+            <a:schemeClr val="accent2"/>
+          </a:lnRef>
+          <a:fillRef idx="1">
+            <a:schemeClr val="lt1"/>
+          </a:fillRef>
+          <a:effectRef idx="0">
+            <a:schemeClr val="accent2"/>
+          </a:effectRef>
+          <a:fontRef idx="minor">
+            <a:schemeClr val="dk1"/>
+          </a:fontRef>
+        </p:style>
+        <p:txBody>
+          <a:bodyPr lIns="0" tIns="0" rIns="0" bIns="0" rtlCol="0" anchor="ctr"/>
+          <a:lstStyle/>
+          <a:p>
+            <a:pPr algn="ctr"/>
+            <a:r>
+              <a:rPr lang="de-DE" sz="1600" dirty="0">
+                <a:solidFill>
+                  <a:schemeClr val="tx1"/>
+                </a:solidFill>
+                <a:latin typeface="Arial" panose="020B0604020202020204" pitchFamily="34" charset="0"/>
+                <a:cs typeface="Arial" panose="020B0604020202020204" pitchFamily="34" charset="0"/>
+              </a:rPr>
+              <a:t>Sophos</a:t>
+            </a:r>
+            <a:br>
+              <a:rPr lang="de-DE" sz="1600" dirty="0">
+                <a:solidFill>
+                  <a:schemeClr val="tx1"/>
+                </a:solidFill>
+                <a:latin typeface="Arial" panose="020B0604020202020204" pitchFamily="34" charset="0"/>
+                <a:cs typeface="Arial" panose="020B0604020202020204" pitchFamily="34" charset="0"/>
+              </a:rPr>
+            </a:br>
+            <a:r>
+              <a:rPr lang="de-DE" sz="1600" dirty="0" err="1">
+                <a:solidFill>
+                  <a:schemeClr val="tx1"/>
+                </a:solidFill>
+                <a:latin typeface="Arial" panose="020B0604020202020204" pitchFamily="34" charset="0"/>
+                <a:cs typeface="Arial" panose="020B0604020202020204" pitchFamily="34" charset="0"/>
+              </a:rPr>
+              <a:t>threat</a:t>
+            </a:r>
+            <a:r>
+              <a:rPr lang="de-DE" sz="1600" dirty="0">
+                <a:solidFill>
+                  <a:schemeClr val="tx1"/>
+                </a:solidFill>
+                <a:latin typeface="Arial" panose="020B0604020202020204" pitchFamily="34" charset="0"/>
+                <a:cs typeface="Arial" panose="020B0604020202020204" pitchFamily="34" charset="0"/>
+              </a:rPr>
+              <a:t> </a:t>
+            </a:r>
+            <a:r>
+              <a:rPr lang="de-DE" sz="1600" dirty="0" err="1">
+                <a:solidFill>
+                  <a:schemeClr val="tx1"/>
+                </a:solidFill>
+                <a:latin typeface="Arial" panose="020B0604020202020204" pitchFamily="34" charset="0"/>
+                <a:cs typeface="Arial" panose="020B0604020202020204" pitchFamily="34" charset="0"/>
+              </a:rPr>
+              <a:t>resp</a:t>
+            </a:r>
+            <a:endParaRPr lang="de-DE" sz="1600" dirty="0">
+              <a:solidFill>
+                <a:schemeClr val="tx1"/>
+              </a:solidFill>
+              <a:latin typeface="Arial" panose="020B0604020202020204" pitchFamily="34" charset="0"/>
+              <a:cs typeface="Arial" panose="020B0604020202020204" pitchFamily="34" charset="0"/>
+            </a:endParaRPr>
+          </a:p>
+        </p:txBody>
+      </p:sp>
+      <p:cxnSp>
+        <p:nvCxnSpPr>
+          <p:cNvPr id="6" name="Gerader Verbinder 5">
+            <a:extLst>
+              <a:ext uri="{FF2B5EF4-FFF2-40B4-BE49-F238E27FC236}">
+                <a16:creationId xmlns:a16="http://schemas.microsoft.com/office/drawing/2014/main" id="{29A3760D-6DF8-28C4-781A-B44795555ADF}"/>
+              </a:ext>
+            </a:extLst>
+          </p:cNvPr>
+          <p:cNvCxnSpPr/>
+          <p:nvPr/>
+        </p:nvCxnSpPr>
+        <p:spPr>
+          <a:xfrm>
+            <a:off x="633413" y="2420888"/>
+            <a:ext cx="8771958" cy="0"/>
+          </a:xfrm>
+          <a:prstGeom prst="line">
+            <a:avLst/>
+          </a:prstGeom>
+          <a:ln w="12700"/>
+          <a:effectLst/>
+        </p:spPr>
+        <p:style>
+          <a:lnRef idx="2">
+            <a:schemeClr val="accent1"/>
+          </a:lnRef>
+          <a:fillRef idx="0">
+            <a:schemeClr val="accent1"/>
+          </a:fillRef>
+          <a:effectRef idx="1">
+            <a:schemeClr val="accent1"/>
+          </a:effectRef>
+          <a:fontRef idx="minor">
+            <a:schemeClr val="tx1"/>
+          </a:fontRef>
+        </p:style>
+      </p:cxnSp>
+      <p:sp>
+        <p:nvSpPr>
+          <p:cNvPr id="36" name="Rechteck: abgerundete Ecken 35">
+            <a:extLst>
+              <a:ext uri="{FF2B5EF4-FFF2-40B4-BE49-F238E27FC236}">
+                <a16:creationId xmlns:a16="http://schemas.microsoft.com/office/drawing/2014/main" id="{8C2D1220-CBB1-E07A-E5B8-E2A49D379860}"/>
+              </a:ext>
+            </a:extLst>
+          </p:cNvPr>
+          <p:cNvSpPr/>
+          <p:nvPr/>
+        </p:nvSpPr>
+        <p:spPr>
+          <a:xfrm>
+            <a:off x="6581839" y="4980786"/>
+            <a:ext cx="1296144" cy="576064"/>
+          </a:xfrm>
+          <a:prstGeom prst="roundRect">
+            <a:avLst/>
+          </a:prstGeom>
+          <a:solidFill>
+            <a:schemeClr val="bg1"/>
+          </a:solidFill>
+          <a:ln w="76200"/>
+        </p:spPr>
+        <p:style>
+          <a:lnRef idx="2">
+            <a:schemeClr val="accent2"/>
+          </a:lnRef>
+          <a:fillRef idx="1">
+            <a:schemeClr val="lt1"/>
+          </a:fillRef>
+          <a:effectRef idx="0">
+            <a:schemeClr val="accent2"/>
+          </a:effectRef>
+          <a:fontRef idx="minor">
+            <a:schemeClr val="dk1"/>
+          </a:fontRef>
+        </p:style>
+        <p:txBody>
+          <a:bodyPr lIns="0" tIns="0" rIns="0" bIns="0" rtlCol="0" anchor="ctr"/>
+          <a:lstStyle/>
+          <a:p>
+            <a:pPr algn="ctr"/>
+            <a:r>
+              <a:rPr lang="de-DE" sz="1600" dirty="0" err="1">
+                <a:solidFill>
+                  <a:schemeClr val="tx1"/>
+                </a:solidFill>
+                <a:latin typeface="Arial" panose="020B0604020202020204" pitchFamily="34" charset="0"/>
+                <a:cs typeface="Arial" panose="020B0604020202020204" pitchFamily="34" charset="0"/>
+              </a:rPr>
+              <a:t>Prepare</a:t>
+            </a:r>
+            <a:br>
+              <a:rPr lang="de-DE" sz="1600" dirty="0">
+                <a:solidFill>
+                  <a:schemeClr val="tx1"/>
+                </a:solidFill>
+                <a:latin typeface="Arial" panose="020B0604020202020204" pitchFamily="34" charset="0"/>
+                <a:cs typeface="Arial" panose="020B0604020202020204" pitchFamily="34" charset="0"/>
+              </a:rPr>
+            </a:br>
+            <a:r>
+              <a:rPr lang="de-DE" sz="1600" dirty="0" err="1">
+                <a:solidFill>
+                  <a:schemeClr val="tx1"/>
+                </a:solidFill>
+                <a:latin typeface="Arial" panose="020B0604020202020204" pitchFamily="34" charset="0"/>
+                <a:cs typeface="Arial" panose="020B0604020202020204" pitchFamily="34" charset="0"/>
+              </a:rPr>
+              <a:t>data</a:t>
+            </a:r>
+            <a:r>
+              <a:rPr lang="de-DE" sz="1600" dirty="0">
+                <a:solidFill>
+                  <a:schemeClr val="tx1"/>
+                </a:solidFill>
+                <a:latin typeface="Arial" panose="020B0604020202020204" pitchFamily="34" charset="0"/>
+                <a:cs typeface="Arial" panose="020B0604020202020204" pitchFamily="34" charset="0"/>
+              </a:rPr>
+              <a:t> </a:t>
+            </a:r>
+            <a:r>
+              <a:rPr lang="de-DE" sz="1600" dirty="0" err="1">
+                <a:solidFill>
+                  <a:schemeClr val="tx1"/>
+                </a:solidFill>
+                <a:latin typeface="Arial" panose="020B0604020202020204" pitchFamily="34" charset="0"/>
+                <a:cs typeface="Arial" panose="020B0604020202020204" pitchFamily="34" charset="0"/>
+              </a:rPr>
+              <a:t>as</a:t>
+            </a:r>
+            <a:r>
+              <a:rPr lang="de-DE" sz="1600" dirty="0">
+                <a:solidFill>
+                  <a:schemeClr val="tx1"/>
+                </a:solidFill>
+                <a:latin typeface="Arial" panose="020B0604020202020204" pitchFamily="34" charset="0"/>
+                <a:cs typeface="Arial" panose="020B0604020202020204" pitchFamily="34" charset="0"/>
+              </a:rPr>
+              <a:t> JS</a:t>
+            </a:r>
+          </a:p>
+        </p:txBody>
+      </p:sp>
+      <p:sp>
+        <p:nvSpPr>
+          <p:cNvPr id="3" name="Rechteck: abgerundete Ecken 2">
+            <a:extLst>
+              <a:ext uri="{FF2B5EF4-FFF2-40B4-BE49-F238E27FC236}">
+                <a16:creationId xmlns:a16="http://schemas.microsoft.com/office/drawing/2014/main" id="{2E534B33-CCFE-4A34-891B-539AB43286C5}"/>
+              </a:ext>
+            </a:extLst>
+          </p:cNvPr>
+          <p:cNvSpPr/>
+          <p:nvPr/>
+        </p:nvSpPr>
+        <p:spPr>
+          <a:xfrm>
+            <a:off x="5126294" y="3454896"/>
+            <a:ext cx="1296144" cy="576064"/>
+          </a:xfrm>
+          <a:prstGeom prst="roundRect">
+            <a:avLst/>
+          </a:prstGeom>
+          <a:ln w="57150"/>
+        </p:spPr>
+        <p:style>
+          <a:lnRef idx="2">
+            <a:schemeClr val="accent2"/>
+          </a:lnRef>
+          <a:fillRef idx="1">
+            <a:schemeClr val="lt1"/>
+          </a:fillRef>
+          <a:effectRef idx="0">
+            <a:schemeClr val="accent2"/>
+          </a:effectRef>
+          <a:fontRef idx="minor">
+            <a:schemeClr val="dk1"/>
+          </a:fontRef>
+        </p:style>
+        <p:txBody>
+          <a:bodyPr lIns="0" tIns="0" rIns="0" bIns="0" rtlCol="0" anchor="ctr"/>
+          <a:lstStyle/>
+          <a:p>
+            <a:pPr algn="ctr"/>
+            <a:r>
+              <a:rPr lang="de-DE" sz="1600" dirty="0">
+                <a:solidFill>
+                  <a:schemeClr val="tx1"/>
+                </a:solidFill>
+                <a:latin typeface="Arial" panose="020B0604020202020204" pitchFamily="34" charset="0"/>
+                <a:cs typeface="Arial" panose="020B0604020202020204" pitchFamily="34" charset="0"/>
+              </a:rPr>
+              <a:t>Graphics</a:t>
+            </a:r>
+            <a:br>
+              <a:rPr lang="de-DE" sz="1600" dirty="0">
+                <a:solidFill>
+                  <a:schemeClr val="tx1"/>
+                </a:solidFill>
+                <a:latin typeface="Arial" panose="020B0604020202020204" pitchFamily="34" charset="0"/>
+                <a:cs typeface="Arial" panose="020B0604020202020204" pitchFamily="34" charset="0"/>
+              </a:rPr>
+            </a:br>
+            <a:r>
+              <a:rPr lang="de-DE" sz="1600" dirty="0" err="1">
+                <a:solidFill>
+                  <a:schemeClr val="tx1"/>
+                </a:solidFill>
+                <a:latin typeface="Arial" panose="020B0604020202020204" pitchFamily="34" charset="0"/>
+                <a:cs typeface="Arial" panose="020B0604020202020204" pitchFamily="34" charset="0"/>
+              </a:rPr>
+              <a:t>production</a:t>
             </a:r>
             <a:endParaRPr lang="de-DE" sz="1600" dirty="0">
               <a:solidFill>

--- a/doc/architecture.pptx
+++ b/doc/architecture.pptx
@@ -9345,7 +9345,7 @@
         </p:nvSpPr>
         <p:spPr>
           <a:xfrm>
-            <a:off x="6598999" y="3451193"/>
+            <a:off x="8023287" y="3474145"/>
             <a:ext cx="1296144" cy="576064"/>
           </a:xfrm>
           <a:prstGeom prst="roundRect">
@@ -11726,6 +11726,86 @@
                 <a:cs typeface="Arial" panose="020B0604020202020204" pitchFamily="34" charset="0"/>
               </a:rPr>
               <a:t>production</a:t>
+            </a:r>
+            <a:endParaRPr lang="de-DE" sz="1600" dirty="0">
+              <a:solidFill>
+                <a:schemeClr val="tx1"/>
+              </a:solidFill>
+              <a:latin typeface="Arial" panose="020B0604020202020204" pitchFamily="34" charset="0"/>
+              <a:cs typeface="Arial" panose="020B0604020202020204" pitchFamily="34" charset="0"/>
+            </a:endParaRPr>
+          </a:p>
+        </p:txBody>
+      </p:sp>
+      <p:sp>
+        <p:nvSpPr>
+          <p:cNvPr id="5" name="Rechteck: abgerundete Ecken 4">
+            <a:extLst>
+              <a:ext uri="{FF2B5EF4-FFF2-40B4-BE49-F238E27FC236}">
+                <a16:creationId xmlns:a16="http://schemas.microsoft.com/office/drawing/2014/main" id="{8B1EA6C6-A8D9-534C-451D-BFF988B9C567}"/>
+              </a:ext>
+            </a:extLst>
+          </p:cNvPr>
+          <p:cNvSpPr/>
+          <p:nvPr/>
+        </p:nvSpPr>
+        <p:spPr>
+          <a:xfrm>
+            <a:off x="6590317" y="3469568"/>
+            <a:ext cx="1296144" cy="576064"/>
+          </a:xfrm>
+          <a:prstGeom prst="roundRect">
+            <a:avLst/>
+          </a:prstGeom>
+          <a:ln w="38100"/>
+        </p:spPr>
+        <p:style>
+          <a:lnRef idx="2">
+            <a:schemeClr val="accent2"/>
+          </a:lnRef>
+          <a:fillRef idx="1">
+            <a:schemeClr val="lt1"/>
+          </a:fillRef>
+          <a:effectRef idx="0">
+            <a:schemeClr val="accent2"/>
+          </a:effectRef>
+          <a:fontRef idx="minor">
+            <a:schemeClr val="dk1"/>
+          </a:fontRef>
+        </p:style>
+        <p:txBody>
+          <a:bodyPr lIns="0" tIns="0" rIns="0" bIns="0" rtlCol="0" anchor="ctr"/>
+          <a:lstStyle/>
+          <a:p>
+            <a:pPr algn="ctr"/>
+            <a:r>
+              <a:rPr lang="de-DE" sz="1600" dirty="0" err="1">
+                <a:solidFill>
+                  <a:schemeClr val="tx1"/>
+                </a:solidFill>
+                <a:latin typeface="Arial" panose="020B0604020202020204" pitchFamily="34" charset="0"/>
+                <a:cs typeface="Arial" panose="020B0604020202020204" pitchFamily="34" charset="0"/>
+              </a:rPr>
+              <a:t>Coloring</a:t>
+            </a:r>
+            <a:br>
+              <a:rPr lang="de-DE" sz="1600" dirty="0">
+                <a:solidFill>
+                  <a:schemeClr val="tx1"/>
+                </a:solidFill>
+                <a:latin typeface="Arial" panose="020B0604020202020204" pitchFamily="34" charset="0"/>
+                <a:cs typeface="Arial" panose="020B0604020202020204" pitchFamily="34" charset="0"/>
+              </a:rPr>
+            </a:br>
+            <a:r>
+              <a:rPr lang="de-DE" sz="1600" dirty="0" err="1">
+                <a:solidFill>
+                  <a:schemeClr val="tx1"/>
+                </a:solidFill>
+                <a:latin typeface="Arial" panose="020B0604020202020204" pitchFamily="34" charset="0"/>
+                <a:cs typeface="Arial" panose="020B0604020202020204" pitchFamily="34" charset="0"/>
+              </a:rPr>
+              <a:t>compute</a:t>
             </a:r>
             <a:endParaRPr lang="de-DE" sz="1600" dirty="0">
               <a:solidFill>
